--- a/presentation/report_presentation.pptx
+++ b/presentation/report_presentation.pptx
@@ -3888,1812 +3888,107 @@
           </a:p>
         </p:txBody>
       </p:sp>
-      <p:graphicFrame>
-        <p:nvGraphicFramePr>
-          <p:cNvPr id="4" name="Table 0"/>
-          <p:cNvGraphicFramePr>
-            <a:graphicFrameLocks noGrp="1"/>
-          </p:cNvGraphicFramePr>
-          <p:nvPr>
-            <p:extLst>
-              <p:ext uri="{D42A27DB-BD31-4B8C-83A1-F6EECF244321}">
-                <p14:modId xmlns:p14="http://schemas.microsoft.com/office/powerpoint/2010/main" val="1579011935"/>
-              </p:ext>
-            </p:extLst>
-          </p:nvPr>
-        </p:nvGraphicFramePr>
-        <p:xfrm>
-          <a:off x="320040" y="1005840"/>
-          <a:ext cx="8503920" cy="3566160"/>
-        </p:xfrm>
-        <a:graphic>
-          <a:graphicData uri="http://schemas.openxmlformats.org/drawingml/2006/table">
-            <a:tbl>
-              <a:tblPr/>
-              <a:tblGrid>
-                <a:gridCol w="1371600"/>
-                <a:gridCol w="3657600"/>
-                <a:gridCol w="1645920"/>
-                <a:gridCol w="1371600"/>
-              </a:tblGrid>
-              <a:tr h="530352">
-                <a:tc>
-                  <a:txBody>
-                    <a:bodyPr/>
-                    <a:lstStyle/>
-                    <a:p>
-                      <a:pPr indent="0" marL="0">
-                        <a:buNone/>
-                      </a:pPr>
-                      <a:r>
-                        <a:rPr lang="en-US" sz="1100" b="1" dirty="0">
-                          <a:solidFill>
-                            <a:srgbClr val="FFFFFF"/>
-                          </a:solidFill>
-                        </a:rPr>
-                        <a:t>Collection</a:t>
-                      </a:r>
-                      <a:endParaRPr lang="en-US" sz="1100" dirty="0"/>
-                    </a:p>
-                  </a:txBody>
-                  <a:tcPr marL="91440" marR="91440" marT="45720" marB="45720" anchor="ctr">
-                    <a:lnL w="6350" cap="flat" cmpd="sng" algn="ctr">
-                      <a:solidFill>
-                        <a:srgbClr val="E2E8F0"/>
-                      </a:solidFill>
-                      <a:prstDash val="solid"/>
-                      <a:round/>
-                      <a:headEnd type="none" w="med" len="med"/>
-                      <a:tailEnd type="none" w="med" len="med"/>
-                    </a:lnL>
-                    <a:lnR w="6350" cap="flat" cmpd="sng" algn="ctr">
-                      <a:solidFill>
-                        <a:srgbClr val="E2E8F0"/>
-                      </a:solidFill>
-                      <a:prstDash val="solid"/>
-                      <a:round/>
-                      <a:headEnd type="none" w="med" len="med"/>
-                      <a:tailEnd type="none" w="med" len="med"/>
-                    </a:lnR>
-                    <a:lnT w="6350" cap="flat" cmpd="sng" algn="ctr">
-                      <a:solidFill>
-                        <a:srgbClr val="E2E8F0"/>
-                      </a:solidFill>
-                      <a:prstDash val="solid"/>
-                      <a:round/>
-                      <a:headEnd type="none" w="med" len="med"/>
-                      <a:tailEnd type="none" w="med" len="med"/>
-                    </a:lnT>
-                    <a:lnB w="6350" cap="flat" cmpd="sng" algn="ctr">
-                      <a:solidFill>
-                        <a:srgbClr val="E2E8F0"/>
-                      </a:solidFill>
-                      <a:prstDash val="solid"/>
-                      <a:round/>
-                      <a:headEnd type="none" w="med" len="med"/>
-                      <a:tailEnd type="none" w="med" len="med"/>
-                    </a:lnB>
-                    <a:solidFill>
-                      <a:srgbClr val="006848"/>
-                    </a:solidFill>
-                  </a:tcPr>
-                </a:tc>
-                <a:tc>
-                  <a:txBody>
-                    <a:bodyPr/>
-                    <a:lstStyle/>
-                    <a:p>
-                      <a:pPr indent="0" marL="0">
-                        <a:buNone/>
-                      </a:pPr>
-                      <a:r>
-                        <a:rPr lang="en-US" sz="1100" b="1" dirty="0">
-                          <a:solidFill>
-                            <a:srgbClr val="FFFFFF"/>
-                          </a:solidFill>
-                        </a:rPr>
-                        <a:t>Key Fields in value</a:t>
-                      </a:r>
-                      <a:endParaRPr lang="en-US" sz="1100" dirty="0"/>
-                    </a:p>
-                  </a:txBody>
-                  <a:tcPr marL="91440" marR="91440" marT="45720" marB="45720" anchor="ctr">
-                    <a:lnL w="6350" cap="flat" cmpd="sng" algn="ctr">
-                      <a:solidFill>
-                        <a:srgbClr val="E2E8F0"/>
-                      </a:solidFill>
-                      <a:prstDash val="solid"/>
-                      <a:round/>
-                      <a:headEnd type="none" w="med" len="med"/>
-                      <a:tailEnd type="none" w="med" len="med"/>
-                    </a:lnL>
-                    <a:lnR w="6350" cap="flat" cmpd="sng" algn="ctr">
-                      <a:solidFill>
-                        <a:srgbClr val="E2E8F0"/>
-                      </a:solidFill>
-                      <a:prstDash val="solid"/>
-                      <a:round/>
-                      <a:headEnd type="none" w="med" len="med"/>
-                      <a:tailEnd type="none" w="med" len="med"/>
-                    </a:lnR>
-                    <a:lnT w="6350" cap="flat" cmpd="sng" algn="ctr">
-                      <a:solidFill>
-                        <a:srgbClr val="E2E8F0"/>
-                      </a:solidFill>
-                      <a:prstDash val="solid"/>
-                      <a:round/>
-                      <a:headEnd type="none" w="med" len="med"/>
-                      <a:tailEnd type="none" w="med" len="med"/>
-                    </a:lnT>
-                    <a:lnB w="6350" cap="flat" cmpd="sng" algn="ctr">
-                      <a:solidFill>
-                        <a:srgbClr val="E2E8F0"/>
-                      </a:solidFill>
-                      <a:prstDash val="solid"/>
-                      <a:round/>
-                      <a:headEnd type="none" w="med" len="med"/>
-                      <a:tailEnd type="none" w="med" len="med"/>
-                    </a:lnB>
-                    <a:solidFill>
-                      <a:srgbClr val="006848"/>
-                    </a:solidFill>
-                  </a:tcPr>
-                </a:tc>
-                <a:tc>
-                  <a:txBody>
-                    <a:bodyPr/>
-                    <a:lstStyle/>
-                    <a:p>
-                      <a:pPr indent="0" marL="0">
-                        <a:buNone/>
-                      </a:pPr>
-                      <a:r>
-                        <a:rPr lang="en-US" sz="1100" b="1" dirty="0">
-                          <a:solidFill>
-                            <a:srgbClr val="FFFFFF"/>
-                          </a:solidFill>
-                        </a:rPr>
-                        <a:t>Consistency</a:t>
-                      </a:r>
-                      <a:endParaRPr lang="en-US" sz="1100" dirty="0"/>
-                    </a:p>
-                  </a:txBody>
-                  <a:tcPr marL="91440" marR="91440" marT="45720" marB="45720" anchor="ctr">
-                    <a:lnL w="6350" cap="flat" cmpd="sng" algn="ctr">
-                      <a:solidFill>
-                        <a:srgbClr val="E2E8F0"/>
-                      </a:solidFill>
-                      <a:prstDash val="solid"/>
-                      <a:round/>
-                      <a:headEnd type="none" w="med" len="med"/>
-                      <a:tailEnd type="none" w="med" len="med"/>
-                    </a:lnL>
-                    <a:lnR w="6350" cap="flat" cmpd="sng" algn="ctr">
-                      <a:solidFill>
-                        <a:srgbClr val="E2E8F0"/>
-                      </a:solidFill>
-                      <a:prstDash val="solid"/>
-                      <a:round/>
-                      <a:headEnd type="none" w="med" len="med"/>
-                      <a:tailEnd type="none" w="med" len="med"/>
-                    </a:lnR>
-                    <a:lnT w="6350" cap="flat" cmpd="sng" algn="ctr">
-                      <a:solidFill>
-                        <a:srgbClr val="E2E8F0"/>
-                      </a:solidFill>
-                      <a:prstDash val="solid"/>
-                      <a:round/>
-                      <a:headEnd type="none" w="med" len="med"/>
-                      <a:tailEnd type="none" w="med" len="med"/>
-                    </a:lnT>
-                    <a:lnB w="6350" cap="flat" cmpd="sng" algn="ctr">
-                      <a:solidFill>
-                        <a:srgbClr val="E2E8F0"/>
-                      </a:solidFill>
-                      <a:prstDash val="solid"/>
-                      <a:round/>
-                      <a:headEnd type="none" w="med" len="med"/>
-                      <a:tailEnd type="none" w="med" len="med"/>
-                    </a:lnB>
-                    <a:solidFill>
-                      <a:srgbClr val="006848"/>
-                    </a:solidFill>
-                  </a:tcPr>
-                </a:tc>
-                <a:tc>
-                  <a:txBody>
-                    <a:bodyPr/>
-                    <a:lstStyle/>
-                    <a:p>
-                      <a:pPr indent="0" marL="0">
-                        <a:buNone/>
-                      </a:pPr>
-                      <a:r>
-                        <a:rPr lang="en-US" sz="1100" b="1" dirty="0">
-                          <a:solidFill>
-                            <a:srgbClr val="FFFFFF"/>
-                          </a:solidFill>
-                        </a:rPr>
-                        <a:t>Reads From</a:t>
-                      </a:r>
-                      <a:endParaRPr lang="en-US" sz="1100" dirty="0"/>
-                    </a:p>
-                  </a:txBody>
-                  <a:tcPr marL="91440" marR="91440" marT="45720" marB="45720" anchor="ctr">
-                    <a:lnL w="6350" cap="flat" cmpd="sng" algn="ctr">
-                      <a:solidFill>
-                        <a:srgbClr val="E2E8F0"/>
-                      </a:solidFill>
-                      <a:prstDash val="solid"/>
-                      <a:round/>
-                      <a:headEnd type="none" w="med" len="med"/>
-                      <a:tailEnd type="none" w="med" len="med"/>
-                    </a:lnL>
-                    <a:lnR w="6350" cap="flat" cmpd="sng" algn="ctr">
-                      <a:solidFill>
-                        <a:srgbClr val="E2E8F0"/>
-                      </a:solidFill>
-                      <a:prstDash val="solid"/>
-                      <a:round/>
-                      <a:headEnd type="none" w="med" len="med"/>
-                      <a:tailEnd type="none" w="med" len="med"/>
-                    </a:lnR>
-                    <a:lnT w="6350" cap="flat" cmpd="sng" algn="ctr">
-                      <a:solidFill>
-                        <a:srgbClr val="E2E8F0"/>
-                      </a:solidFill>
-                      <a:prstDash val="solid"/>
-                      <a:round/>
-                      <a:headEnd type="none" w="med" len="med"/>
-                      <a:tailEnd type="none" w="med" len="med"/>
-                    </a:lnT>
-                    <a:lnB w="6350" cap="flat" cmpd="sng" algn="ctr">
-                      <a:solidFill>
-                        <a:srgbClr val="E2E8F0"/>
-                      </a:solidFill>
-                      <a:prstDash val="solid"/>
-                      <a:round/>
-                      <a:headEnd type="none" w="med" len="med"/>
-                      <a:tailEnd type="none" w="med" len="med"/>
-                    </a:lnB>
-                    <a:solidFill>
-                      <a:srgbClr val="006848"/>
-                    </a:solidFill>
-                  </a:tcPr>
-                </a:tc>
-              </a:tr>
-              <a:tr h="530352">
-                <a:tc>
-                  <a:txBody>
-                    <a:bodyPr/>
-                    <a:lstStyle/>
-                    <a:p>
-                      <a:pPr indent="0" marL="0">
-                        <a:buNone/>
-                      </a:pPr>
-                      <a:r>
-                        <a:rPr lang="en-US" sz="1050" b="1" dirty="0">
-                          <a:solidFill>
-                            <a:srgbClr val="006848"/>
-                          </a:solidFill>
-                          <a:latin typeface="Consolas" pitchFamily="34" charset="0"/>
-                          <a:ea typeface="Consolas" pitchFamily="34" charset="-122"/>
-                          <a:cs typeface="Consolas" pitchFamily="34" charset="-120"/>
-                        </a:rPr>
-                        <a:t>vehicles</a:t>
-                      </a:r>
-                      <a:endParaRPr lang="en-US" sz="1050" dirty="0">
-                        <a:latin typeface="Consolas" charset="0"/>
-                        <a:ea typeface="Consolas" charset="0"/>
-                        <a:cs typeface="Consolas" charset="0"/>
-                      </a:endParaRPr>
-                    </a:p>
-                  </a:txBody>
-                  <a:tcPr marL="91440" marR="91440" marT="45720" marB="45720" anchor="ctr">
-                    <a:lnL w="6350" cap="flat" cmpd="sng" algn="ctr">
-                      <a:solidFill>
-                        <a:srgbClr val="E2E8F0"/>
-                      </a:solidFill>
-                      <a:prstDash val="solid"/>
-                      <a:round/>
-                      <a:headEnd type="none" w="med" len="med"/>
-                      <a:tailEnd type="none" w="med" len="med"/>
-                    </a:lnL>
-                    <a:lnR w="6350" cap="flat" cmpd="sng" algn="ctr">
-                      <a:solidFill>
-                        <a:srgbClr val="E2E8F0"/>
-                      </a:solidFill>
-                      <a:prstDash val="solid"/>
-                      <a:round/>
-                      <a:headEnd type="none" w="med" len="med"/>
-                      <a:tailEnd type="none" w="med" len="med"/>
-                    </a:lnR>
-                    <a:lnT w="6350" cap="flat" cmpd="sng" algn="ctr">
-                      <a:solidFill>
-                        <a:srgbClr val="E2E8F0"/>
-                      </a:solidFill>
-                      <a:prstDash val="solid"/>
-                      <a:round/>
-                      <a:headEnd type="none" w="med" len="med"/>
-                      <a:tailEnd type="none" w="med" len="med"/>
-                    </a:lnT>
-                    <a:lnB w="6350" cap="flat" cmpd="sng" algn="ctr">
-                      <a:solidFill>
-                        <a:srgbClr val="E2E8F0"/>
-                      </a:solidFill>
-                      <a:prstDash val="solid"/>
-                      <a:round/>
-                      <a:headEnd type="none" w="med" len="med"/>
-                      <a:tailEnd type="none" w="med" len="med"/>
-                    </a:lnB>
-                    <a:solidFill>
-                      <a:srgbClr val="FFFFFF"/>
-                    </a:solidFill>
-                  </a:tcPr>
-                </a:tc>
-                <a:tc>
-                  <a:txBody>
-                    <a:bodyPr/>
-                    <a:lstStyle/>
-                    <a:p>
-                      <a:pPr indent="0" marL="0">
-                        <a:buNone/>
-                      </a:pPr>
-                      <a:r>
-                        <a:rPr lang="en-US" sz="950" dirty="0">
-                          <a:solidFill>
-                            <a:srgbClr val="000000"/>
-                          </a:solidFill>
-                        </a:rPr>
-                        <a:t>vehicle_id, plate, vehicle_type, max_payload_kg</a:t>
-                      </a:r>
-                      <a:endParaRPr lang="en-US" sz="950" dirty="0"/>
-                    </a:p>
-                  </a:txBody>
-                  <a:tcPr marL="91440" marR="91440" marT="45720" marB="45720" anchor="ctr">
-                    <a:lnL w="6350" cap="flat" cmpd="sng" algn="ctr">
-                      <a:solidFill>
-                        <a:srgbClr val="E2E8F0"/>
-                      </a:solidFill>
-                      <a:prstDash val="solid"/>
-                      <a:round/>
-                      <a:headEnd type="none" w="med" len="med"/>
-                      <a:tailEnd type="none" w="med" len="med"/>
-                    </a:lnL>
-                    <a:lnR w="6350" cap="flat" cmpd="sng" algn="ctr">
-                      <a:solidFill>
-                        <a:srgbClr val="E2E8F0"/>
-                      </a:solidFill>
-                      <a:prstDash val="solid"/>
-                      <a:round/>
-                      <a:headEnd type="none" w="med" len="med"/>
-                      <a:tailEnd type="none" w="med" len="med"/>
-                    </a:lnR>
-                    <a:lnT w="6350" cap="flat" cmpd="sng" algn="ctr">
-                      <a:solidFill>
-                        <a:srgbClr val="E2E8F0"/>
-                      </a:solidFill>
-                      <a:prstDash val="solid"/>
-                      <a:round/>
-                      <a:headEnd type="none" w="med" len="med"/>
-                      <a:tailEnd type="none" w="med" len="med"/>
-                    </a:lnT>
-                    <a:lnB w="6350" cap="flat" cmpd="sng" algn="ctr">
-                      <a:solidFill>
-                        <a:srgbClr val="E2E8F0"/>
-                      </a:solidFill>
-                      <a:prstDash val="solid"/>
-                      <a:round/>
-                      <a:headEnd type="none" w="med" len="med"/>
-                      <a:tailEnd type="none" w="med" len="med"/>
-                    </a:lnB>
-                    <a:solidFill>
-                      <a:srgbClr val="FFFFFF"/>
-                    </a:solidFill>
-                  </a:tcPr>
-                </a:tc>
-                <a:tc>
-                  <a:txBody>
-                    <a:bodyPr/>
-                    <a:lstStyle/>
-                    <a:p>
-                      <a:pPr indent="0" marL="0">
-                        <a:buNone/>
-                      </a:pPr>
-                      <a:r>
-                        <a:rPr lang="en-US" sz="1050" dirty="0">
-                          <a:solidFill>
-                            <a:srgbClr val="64748B"/>
-                          </a:solidFill>
-                        </a:rPr>
-                        <a:t>Eventual</a:t>
-                      </a:r>
-                      <a:endParaRPr lang="en-US" sz="1050" dirty="0"/>
-                    </a:p>
-                  </a:txBody>
-                  <a:tcPr marL="91440" marR="91440" marT="45720" marB="45720" anchor="ctr">
-                    <a:lnL w="6350" cap="flat" cmpd="sng" algn="ctr">
-                      <a:solidFill>
-                        <a:srgbClr val="E2E8F0"/>
-                      </a:solidFill>
-                      <a:prstDash val="solid"/>
-                      <a:round/>
-                      <a:headEnd type="none" w="med" len="med"/>
-                      <a:tailEnd type="none" w="med" len="med"/>
-                    </a:lnL>
-                    <a:lnR w="6350" cap="flat" cmpd="sng" algn="ctr">
-                      <a:solidFill>
-                        <a:srgbClr val="E2E8F0"/>
-                      </a:solidFill>
-                      <a:prstDash val="solid"/>
-                      <a:round/>
-                      <a:headEnd type="none" w="med" len="med"/>
-                      <a:tailEnd type="none" w="med" len="med"/>
-                    </a:lnR>
-                    <a:lnT w="6350" cap="flat" cmpd="sng" algn="ctr">
-                      <a:solidFill>
-                        <a:srgbClr val="E2E8F0"/>
-                      </a:solidFill>
-                      <a:prstDash val="solid"/>
-                      <a:round/>
-                      <a:headEnd type="none" w="med" len="med"/>
-                      <a:tailEnd type="none" w="med" len="med"/>
-                    </a:lnT>
-                    <a:lnB w="6350" cap="flat" cmpd="sng" algn="ctr">
-                      <a:solidFill>
-                        <a:srgbClr val="E2E8F0"/>
-                      </a:solidFill>
-                      <a:prstDash val="solid"/>
-                      <a:round/>
-                      <a:headEnd type="none" w="med" len="med"/>
-                      <a:tailEnd type="none" w="med" len="med"/>
-                    </a:lnB>
-                    <a:solidFill>
-                      <a:srgbClr val="FFFFFF"/>
-                    </a:solidFill>
-                  </a:tcPr>
-                </a:tc>
-                <a:tc>
-                  <a:txBody>
-                    <a:bodyPr/>
-                    <a:lstStyle/>
-                    <a:p>
-                      <a:pPr indent="0" marL="0">
-                        <a:buNone/>
-                      </a:pPr>
-                      <a:r>
-                        <a:rPr lang="en-US" sz="1050" b="1" dirty="0">
-                          <a:solidFill>
-                            <a:srgbClr val="2563EB"/>
-                          </a:solidFill>
-                        </a:rPr>
-                        <a:t>SECONDARY</a:t>
-                      </a:r>
-                      <a:endParaRPr lang="en-US" sz="1050" dirty="0"/>
-                    </a:p>
-                  </a:txBody>
-                  <a:tcPr marL="91440" marR="91440" marT="45720" marB="45720" anchor="ctr">
-                    <a:lnL w="6350" cap="flat" cmpd="sng" algn="ctr">
-                      <a:solidFill>
-                        <a:srgbClr val="E2E8F0"/>
-                      </a:solidFill>
-                      <a:prstDash val="solid"/>
-                      <a:round/>
-                      <a:headEnd type="none" w="med" len="med"/>
-                      <a:tailEnd type="none" w="med" len="med"/>
-                    </a:lnL>
-                    <a:lnR w="6350" cap="flat" cmpd="sng" algn="ctr">
-                      <a:solidFill>
-                        <a:srgbClr val="E2E8F0"/>
-                      </a:solidFill>
-                      <a:prstDash val="solid"/>
-                      <a:round/>
-                      <a:headEnd type="none" w="med" len="med"/>
-                      <a:tailEnd type="none" w="med" len="med"/>
-                    </a:lnR>
-                    <a:lnT w="6350" cap="flat" cmpd="sng" algn="ctr">
-                      <a:solidFill>
-                        <a:srgbClr val="E2E8F0"/>
-                      </a:solidFill>
-                      <a:prstDash val="solid"/>
-                      <a:round/>
-                      <a:headEnd type="none" w="med" len="med"/>
-                      <a:tailEnd type="none" w="med" len="med"/>
-                    </a:lnT>
-                    <a:lnB w="6350" cap="flat" cmpd="sng" algn="ctr">
-                      <a:solidFill>
-                        <a:srgbClr val="E2E8F0"/>
-                      </a:solidFill>
-                      <a:prstDash val="solid"/>
-                      <a:round/>
-                      <a:headEnd type="none" w="med" len="med"/>
-                      <a:tailEnd type="none" w="med" len="med"/>
-                    </a:lnB>
-                    <a:solidFill>
-                      <a:srgbClr val="FFFFFF"/>
-                    </a:solidFill>
-                  </a:tcPr>
-                </a:tc>
-              </a:tr>
-              <a:tr h="530352">
-                <a:tc>
-                  <a:txBody>
-                    <a:bodyPr/>
-                    <a:lstStyle/>
-                    <a:p>
-                      <a:pPr indent="0" marL="0">
-                        <a:buNone/>
-                      </a:pPr>
-                      <a:r>
-                        <a:rPr lang="en-US" sz="1050" b="1" dirty="0">
-                          <a:solidFill>
-                            <a:srgbClr val="006848"/>
-                          </a:solidFill>
-                          <a:latin typeface="Consolas" pitchFamily="34" charset="0"/>
-                          <a:ea typeface="Consolas" pitchFamily="34" charset="-122"/>
-                          <a:cs typeface="Consolas" pitchFamily="34" charset="-120"/>
-                        </a:rPr>
-                        <a:t>drivers</a:t>
-                      </a:r>
-                      <a:endParaRPr lang="en-US" sz="1050" dirty="0">
-                        <a:latin typeface="Consolas" charset="0"/>
-                        <a:ea typeface="Consolas" charset="0"/>
-                        <a:cs typeface="Consolas" charset="0"/>
-                      </a:endParaRPr>
-                    </a:p>
-                  </a:txBody>
-                  <a:tcPr marL="91440" marR="91440" marT="45720" marB="45720" anchor="ctr">
-                    <a:lnL w="6350" cap="flat" cmpd="sng" algn="ctr">
-                      <a:solidFill>
-                        <a:srgbClr val="E2E8F0"/>
-                      </a:solidFill>
-                      <a:prstDash val="solid"/>
-                      <a:round/>
-                      <a:headEnd type="none" w="med" len="med"/>
-                      <a:tailEnd type="none" w="med" len="med"/>
-                    </a:lnL>
-                    <a:lnR w="6350" cap="flat" cmpd="sng" algn="ctr">
-                      <a:solidFill>
-                        <a:srgbClr val="E2E8F0"/>
-                      </a:solidFill>
-                      <a:prstDash val="solid"/>
-                      <a:round/>
-                      <a:headEnd type="none" w="med" len="med"/>
-                      <a:tailEnd type="none" w="med" len="med"/>
-                    </a:lnR>
-                    <a:lnT w="6350" cap="flat" cmpd="sng" algn="ctr">
-                      <a:solidFill>
-                        <a:srgbClr val="E2E8F0"/>
-                      </a:solidFill>
-                      <a:prstDash val="solid"/>
-                      <a:round/>
-                      <a:headEnd type="none" w="med" len="med"/>
-                      <a:tailEnd type="none" w="med" len="med"/>
-                    </a:lnT>
-                    <a:lnB w="6350" cap="flat" cmpd="sng" algn="ctr">
-                      <a:solidFill>
-                        <a:srgbClr val="E2E8F0"/>
-                      </a:solidFill>
-                      <a:prstDash val="solid"/>
-                      <a:round/>
-                      <a:headEnd type="none" w="med" len="med"/>
-                      <a:tailEnd type="none" w="med" len="med"/>
-                    </a:lnB>
-                    <a:solidFill>
-                      <a:srgbClr val="FFFFFF"/>
-                    </a:solidFill>
-                  </a:tcPr>
-                </a:tc>
-                <a:tc>
-                  <a:txBody>
-                    <a:bodyPr/>
-                    <a:lstStyle/>
-                    <a:p>
-                      <a:pPr indent="0" marL="0">
-                        <a:buNone/>
-                      </a:pPr>
-                      <a:r>
-                        <a:rPr lang="en-US" sz="950" dirty="0">
-                          <a:solidFill>
-                            <a:srgbClr val="000000"/>
-                          </a:solidFill>
-                        </a:rPr>
-                        <a:t>driver_id, name, license_class, assigned_vehicle_id</a:t>
-                      </a:r>
-                      <a:endParaRPr lang="en-US" sz="950" dirty="0"/>
-                    </a:p>
-                  </a:txBody>
-                  <a:tcPr marL="91440" marR="91440" marT="45720" marB="45720" anchor="ctr">
-                    <a:lnL w="6350" cap="flat" cmpd="sng" algn="ctr">
-                      <a:solidFill>
-                        <a:srgbClr val="E2E8F0"/>
-                      </a:solidFill>
-                      <a:prstDash val="solid"/>
-                      <a:round/>
-                      <a:headEnd type="none" w="med" len="med"/>
-                      <a:tailEnd type="none" w="med" len="med"/>
-                    </a:lnL>
-                    <a:lnR w="6350" cap="flat" cmpd="sng" algn="ctr">
-                      <a:solidFill>
-                        <a:srgbClr val="E2E8F0"/>
-                      </a:solidFill>
-                      <a:prstDash val="solid"/>
-                      <a:round/>
-                      <a:headEnd type="none" w="med" len="med"/>
-                      <a:tailEnd type="none" w="med" len="med"/>
-                    </a:lnR>
-                    <a:lnT w="6350" cap="flat" cmpd="sng" algn="ctr">
-                      <a:solidFill>
-                        <a:srgbClr val="E2E8F0"/>
-                      </a:solidFill>
-                      <a:prstDash val="solid"/>
-                      <a:round/>
-                      <a:headEnd type="none" w="med" len="med"/>
-                      <a:tailEnd type="none" w="med" len="med"/>
-                    </a:lnT>
-                    <a:lnB w="6350" cap="flat" cmpd="sng" algn="ctr">
-                      <a:solidFill>
-                        <a:srgbClr val="E2E8F0"/>
-                      </a:solidFill>
-                      <a:prstDash val="solid"/>
-                      <a:round/>
-                      <a:headEnd type="none" w="med" len="med"/>
-                      <a:tailEnd type="none" w="med" len="med"/>
-                    </a:lnB>
-                    <a:solidFill>
-                      <a:srgbClr val="FFFFFF"/>
-                    </a:solidFill>
-                  </a:tcPr>
-                </a:tc>
-                <a:tc>
-                  <a:txBody>
-                    <a:bodyPr/>
-                    <a:lstStyle/>
-                    <a:p>
-                      <a:pPr indent="0" marL="0">
-                        <a:buNone/>
-                      </a:pPr>
-                      <a:r>
-                        <a:rPr lang="en-US" sz="1050" dirty="0">
-                          <a:solidFill>
-                            <a:srgbClr val="64748B"/>
-                          </a:solidFill>
-                        </a:rPr>
-                        <a:t>Eventual</a:t>
-                      </a:r>
-                      <a:endParaRPr lang="en-US" sz="1050" dirty="0"/>
-                    </a:p>
-                  </a:txBody>
-                  <a:tcPr marL="91440" marR="91440" marT="45720" marB="45720" anchor="ctr">
-                    <a:lnL w="6350" cap="flat" cmpd="sng" algn="ctr">
-                      <a:solidFill>
-                        <a:srgbClr val="E2E8F0"/>
-                      </a:solidFill>
-                      <a:prstDash val="solid"/>
-                      <a:round/>
-                      <a:headEnd type="none" w="med" len="med"/>
-                      <a:tailEnd type="none" w="med" len="med"/>
-                    </a:lnL>
-                    <a:lnR w="6350" cap="flat" cmpd="sng" algn="ctr">
-                      <a:solidFill>
-                        <a:srgbClr val="E2E8F0"/>
-                      </a:solidFill>
-                      <a:prstDash val="solid"/>
-                      <a:round/>
-                      <a:headEnd type="none" w="med" len="med"/>
-                      <a:tailEnd type="none" w="med" len="med"/>
-                    </a:lnR>
-                    <a:lnT w="6350" cap="flat" cmpd="sng" algn="ctr">
-                      <a:solidFill>
-                        <a:srgbClr val="E2E8F0"/>
-                      </a:solidFill>
-                      <a:prstDash val="solid"/>
-                      <a:round/>
-                      <a:headEnd type="none" w="med" len="med"/>
-                      <a:tailEnd type="none" w="med" len="med"/>
-                    </a:lnT>
-                    <a:lnB w="6350" cap="flat" cmpd="sng" algn="ctr">
-                      <a:solidFill>
-                        <a:srgbClr val="E2E8F0"/>
-                      </a:solidFill>
-                      <a:prstDash val="solid"/>
-                      <a:round/>
-                      <a:headEnd type="none" w="med" len="med"/>
-                      <a:tailEnd type="none" w="med" len="med"/>
-                    </a:lnB>
-                    <a:solidFill>
-                      <a:srgbClr val="FFFFFF"/>
-                    </a:solidFill>
-                  </a:tcPr>
-                </a:tc>
-                <a:tc>
-                  <a:txBody>
-                    <a:bodyPr/>
-                    <a:lstStyle/>
-                    <a:p>
-                      <a:pPr indent="0" marL="0">
-                        <a:buNone/>
-                      </a:pPr>
-                      <a:r>
-                        <a:rPr lang="en-US" sz="1050" b="1" dirty="0">
-                          <a:solidFill>
-                            <a:srgbClr val="2563EB"/>
-                          </a:solidFill>
-                        </a:rPr>
-                        <a:t>SECONDARY</a:t>
-                      </a:r>
-                      <a:endParaRPr lang="en-US" sz="1050" dirty="0"/>
-                    </a:p>
-                  </a:txBody>
-                  <a:tcPr marL="91440" marR="91440" marT="45720" marB="45720" anchor="ctr">
-                    <a:lnL w="6350" cap="flat" cmpd="sng" algn="ctr">
-                      <a:solidFill>
-                        <a:srgbClr val="E2E8F0"/>
-                      </a:solidFill>
-                      <a:prstDash val="solid"/>
-                      <a:round/>
-                      <a:headEnd type="none" w="med" len="med"/>
-                      <a:tailEnd type="none" w="med" len="med"/>
-                    </a:lnL>
-                    <a:lnR w="6350" cap="flat" cmpd="sng" algn="ctr">
-                      <a:solidFill>
-                        <a:srgbClr val="E2E8F0"/>
-                      </a:solidFill>
-                      <a:prstDash val="solid"/>
-                      <a:round/>
-                      <a:headEnd type="none" w="med" len="med"/>
-                      <a:tailEnd type="none" w="med" len="med"/>
-                    </a:lnR>
-                    <a:lnT w="6350" cap="flat" cmpd="sng" algn="ctr">
-                      <a:solidFill>
-                        <a:srgbClr val="E2E8F0"/>
-                      </a:solidFill>
-                      <a:prstDash val="solid"/>
-                      <a:round/>
-                      <a:headEnd type="none" w="med" len="med"/>
-                      <a:tailEnd type="none" w="med" len="med"/>
-                    </a:lnT>
-                    <a:lnB w="6350" cap="flat" cmpd="sng" algn="ctr">
-                      <a:solidFill>
-                        <a:srgbClr val="E2E8F0"/>
-                      </a:solidFill>
-                      <a:prstDash val="solid"/>
-                      <a:round/>
-                      <a:headEnd type="none" w="med" len="med"/>
-                      <a:tailEnd type="none" w="med" len="med"/>
-                    </a:lnB>
-                    <a:solidFill>
-                      <a:srgbClr val="FFFFFF"/>
-                    </a:solidFill>
-                  </a:tcPr>
-                </a:tc>
-              </a:tr>
-              <a:tr h="530352">
-                <a:tc>
-                  <a:txBody>
-                    <a:bodyPr/>
-                    <a:lstStyle/>
-                    <a:p>
-                      <a:pPr indent="0" marL="0">
-                        <a:buNone/>
-                      </a:pPr>
-                      <a:r>
-                        <a:rPr lang="en-US" sz="1050" b="1" dirty="0">
-                          <a:solidFill>
-                            <a:srgbClr val="006848"/>
-                          </a:solidFill>
-                          <a:latin typeface="Consolas" pitchFamily="34" charset="0"/>
-                          <a:ea typeface="Consolas" pitchFamily="34" charset="-122"/>
-                          <a:cs typeface="Consolas" pitchFamily="34" charset="-120"/>
-                        </a:rPr>
-                        <a:t>depots</a:t>
-                      </a:r>
-                      <a:endParaRPr lang="en-US" sz="1050" dirty="0">
-                        <a:latin typeface="Consolas" charset="0"/>
-                        <a:ea typeface="Consolas" charset="0"/>
-                        <a:cs typeface="Consolas" charset="0"/>
-                      </a:endParaRPr>
-                    </a:p>
-                  </a:txBody>
-                  <a:tcPr marL="91440" marR="91440" marT="45720" marB="45720" anchor="ctr">
-                    <a:lnL w="6350" cap="flat" cmpd="sng" algn="ctr">
-                      <a:solidFill>
-                        <a:srgbClr val="E2E8F0"/>
-                      </a:solidFill>
-                      <a:prstDash val="solid"/>
-                      <a:round/>
-                      <a:headEnd type="none" w="med" len="med"/>
-                      <a:tailEnd type="none" w="med" len="med"/>
-                    </a:lnL>
-                    <a:lnR w="6350" cap="flat" cmpd="sng" algn="ctr">
-                      <a:solidFill>
-                        <a:srgbClr val="E2E8F0"/>
-                      </a:solidFill>
-                      <a:prstDash val="solid"/>
-                      <a:round/>
-                      <a:headEnd type="none" w="med" len="med"/>
-                      <a:tailEnd type="none" w="med" len="med"/>
-                    </a:lnR>
-                    <a:lnT w="6350" cap="flat" cmpd="sng" algn="ctr">
-                      <a:solidFill>
-                        <a:srgbClr val="E2E8F0"/>
-                      </a:solidFill>
-                      <a:prstDash val="solid"/>
-                      <a:round/>
-                      <a:headEnd type="none" w="med" len="med"/>
-                      <a:tailEnd type="none" w="med" len="med"/>
-                    </a:lnT>
-                    <a:lnB w="6350" cap="flat" cmpd="sng" algn="ctr">
-                      <a:solidFill>
-                        <a:srgbClr val="E2E8F0"/>
-                      </a:solidFill>
-                      <a:prstDash val="solid"/>
-                      <a:round/>
-                      <a:headEnd type="none" w="med" len="med"/>
-                      <a:tailEnd type="none" w="med" len="med"/>
-                    </a:lnB>
-                    <a:solidFill>
-                      <a:srgbClr val="FFFFFF"/>
-                    </a:solidFill>
-                  </a:tcPr>
-                </a:tc>
-                <a:tc>
-                  <a:txBody>
-                    <a:bodyPr/>
-                    <a:lstStyle/>
-                    <a:p>
-                      <a:pPr indent="0" marL="0">
-                        <a:buNone/>
-                      </a:pPr>
-                      <a:r>
-                        <a:rPr lang="en-US" sz="950" dirty="0">
-                          <a:solidFill>
-                            <a:srgbClr val="000000"/>
-                          </a:solidFill>
-                        </a:rPr>
-                        <a:t>depot_id, name, city, lat, lng, capacity_vehicles</a:t>
-                      </a:r>
-                      <a:endParaRPr lang="en-US" sz="950" dirty="0"/>
-                    </a:p>
-                  </a:txBody>
-                  <a:tcPr marL="91440" marR="91440" marT="45720" marB="45720" anchor="ctr">
-                    <a:lnL w="6350" cap="flat" cmpd="sng" algn="ctr">
-                      <a:solidFill>
-                        <a:srgbClr val="E2E8F0"/>
-                      </a:solidFill>
-                      <a:prstDash val="solid"/>
-                      <a:round/>
-                      <a:headEnd type="none" w="med" len="med"/>
-                      <a:tailEnd type="none" w="med" len="med"/>
-                    </a:lnL>
-                    <a:lnR w="6350" cap="flat" cmpd="sng" algn="ctr">
-                      <a:solidFill>
-                        <a:srgbClr val="E2E8F0"/>
-                      </a:solidFill>
-                      <a:prstDash val="solid"/>
-                      <a:round/>
-                      <a:headEnd type="none" w="med" len="med"/>
-                      <a:tailEnd type="none" w="med" len="med"/>
-                    </a:lnR>
-                    <a:lnT w="6350" cap="flat" cmpd="sng" algn="ctr">
-                      <a:solidFill>
-                        <a:srgbClr val="E2E8F0"/>
-                      </a:solidFill>
-                      <a:prstDash val="solid"/>
-                      <a:round/>
-                      <a:headEnd type="none" w="med" len="med"/>
-                      <a:tailEnd type="none" w="med" len="med"/>
-                    </a:lnT>
-                    <a:lnB w="6350" cap="flat" cmpd="sng" algn="ctr">
-                      <a:solidFill>
-                        <a:srgbClr val="E2E8F0"/>
-                      </a:solidFill>
-                      <a:prstDash val="solid"/>
-                      <a:round/>
-                      <a:headEnd type="none" w="med" len="med"/>
-                      <a:tailEnd type="none" w="med" len="med"/>
-                    </a:lnB>
-                    <a:solidFill>
-                      <a:srgbClr val="FFFFFF"/>
-                    </a:solidFill>
-                  </a:tcPr>
-                </a:tc>
-                <a:tc>
-                  <a:txBody>
-                    <a:bodyPr/>
-                    <a:lstStyle/>
-                    <a:p>
-                      <a:pPr indent="0" marL="0">
-                        <a:buNone/>
-                      </a:pPr>
-                      <a:r>
-                        <a:rPr lang="en-US" sz="1050" dirty="0">
-                          <a:solidFill>
-                            <a:srgbClr val="64748B"/>
-                          </a:solidFill>
-                        </a:rPr>
-                        <a:t>Eventual</a:t>
-                      </a:r>
-                      <a:endParaRPr lang="en-US" sz="1050" dirty="0"/>
-                    </a:p>
-                  </a:txBody>
-                  <a:tcPr marL="91440" marR="91440" marT="45720" marB="45720" anchor="ctr">
-                    <a:lnL w="6350" cap="flat" cmpd="sng" algn="ctr">
-                      <a:solidFill>
-                        <a:srgbClr val="E2E8F0"/>
-                      </a:solidFill>
-                      <a:prstDash val="solid"/>
-                      <a:round/>
-                      <a:headEnd type="none" w="med" len="med"/>
-                      <a:tailEnd type="none" w="med" len="med"/>
-                    </a:lnL>
-                    <a:lnR w="6350" cap="flat" cmpd="sng" algn="ctr">
-                      <a:solidFill>
-                        <a:srgbClr val="E2E8F0"/>
-                      </a:solidFill>
-                      <a:prstDash val="solid"/>
-                      <a:round/>
-                      <a:headEnd type="none" w="med" len="med"/>
-                      <a:tailEnd type="none" w="med" len="med"/>
-                    </a:lnR>
-                    <a:lnT w="6350" cap="flat" cmpd="sng" algn="ctr">
-                      <a:solidFill>
-                        <a:srgbClr val="E2E8F0"/>
-                      </a:solidFill>
-                      <a:prstDash val="solid"/>
-                      <a:round/>
-                      <a:headEnd type="none" w="med" len="med"/>
-                      <a:tailEnd type="none" w="med" len="med"/>
-                    </a:lnT>
-                    <a:lnB w="6350" cap="flat" cmpd="sng" algn="ctr">
-                      <a:solidFill>
-                        <a:srgbClr val="E2E8F0"/>
-                      </a:solidFill>
-                      <a:prstDash val="solid"/>
-                      <a:round/>
-                      <a:headEnd type="none" w="med" len="med"/>
-                      <a:tailEnd type="none" w="med" len="med"/>
-                    </a:lnB>
-                    <a:solidFill>
-                      <a:srgbClr val="FFFFFF"/>
-                    </a:solidFill>
-                  </a:tcPr>
-                </a:tc>
-                <a:tc>
-                  <a:txBody>
-                    <a:bodyPr/>
-                    <a:lstStyle/>
-                    <a:p>
-                      <a:pPr indent="0" marL="0">
-                        <a:buNone/>
-                      </a:pPr>
-                      <a:r>
-                        <a:rPr lang="en-US" sz="1050" b="1" dirty="0">
-                          <a:solidFill>
-                            <a:srgbClr val="2563EB"/>
-                          </a:solidFill>
-                        </a:rPr>
-                        <a:t>SECONDARY</a:t>
-                      </a:r>
-                      <a:endParaRPr lang="en-US" sz="1050" dirty="0"/>
-                    </a:p>
-                  </a:txBody>
-                  <a:tcPr marL="91440" marR="91440" marT="45720" marB="45720" anchor="ctr">
-                    <a:lnL w="6350" cap="flat" cmpd="sng" algn="ctr">
-                      <a:solidFill>
-                        <a:srgbClr val="E2E8F0"/>
-                      </a:solidFill>
-                      <a:prstDash val="solid"/>
-                      <a:round/>
-                      <a:headEnd type="none" w="med" len="med"/>
-                      <a:tailEnd type="none" w="med" len="med"/>
-                    </a:lnL>
-                    <a:lnR w="6350" cap="flat" cmpd="sng" algn="ctr">
-                      <a:solidFill>
-                        <a:srgbClr val="E2E8F0"/>
-                      </a:solidFill>
-                      <a:prstDash val="solid"/>
-                      <a:round/>
-                      <a:headEnd type="none" w="med" len="med"/>
-                      <a:tailEnd type="none" w="med" len="med"/>
-                    </a:lnR>
-                    <a:lnT w="6350" cap="flat" cmpd="sng" algn="ctr">
-                      <a:solidFill>
-                        <a:srgbClr val="E2E8F0"/>
-                      </a:solidFill>
-                      <a:prstDash val="solid"/>
-                      <a:round/>
-                      <a:headEnd type="none" w="med" len="med"/>
-                      <a:tailEnd type="none" w="med" len="med"/>
-                    </a:lnT>
-                    <a:lnB w="6350" cap="flat" cmpd="sng" algn="ctr">
-                      <a:solidFill>
-                        <a:srgbClr val="E2E8F0"/>
-                      </a:solidFill>
-                      <a:prstDash val="solid"/>
-                      <a:round/>
-                      <a:headEnd type="none" w="med" len="med"/>
-                      <a:tailEnd type="none" w="med" len="med"/>
-                    </a:lnB>
-                    <a:solidFill>
-                      <a:srgbClr val="FFFFFF"/>
-                    </a:solidFill>
-                  </a:tcPr>
-                </a:tc>
-              </a:tr>
-              <a:tr h="530352">
-                <a:tc>
-                  <a:txBody>
-                    <a:bodyPr/>
-                    <a:lstStyle/>
-                    <a:p>
-                      <a:pPr indent="0" marL="0">
-                        <a:buNone/>
-                      </a:pPr>
-                      <a:r>
-                        <a:rPr lang="en-US" sz="1050" b="1" dirty="0">
-                          <a:solidFill>
-                            <a:srgbClr val="006848"/>
-                          </a:solidFill>
-                          <a:latin typeface="Consolas" pitchFamily="34" charset="0"/>
-                          <a:ea typeface="Consolas" pitchFamily="34" charset="-122"/>
-                          <a:cs typeface="Consolas" pitchFamily="34" charset="-120"/>
-                        </a:rPr>
-                        <a:t>shipments</a:t>
-                      </a:r>
-                      <a:endParaRPr lang="en-US" sz="1050" dirty="0">
-                        <a:latin typeface="Consolas" charset="0"/>
-                        <a:ea typeface="Consolas" charset="0"/>
-                        <a:cs typeface="Consolas" charset="0"/>
-                      </a:endParaRPr>
-                    </a:p>
-                  </a:txBody>
-                  <a:tcPr marL="91440" marR="91440" marT="45720" marB="45720" anchor="ctr">
-                    <a:lnL w="6350" cap="flat" cmpd="sng" algn="ctr">
-                      <a:solidFill>
-                        <a:srgbClr val="E2E8F0"/>
-                      </a:solidFill>
-                      <a:prstDash val="solid"/>
-                      <a:round/>
-                      <a:headEnd type="none" w="med" len="med"/>
-                      <a:tailEnd type="none" w="med" len="med"/>
-                    </a:lnL>
-                    <a:lnR w="6350" cap="flat" cmpd="sng" algn="ctr">
-                      <a:solidFill>
-                        <a:srgbClr val="E2E8F0"/>
-                      </a:solidFill>
-                      <a:prstDash val="solid"/>
-                      <a:round/>
-                      <a:headEnd type="none" w="med" len="med"/>
-                      <a:tailEnd type="none" w="med" len="med"/>
-                    </a:lnR>
-                    <a:lnT w="6350" cap="flat" cmpd="sng" algn="ctr">
-                      <a:solidFill>
-                        <a:srgbClr val="E2E8F0"/>
-                      </a:solidFill>
-                      <a:prstDash val="solid"/>
-                      <a:round/>
-                      <a:headEnd type="none" w="med" len="med"/>
-                      <a:tailEnd type="none" w="med" len="med"/>
-                    </a:lnT>
-                    <a:lnB w="6350" cap="flat" cmpd="sng" algn="ctr">
-                      <a:solidFill>
-                        <a:srgbClr val="E2E8F0"/>
-                      </a:solidFill>
-                      <a:prstDash val="solid"/>
-                      <a:round/>
-                      <a:headEnd type="none" w="med" len="med"/>
-                      <a:tailEnd type="none" w="med" len="med"/>
-                    </a:lnB>
-                    <a:solidFill>
-                      <a:srgbClr val="FFFFFF"/>
-                    </a:solidFill>
-                  </a:tcPr>
-                </a:tc>
-                <a:tc>
-                  <a:txBody>
-                    <a:bodyPr/>
-                    <a:lstStyle/>
-                    <a:p>
-                      <a:pPr indent="0" marL="0">
-                        <a:buNone/>
-                      </a:pPr>
-                      <a:r>
-                        <a:rPr lang="en-US" sz="950" dirty="0">
-                          <a:solidFill>
-                            <a:srgbClr val="000000"/>
-                          </a:solidFill>
-                        </a:rPr>
-                        <a:t>shipment_id, status (pending→in_transit→delivered), weight_kg</a:t>
-                      </a:r>
-                      <a:endParaRPr lang="en-US" sz="950" dirty="0"/>
-                    </a:p>
-                  </a:txBody>
-                  <a:tcPr marL="91440" marR="91440" marT="45720" marB="45720" anchor="ctr">
-                    <a:lnL w="6350" cap="flat" cmpd="sng" algn="ctr">
-                      <a:solidFill>
-                        <a:srgbClr val="E2E8F0"/>
-                      </a:solidFill>
-                      <a:prstDash val="solid"/>
-                      <a:round/>
-                      <a:headEnd type="none" w="med" len="med"/>
-                      <a:tailEnd type="none" w="med" len="med"/>
-                    </a:lnL>
-                    <a:lnR w="6350" cap="flat" cmpd="sng" algn="ctr">
-                      <a:solidFill>
-                        <a:srgbClr val="E2E8F0"/>
-                      </a:solidFill>
-                      <a:prstDash val="solid"/>
-                      <a:round/>
-                      <a:headEnd type="none" w="med" len="med"/>
-                      <a:tailEnd type="none" w="med" len="med"/>
-                    </a:lnR>
-                    <a:lnT w="6350" cap="flat" cmpd="sng" algn="ctr">
-                      <a:solidFill>
-                        <a:srgbClr val="E2E8F0"/>
-                      </a:solidFill>
-                      <a:prstDash val="solid"/>
-                      <a:round/>
-                      <a:headEnd type="none" w="med" len="med"/>
-                      <a:tailEnd type="none" w="med" len="med"/>
-                    </a:lnT>
-                    <a:lnB w="6350" cap="flat" cmpd="sng" algn="ctr">
-                      <a:solidFill>
-                        <a:srgbClr val="E2E8F0"/>
-                      </a:solidFill>
-                      <a:prstDash val="solid"/>
-                      <a:round/>
-                      <a:headEnd type="none" w="med" len="med"/>
-                      <a:tailEnd type="none" w="med" len="med"/>
-                    </a:lnB>
-                    <a:solidFill>
-                      <a:srgbClr val="FFFFFF"/>
-                    </a:solidFill>
-                  </a:tcPr>
-                </a:tc>
-                <a:tc>
-                  <a:txBody>
-                    <a:bodyPr/>
-                    <a:lstStyle/>
-                    <a:p>
-                      <a:pPr indent="0" marL="0">
-                        <a:buNone/>
-                      </a:pPr>
-                      <a:r>
-                        <a:rPr lang="en-US" sz="1050" b="1" dirty="0">
-                          <a:solidFill>
-                            <a:srgbClr val="7C3AED"/>
-                          </a:solidFill>
-                        </a:rPr>
-                        <a:t>Monotonic Reads</a:t>
-                      </a:r>
-                      <a:endParaRPr lang="en-US" sz="1050" dirty="0"/>
-                    </a:p>
-                  </a:txBody>
-                  <a:tcPr marL="91440" marR="91440" marT="45720" marB="45720" anchor="ctr">
-                    <a:lnL w="6350" cap="flat" cmpd="sng" algn="ctr">
-                      <a:solidFill>
-                        <a:srgbClr val="E2E8F0"/>
-                      </a:solidFill>
-                      <a:prstDash val="solid"/>
-                      <a:round/>
-                      <a:headEnd type="none" w="med" len="med"/>
-                      <a:tailEnd type="none" w="med" len="med"/>
-                    </a:lnL>
-                    <a:lnR w="6350" cap="flat" cmpd="sng" algn="ctr">
-                      <a:solidFill>
-                        <a:srgbClr val="E2E8F0"/>
-                      </a:solidFill>
-                      <a:prstDash val="solid"/>
-                      <a:round/>
-                      <a:headEnd type="none" w="med" len="med"/>
-                      <a:tailEnd type="none" w="med" len="med"/>
-                    </a:lnR>
-                    <a:lnT w="6350" cap="flat" cmpd="sng" algn="ctr">
-                      <a:solidFill>
-                        <a:srgbClr val="E2E8F0"/>
-                      </a:solidFill>
-                      <a:prstDash val="solid"/>
-                      <a:round/>
-                      <a:headEnd type="none" w="med" len="med"/>
-                      <a:tailEnd type="none" w="med" len="med"/>
-                    </a:lnT>
-                    <a:lnB w="6350" cap="flat" cmpd="sng" algn="ctr">
-                      <a:solidFill>
-                        <a:srgbClr val="E2E8F0"/>
-                      </a:solidFill>
-                      <a:prstDash val="solid"/>
-                      <a:round/>
-                      <a:headEnd type="none" w="med" len="med"/>
-                      <a:tailEnd type="none" w="med" len="med"/>
-                    </a:lnB>
-                    <a:solidFill>
-                      <a:srgbClr val="FFFFFF"/>
-                    </a:solidFill>
-                  </a:tcPr>
-                </a:tc>
-                <a:tc>
-                  <a:txBody>
-                    <a:bodyPr/>
-                    <a:lstStyle/>
-                    <a:p>
-                      <a:pPr indent="0" marL="0">
-                        <a:buNone/>
-                      </a:pPr>
-                      <a:r>
-                        <a:rPr lang="en-US" sz="1050" b="1" dirty="0">
-                          <a:solidFill>
-                            <a:srgbClr val="2563EB"/>
-                          </a:solidFill>
-                        </a:rPr>
-                        <a:t>SECONDARY</a:t>
-                      </a:r>
-                      <a:endParaRPr lang="en-US" sz="1050" dirty="0"/>
-                    </a:p>
-                  </a:txBody>
-                  <a:tcPr marL="91440" marR="91440" marT="45720" marB="45720" anchor="ctr">
-                    <a:lnL w="6350" cap="flat" cmpd="sng" algn="ctr">
-                      <a:solidFill>
-                        <a:srgbClr val="E2E8F0"/>
-                      </a:solidFill>
-                      <a:prstDash val="solid"/>
-                      <a:round/>
-                      <a:headEnd type="none" w="med" len="med"/>
-                      <a:tailEnd type="none" w="med" len="med"/>
-                    </a:lnL>
-                    <a:lnR w="6350" cap="flat" cmpd="sng" algn="ctr">
-                      <a:solidFill>
-                        <a:srgbClr val="E2E8F0"/>
-                      </a:solidFill>
-                      <a:prstDash val="solid"/>
-                      <a:round/>
-                      <a:headEnd type="none" w="med" len="med"/>
-                      <a:tailEnd type="none" w="med" len="med"/>
-                    </a:lnR>
-                    <a:lnT w="6350" cap="flat" cmpd="sng" algn="ctr">
-                      <a:solidFill>
-                        <a:srgbClr val="E2E8F0"/>
-                      </a:solidFill>
-                      <a:prstDash val="solid"/>
-                      <a:round/>
-                      <a:headEnd type="none" w="med" len="med"/>
-                      <a:tailEnd type="none" w="med" len="med"/>
-                    </a:lnT>
-                    <a:lnB w="6350" cap="flat" cmpd="sng" algn="ctr">
-                      <a:solidFill>
-                        <a:srgbClr val="E2E8F0"/>
-                      </a:solidFill>
-                      <a:prstDash val="solid"/>
-                      <a:round/>
-                      <a:headEnd type="none" w="med" len="med"/>
-                      <a:tailEnd type="none" w="med" len="med"/>
-                    </a:lnB>
-                    <a:solidFill>
-                      <a:srgbClr val="FFFFFF"/>
-                    </a:solidFill>
-                  </a:tcPr>
-                </a:tc>
-              </a:tr>
-              <a:tr h="530352">
-                <a:tc>
-                  <a:txBody>
-                    <a:bodyPr/>
-                    <a:lstStyle/>
-                    <a:p>
-                      <a:pPr indent="0" marL="0">
-                        <a:buNone/>
-                      </a:pPr>
-                      <a:r>
-                        <a:rPr lang="en-US" sz="1050" b="1" dirty="0">
-                          <a:solidFill>
-                            <a:srgbClr val="006848"/>
-                          </a:solidFill>
-                          <a:latin typeface="Consolas" pitchFamily="34" charset="0"/>
-                          <a:ea typeface="Consolas" pitchFamily="34" charset="-122"/>
-                          <a:cs typeface="Consolas" pitchFamily="34" charset="-120"/>
-                        </a:rPr>
-                        <a:t>positions</a:t>
-                      </a:r>
-                      <a:endParaRPr lang="en-US" sz="1050" dirty="0">
-                        <a:latin typeface="Consolas" charset="0"/>
-                        <a:ea typeface="Consolas" charset="0"/>
-                        <a:cs typeface="Consolas" charset="0"/>
-                      </a:endParaRPr>
-                    </a:p>
-                  </a:txBody>
-                  <a:tcPr marL="91440" marR="91440" marT="45720" marB="45720" anchor="ctr">
-                    <a:lnL w="6350" cap="flat" cmpd="sng" algn="ctr">
-                      <a:solidFill>
-                        <a:srgbClr val="E2E8F0"/>
-                      </a:solidFill>
-                      <a:prstDash val="solid"/>
-                      <a:round/>
-                      <a:headEnd type="none" w="med" len="med"/>
-                      <a:tailEnd type="none" w="med" len="med"/>
-                    </a:lnL>
-                    <a:lnR w="6350" cap="flat" cmpd="sng" algn="ctr">
-                      <a:solidFill>
-                        <a:srgbClr val="E2E8F0"/>
-                      </a:solidFill>
-                      <a:prstDash val="solid"/>
-                      <a:round/>
-                      <a:headEnd type="none" w="med" len="med"/>
-                      <a:tailEnd type="none" w="med" len="med"/>
-                    </a:lnR>
-                    <a:lnT w="6350" cap="flat" cmpd="sng" algn="ctr">
-                      <a:solidFill>
-                        <a:srgbClr val="E2E8F0"/>
-                      </a:solidFill>
-                      <a:prstDash val="solid"/>
-                      <a:round/>
-                      <a:headEnd type="none" w="med" len="med"/>
-                      <a:tailEnd type="none" w="med" len="med"/>
-                    </a:lnT>
-                    <a:lnB w="6350" cap="flat" cmpd="sng" algn="ctr">
-                      <a:solidFill>
-                        <a:srgbClr val="E2E8F0"/>
-                      </a:solidFill>
-                      <a:prstDash val="solid"/>
-                      <a:round/>
-                      <a:headEnd type="none" w="med" len="med"/>
-                      <a:tailEnd type="none" w="med" len="med"/>
-                    </a:lnB>
-                    <a:solidFill>
-                      <a:srgbClr val="FFFFFF"/>
-                    </a:solidFill>
-                  </a:tcPr>
-                </a:tc>
-                <a:tc>
-                  <a:txBody>
-                    <a:bodyPr/>
-                    <a:lstStyle/>
-                    <a:p>
-                      <a:pPr indent="0" marL="0">
-                        <a:buNone/>
-                      </a:pPr>
-                      <a:r>
-                        <a:rPr lang="en-US" sz="950" dirty="0">
-                          <a:solidFill>
-                            <a:srgbClr val="000000"/>
-                          </a:solidFill>
-                        </a:rPr>
-                        <a:t>vehicle_id, lat, lng, city, speed_kmh  (high-frequency GPS)</a:t>
-                      </a:r>
-                      <a:endParaRPr lang="en-US" sz="950" dirty="0"/>
-                    </a:p>
-                  </a:txBody>
-                  <a:tcPr marL="91440" marR="91440" marT="45720" marB="45720" anchor="ctr">
-                    <a:lnL w="6350" cap="flat" cmpd="sng" algn="ctr">
-                      <a:solidFill>
-                        <a:srgbClr val="E2E8F0"/>
-                      </a:solidFill>
-                      <a:prstDash val="solid"/>
-                      <a:round/>
-                      <a:headEnd type="none" w="med" len="med"/>
-                      <a:tailEnd type="none" w="med" len="med"/>
-                    </a:lnL>
-                    <a:lnR w="6350" cap="flat" cmpd="sng" algn="ctr">
-                      <a:solidFill>
-                        <a:srgbClr val="E2E8F0"/>
-                      </a:solidFill>
-                      <a:prstDash val="solid"/>
-                      <a:round/>
-                      <a:headEnd type="none" w="med" len="med"/>
-                      <a:tailEnd type="none" w="med" len="med"/>
-                    </a:lnR>
-                    <a:lnT w="6350" cap="flat" cmpd="sng" algn="ctr">
-                      <a:solidFill>
-                        <a:srgbClr val="E2E8F0"/>
-                      </a:solidFill>
-                      <a:prstDash val="solid"/>
-                      <a:round/>
-                      <a:headEnd type="none" w="med" len="med"/>
-                      <a:tailEnd type="none" w="med" len="med"/>
-                    </a:lnT>
-                    <a:lnB w="6350" cap="flat" cmpd="sng" algn="ctr">
-                      <a:solidFill>
-                        <a:srgbClr val="E2E8F0"/>
-                      </a:solidFill>
-                      <a:prstDash val="solid"/>
-                      <a:round/>
-                      <a:headEnd type="none" w="med" len="med"/>
-                      <a:tailEnd type="none" w="med" len="med"/>
-                    </a:lnB>
-                    <a:solidFill>
-                      <a:srgbClr val="FFFFFF"/>
-                    </a:solidFill>
-                  </a:tcPr>
-                </a:tc>
-                <a:tc>
-                  <a:txBody>
-                    <a:bodyPr/>
-                    <a:lstStyle/>
-                    <a:p>
-                      <a:pPr indent="0" marL="0">
-                        <a:buNone/>
-                      </a:pPr>
-                      <a:r>
-                        <a:rPr lang="en-US" sz="1050" dirty="0">
-                          <a:solidFill>
-                            <a:srgbClr val="64748B"/>
-                          </a:solidFill>
-                        </a:rPr>
-                        <a:t>Eventual</a:t>
-                      </a:r>
-                      <a:endParaRPr lang="en-US" sz="1050" dirty="0"/>
-                    </a:p>
-                  </a:txBody>
-                  <a:tcPr marL="91440" marR="91440" marT="45720" marB="45720" anchor="ctr">
-                    <a:lnL w="6350" cap="flat" cmpd="sng" algn="ctr">
-                      <a:solidFill>
-                        <a:srgbClr val="E2E8F0"/>
-                      </a:solidFill>
-                      <a:prstDash val="solid"/>
-                      <a:round/>
-                      <a:headEnd type="none" w="med" len="med"/>
-                      <a:tailEnd type="none" w="med" len="med"/>
-                    </a:lnL>
-                    <a:lnR w="6350" cap="flat" cmpd="sng" algn="ctr">
-                      <a:solidFill>
-                        <a:srgbClr val="E2E8F0"/>
-                      </a:solidFill>
-                      <a:prstDash val="solid"/>
-                      <a:round/>
-                      <a:headEnd type="none" w="med" len="med"/>
-                      <a:tailEnd type="none" w="med" len="med"/>
-                    </a:lnR>
-                    <a:lnT w="6350" cap="flat" cmpd="sng" algn="ctr">
-                      <a:solidFill>
-                        <a:srgbClr val="E2E8F0"/>
-                      </a:solidFill>
-                      <a:prstDash val="solid"/>
-                      <a:round/>
-                      <a:headEnd type="none" w="med" len="med"/>
-                      <a:tailEnd type="none" w="med" len="med"/>
-                    </a:lnT>
-                    <a:lnB w="6350" cap="flat" cmpd="sng" algn="ctr">
-                      <a:solidFill>
-                        <a:srgbClr val="E2E8F0"/>
-                      </a:solidFill>
-                      <a:prstDash val="solid"/>
-                      <a:round/>
-                      <a:headEnd type="none" w="med" len="med"/>
-                      <a:tailEnd type="none" w="med" len="med"/>
-                    </a:lnB>
-                    <a:solidFill>
-                      <a:srgbClr val="FFFFFF"/>
-                    </a:solidFill>
-                  </a:tcPr>
-                </a:tc>
-                <a:tc>
-                  <a:txBody>
-                    <a:bodyPr/>
-                    <a:lstStyle/>
-                    <a:p>
-                      <a:pPr indent="0" marL="0">
-                        <a:buNone/>
-                      </a:pPr>
-                      <a:r>
-                        <a:rPr lang="en-US" sz="1050" b="1" dirty="0">
-                          <a:solidFill>
-                            <a:srgbClr val="2563EB"/>
-                          </a:solidFill>
-                        </a:rPr>
-                        <a:t>SECONDARY</a:t>
-                      </a:r>
-                      <a:endParaRPr lang="en-US" sz="1050" dirty="0"/>
-                    </a:p>
-                  </a:txBody>
-                  <a:tcPr marL="91440" marR="91440" marT="45720" marB="45720" anchor="ctr">
-                    <a:lnL w="6350" cap="flat" cmpd="sng" algn="ctr">
-                      <a:solidFill>
-                        <a:srgbClr val="E2E8F0"/>
-                      </a:solidFill>
-                      <a:prstDash val="solid"/>
-                      <a:round/>
-                      <a:headEnd type="none" w="med" len="med"/>
-                      <a:tailEnd type="none" w="med" len="med"/>
-                    </a:lnL>
-                    <a:lnR w="6350" cap="flat" cmpd="sng" algn="ctr">
-                      <a:solidFill>
-                        <a:srgbClr val="E2E8F0"/>
-                      </a:solidFill>
-                      <a:prstDash val="solid"/>
-                      <a:round/>
-                      <a:headEnd type="none" w="med" len="med"/>
-                      <a:tailEnd type="none" w="med" len="med"/>
-                    </a:lnR>
-                    <a:lnT w="6350" cap="flat" cmpd="sng" algn="ctr">
-                      <a:solidFill>
-                        <a:srgbClr val="E2E8F0"/>
-                      </a:solidFill>
-                      <a:prstDash val="solid"/>
-                      <a:round/>
-                      <a:headEnd type="none" w="med" len="med"/>
-                      <a:tailEnd type="none" w="med" len="med"/>
-                    </a:lnT>
-                    <a:lnB w="6350" cap="flat" cmpd="sng" algn="ctr">
-                      <a:solidFill>
-                        <a:srgbClr val="E2E8F0"/>
-                      </a:solidFill>
-                      <a:prstDash val="solid"/>
-                      <a:round/>
-                      <a:headEnd type="none" w="med" len="med"/>
-                      <a:tailEnd type="none" w="med" len="med"/>
-                    </a:lnB>
-                    <a:solidFill>
-                      <a:srgbClr val="FFFFFF"/>
-                    </a:solidFill>
-                  </a:tcPr>
-                </a:tc>
-              </a:tr>
-              <a:tr h="530352">
-                <a:tc>
-                  <a:txBody>
-                    <a:bodyPr/>
-                    <a:lstStyle/>
-                    <a:p>
-                      <a:pPr indent="0" marL="0">
-                        <a:buNone/>
-                      </a:pPr>
-                      <a:r>
-                        <a:rPr lang="en-US" sz="1050" b="1" dirty="0">
-                          <a:solidFill>
-                            <a:srgbClr val="006848"/>
-                          </a:solidFill>
-                          <a:latin typeface="Consolas" pitchFamily="34" charset="0"/>
-                          <a:ea typeface="Consolas" pitchFamily="34" charset="-122"/>
-                          <a:cs typeface="Consolas" pitchFamily="34" charset="-120"/>
-                        </a:rPr>
-                        <a:t>incidents</a:t>
-                      </a:r>
-                      <a:endParaRPr lang="en-US" sz="1050" dirty="0">
-                        <a:latin typeface="Consolas" charset="0"/>
-                        <a:ea typeface="Consolas" charset="0"/>
-                        <a:cs typeface="Consolas" charset="0"/>
-                      </a:endParaRPr>
-                    </a:p>
-                  </a:txBody>
-                  <a:tcPr marL="91440" marR="91440" marT="45720" marB="45720" anchor="ctr">
-                    <a:lnL w="6350" cap="flat" cmpd="sng" algn="ctr">
-                      <a:solidFill>
-                        <a:srgbClr val="E2E8F0"/>
-                      </a:solidFill>
-                      <a:prstDash val="solid"/>
-                      <a:round/>
-                      <a:headEnd type="none" w="med" len="med"/>
-                      <a:tailEnd type="none" w="med" len="med"/>
-                    </a:lnL>
-                    <a:lnR w="6350" cap="flat" cmpd="sng" algn="ctr">
-                      <a:solidFill>
-                        <a:srgbClr val="E2E8F0"/>
-                      </a:solidFill>
-                      <a:prstDash val="solid"/>
-                      <a:round/>
-                      <a:headEnd type="none" w="med" len="med"/>
-                      <a:tailEnd type="none" w="med" len="med"/>
-                    </a:lnR>
-                    <a:lnT w="6350" cap="flat" cmpd="sng" algn="ctr">
-                      <a:solidFill>
-                        <a:srgbClr val="E2E8F0"/>
-                      </a:solidFill>
-                      <a:prstDash val="solid"/>
-                      <a:round/>
-                      <a:headEnd type="none" w="med" len="med"/>
-                      <a:tailEnd type="none" w="med" len="med"/>
-                    </a:lnT>
-                    <a:lnB w="6350" cap="flat" cmpd="sng" algn="ctr">
-                      <a:solidFill>
-                        <a:srgbClr val="E2E8F0"/>
-                      </a:solidFill>
-                      <a:prstDash val="solid"/>
-                      <a:round/>
-                      <a:headEnd type="none" w="med" len="med"/>
-                      <a:tailEnd type="none" w="med" len="med"/>
-                    </a:lnB>
-                    <a:solidFill>
-                      <a:srgbClr val="FFFFFF"/>
-                    </a:solidFill>
-                  </a:tcPr>
-                </a:tc>
-                <a:tc>
-                  <a:txBody>
-                    <a:bodyPr/>
-                    <a:lstStyle/>
-                    <a:p>
-                      <a:pPr indent="0" marL="0">
-                        <a:buNone/>
-                      </a:pPr>
-                      <a:r>
-                        <a:rPr lang="en-US" sz="950" dirty="0">
-                          <a:solidFill>
-                            <a:srgbClr val="000000"/>
-                          </a:solidFill>
-                        </a:rPr>
-                        <a:t>vehicle_id, incident_type, severity, description, resolved</a:t>
-                      </a:r>
-                      <a:endParaRPr lang="en-US" sz="950" dirty="0"/>
-                    </a:p>
-                  </a:txBody>
-                  <a:tcPr marL="91440" marR="91440" marT="45720" marB="45720" anchor="ctr">
-                    <a:lnL w="6350" cap="flat" cmpd="sng" algn="ctr">
-                      <a:solidFill>
-                        <a:srgbClr val="E2E8F0"/>
-                      </a:solidFill>
-                      <a:prstDash val="solid"/>
-                      <a:round/>
-                      <a:headEnd type="none" w="med" len="med"/>
-                      <a:tailEnd type="none" w="med" len="med"/>
-                    </a:lnL>
-                    <a:lnR w="6350" cap="flat" cmpd="sng" algn="ctr">
-                      <a:solidFill>
-                        <a:srgbClr val="E2E8F0"/>
-                      </a:solidFill>
-                      <a:prstDash val="solid"/>
-                      <a:round/>
-                      <a:headEnd type="none" w="med" len="med"/>
-                      <a:tailEnd type="none" w="med" len="med"/>
-                    </a:lnR>
-                    <a:lnT w="6350" cap="flat" cmpd="sng" algn="ctr">
-                      <a:solidFill>
-                        <a:srgbClr val="E2E8F0"/>
-                      </a:solidFill>
-                      <a:prstDash val="solid"/>
-                      <a:round/>
-                      <a:headEnd type="none" w="med" len="med"/>
-                      <a:tailEnd type="none" w="med" len="med"/>
-                    </a:lnT>
-                    <a:lnB w="6350" cap="flat" cmpd="sng" algn="ctr">
-                      <a:solidFill>
-                        <a:srgbClr val="E2E8F0"/>
-                      </a:solidFill>
-                      <a:prstDash val="solid"/>
-                      <a:round/>
-                      <a:headEnd type="none" w="med" len="med"/>
-                      <a:tailEnd type="none" w="med" len="med"/>
-                    </a:lnB>
-                    <a:solidFill>
-                      <a:srgbClr val="FFFFFF"/>
-                    </a:solidFill>
-                  </a:tcPr>
-                </a:tc>
-                <a:tc>
-                  <a:txBody>
-                    <a:bodyPr/>
-                    <a:lstStyle/>
-                    <a:p>
-                      <a:pPr indent="0" marL="0">
-                        <a:buNone/>
-                      </a:pPr>
-                      <a:r>
-                        <a:rPr lang="en-US" sz="1050" b="1" dirty="0">
-                          <a:solidFill>
-                            <a:srgbClr val="DC2626"/>
-                          </a:solidFill>
-                        </a:rPr>
-                        <a:t>Read-After-Write</a:t>
-                      </a:r>
-                      <a:endParaRPr lang="en-US" sz="1050" dirty="0"/>
-                    </a:p>
-                  </a:txBody>
-                  <a:tcPr marL="91440" marR="91440" marT="45720" marB="45720" anchor="ctr">
-                    <a:lnL w="6350" cap="flat" cmpd="sng" algn="ctr">
-                      <a:solidFill>
-                        <a:srgbClr val="E2E8F0"/>
-                      </a:solidFill>
-                      <a:prstDash val="solid"/>
-                      <a:round/>
-                      <a:headEnd type="none" w="med" len="med"/>
-                      <a:tailEnd type="none" w="med" len="med"/>
-                    </a:lnL>
-                    <a:lnR w="6350" cap="flat" cmpd="sng" algn="ctr">
-                      <a:solidFill>
-                        <a:srgbClr val="E2E8F0"/>
-                      </a:solidFill>
-                      <a:prstDash val="solid"/>
-                      <a:round/>
-                      <a:headEnd type="none" w="med" len="med"/>
-                      <a:tailEnd type="none" w="med" len="med"/>
-                    </a:lnR>
-                    <a:lnT w="6350" cap="flat" cmpd="sng" algn="ctr">
-                      <a:solidFill>
-                        <a:srgbClr val="E2E8F0"/>
-                      </a:solidFill>
-                      <a:prstDash val="solid"/>
-                      <a:round/>
-                      <a:headEnd type="none" w="med" len="med"/>
-                      <a:tailEnd type="none" w="med" len="med"/>
-                    </a:lnT>
-                    <a:lnB w="6350" cap="flat" cmpd="sng" algn="ctr">
-                      <a:solidFill>
-                        <a:srgbClr val="E2E8F0"/>
-                      </a:solidFill>
-                      <a:prstDash val="solid"/>
-                      <a:round/>
-                      <a:headEnd type="none" w="med" len="med"/>
-                      <a:tailEnd type="none" w="med" len="med"/>
-                    </a:lnB>
-                    <a:solidFill>
-                      <a:srgbClr val="FFFFFF"/>
-                    </a:solidFill>
-                  </a:tcPr>
-                </a:tc>
-                <a:tc>
-                  <a:txBody>
-                    <a:bodyPr/>
-                    <a:lstStyle/>
-                    <a:p>
-                      <a:pPr indent="0" marL="0">
-                        <a:buNone/>
-                      </a:pPr>
-                      <a:r>
-                        <a:rPr lang="en-US" sz="1050" b="1" dirty="0">
-                          <a:solidFill>
-                            <a:srgbClr val="006848"/>
-                          </a:solidFill>
-                        </a:rPr>
-                        <a:t>PRIMARY ★</a:t>
-                      </a:r>
-                      <a:endParaRPr lang="en-US" sz="1050" dirty="0"/>
-                    </a:p>
-                  </a:txBody>
-                  <a:tcPr marL="91440" marR="91440" marT="45720" marB="45720" anchor="ctr">
-                    <a:lnL w="6350" cap="flat" cmpd="sng" algn="ctr">
-                      <a:solidFill>
-                        <a:srgbClr val="E2E8F0"/>
-                      </a:solidFill>
-                      <a:prstDash val="solid"/>
-                      <a:round/>
-                      <a:headEnd type="none" w="med" len="med"/>
-                      <a:tailEnd type="none" w="med" len="med"/>
-                    </a:lnL>
-                    <a:lnR w="6350" cap="flat" cmpd="sng" algn="ctr">
-                      <a:solidFill>
-                        <a:srgbClr val="E2E8F0"/>
-                      </a:solidFill>
-                      <a:prstDash val="solid"/>
-                      <a:round/>
-                      <a:headEnd type="none" w="med" len="med"/>
-                      <a:tailEnd type="none" w="med" len="med"/>
-                    </a:lnR>
-                    <a:lnT w="6350" cap="flat" cmpd="sng" algn="ctr">
-                      <a:solidFill>
-                        <a:srgbClr val="E2E8F0"/>
-                      </a:solidFill>
-                      <a:prstDash val="solid"/>
-                      <a:round/>
-                      <a:headEnd type="none" w="med" len="med"/>
-                      <a:tailEnd type="none" w="med" len="med"/>
-                    </a:lnT>
-                    <a:lnB w="6350" cap="flat" cmpd="sng" algn="ctr">
-                      <a:solidFill>
-                        <a:srgbClr val="E2E8F0"/>
-                      </a:solidFill>
-                      <a:prstDash val="solid"/>
-                      <a:round/>
-                      <a:headEnd type="none" w="med" len="med"/>
-                      <a:tailEnd type="none" w="med" len="med"/>
-                    </a:lnB>
-                    <a:solidFill>
-                      <a:srgbClr val="FFFFFF"/>
-                    </a:solidFill>
-                  </a:tcPr>
-                </a:tc>
-              </a:tr>
-            </a:tbl>
-          </a:graphicData>
-        </a:graphic>
-      </p:graphicFrame>
-      <p:sp>
-        <p:nvSpPr>
-          <p:cNvPr id="6" name="Text 3"/>
-          <p:cNvSpPr/>
-          <p:nvPr/>
-        </p:nvSpPr>
-        <p:spPr>
-          <a:xfrm>
-            <a:off x="320040" y="4754880"/>
-            <a:ext cx="8503920" cy="256032"/>
+      <p:sp>
+        <p:nvSpPr>
+          <p:cNvPr id="5" name="Shape 3"/>
+          <p:cNvSpPr/>
+          <p:nvPr/>
+        </p:nvSpPr>
+        <p:spPr>
+          <a:xfrm>
+            <a:off x="411480" y="1051560"/>
+            <a:ext cx="3703320" cy="3794760"/>
+          </a:xfrm>
+          <a:prstGeom prst="rect">
+            <a:avLst/>
+          </a:prstGeom>
+          <a:solidFill>
+            <a:srgbClr val="FFFFFF"/>
+          </a:solidFill>
+          <a:ln w="6350">
+            <a:solidFill>
+              <a:srgbClr val="E2E8F0"/>
+            </a:solidFill>
+            <a:prstDash val="solid"/>
+          </a:ln>
+          <a:effectLst>
+            <a:outerShdw sx="100000" sy="100000" kx="0" ky="0" algn="bl" rotWithShape="0" blurRad="101600" dist="38100" dir="8100000">
+              <a:srgbClr val="000000">
+                <a:alpha val="10000"/>
+              </a:srgbClr>
+            </a:outerShdw>
+          </a:effectLst>
+        </p:spPr>
+      </p:sp>
+      <p:pic>
+        <p:nvPicPr>
+          <p:cNvPr id="6" name="Image 0" descr="/Users/mertkarahan/ceng465_project/presentation/erd.png">    </p:cNvPr>
+          <p:cNvPicPr>
+            <a:picLocks noChangeAspect="1"/>
+          </p:cNvPicPr>
+          <p:nvPr/>
+        </p:nvPicPr>
+        <p:blipFill>
+          <a:blip r:embed="rId1"/>
+          <a:srcRect l="0" r="0" t="-1299" b="-1299"/>
+          <a:stretch/>
+        </p:blipFill>
+        <p:spPr>
+          <a:xfrm>
+            <a:off x="502920" y="1143000"/>
+            <a:ext cx="3520440" cy="3611880"/>
+          </a:xfrm>
+          <a:prstGeom prst="rect">
+            <a:avLst/>
+          </a:prstGeom>
+        </p:spPr>
+      </p:pic>
+      <p:sp>
+        <p:nvSpPr>
+          <p:cNvPr id="7" name="Text 4"/>
+          <p:cNvSpPr/>
+          <p:nvPr/>
+        </p:nvSpPr>
+        <p:spPr>
+          <a:xfrm>
+            <a:off x="411480" y="4882896"/>
+            <a:ext cx="3703320" cy="219456"/>
+          </a:xfrm>
+          <a:prstGeom prst="rect">
+            <a:avLst/>
+          </a:prstGeom>
+          <a:noFill/>
+          <a:ln/>
+        </p:spPr>
+        <p:txBody>
+          <a:bodyPr wrap="square" lIns="0" tIns="0" rIns="0" bIns="0" rtlCol="0" anchor="ctr"/>
+          <a:lstStyle/>
+          <a:p>
+            <a:pPr algn="ctr" indent="0" marL="0">
+              <a:buNone/>
+            </a:pPr>
+            <a:r>
+              <a:rPr lang="en-US" sz="750" i="1" dirty="0">
+                <a:solidFill>
+                  <a:srgbClr val="64748B"/>
+                </a:solidFill>
+              </a:rPr>
+              <a:t>Figure: ER diagram — vehicles, drivers, depots, shipments, positions, incidents, operation_logs</a:t>
+            </a:r>
+            <a:endParaRPr lang="en-US" sz="750" dirty="0"/>
+          </a:p>
+        </p:txBody>
+      </p:sp>
+      <p:sp>
+        <p:nvSpPr>
+          <p:cNvPr id="8" name="Text 5"/>
+          <p:cNvSpPr/>
+          <p:nvPr/>
+        </p:nvSpPr>
+        <p:spPr>
+          <a:xfrm>
+            <a:off x="4434840" y="1024128"/>
+            <a:ext cx="4297680" cy="292608"/>
           </a:xfrm>
           <a:prstGeom prst="rect">
             <a:avLst/>
@@ -5709,12 +4004,524 @@
               <a:buNone/>
             </a:pPr>
             <a:r>
-              <a:rPr lang="en-US" sz="950" i="1" dirty="0">
-                <a:solidFill>
-                  <a:srgbClr val="64748B"/>
-                </a:solidFill>
-              </a:rPr>
-              <a:t>★  incidents always read from PRIMARY — safety-critical: dispatcher must see own report instantly</a:t>
+              <a:rPr lang="en-US" sz="1300" b="1" dirty="0">
+                <a:solidFill>
+                  <a:srgbClr val="006848"/>
+                </a:solidFill>
+              </a:rPr>
+              <a:t>Shared Document Envelope</a:t>
+            </a:r>
+            <a:endParaRPr lang="en-US" sz="1300" dirty="0"/>
+          </a:p>
+        </p:txBody>
+      </p:sp>
+      <p:sp>
+        <p:nvSpPr>
+          <p:cNvPr id="9" name="Shape 6"/>
+          <p:cNvSpPr/>
+          <p:nvPr/>
+        </p:nvSpPr>
+        <p:spPr>
+          <a:xfrm>
+            <a:off x="4434840" y="1371600"/>
+            <a:ext cx="4297680" cy="502920"/>
+          </a:xfrm>
+          <a:prstGeom prst="rect">
+            <a:avLst/>
+          </a:prstGeom>
+          <a:solidFill>
+            <a:srgbClr val="E8F5F0"/>
+          </a:solidFill>
+          <a:ln w="6350">
+            <a:solidFill>
+              <a:srgbClr val="E2E8F0"/>
+            </a:solidFill>
+            <a:prstDash val="solid"/>
+          </a:ln>
+        </p:spPr>
+      </p:sp>
+      <p:sp>
+        <p:nvSpPr>
+          <p:cNvPr id="10" name="Text 7"/>
+          <p:cNvSpPr/>
+          <p:nvPr/>
+        </p:nvSpPr>
+        <p:spPr>
+          <a:xfrm>
+            <a:off x="4526280" y="1417320"/>
+            <a:ext cx="1554480" cy="411480"/>
+          </a:xfrm>
+          <a:prstGeom prst="rect">
+            <a:avLst/>
+          </a:prstGeom>
+          <a:noFill/>
+          <a:ln/>
+        </p:spPr>
+        <p:txBody>
+          <a:bodyPr wrap="square" lIns="0" tIns="0" rIns="0" bIns="0" rtlCol="0" anchor="ctr"/>
+          <a:lstStyle/>
+          <a:p>
+            <a:pPr indent="0" marL="0">
+              <a:buNone/>
+            </a:pPr>
+            <a:r>
+              <a:rPr lang="en-US" sz="1000" b="1" dirty="0">
+                <a:solidFill>
+                  <a:srgbClr val="006848"/>
+                </a:solidFill>
+                <a:latin typeface="Consolas" pitchFamily="34" charset="0"/>
+                <a:ea typeface="Consolas" pitchFamily="34" charset="-122"/>
+                <a:cs typeface="Consolas" pitchFamily="34" charset="-120"/>
+              </a:rPr>
+              <a:t>key / value</a:t>
+            </a:r>
+            <a:endParaRPr lang="en-US" sz="1000" dirty="0"/>
+          </a:p>
+        </p:txBody>
+      </p:sp>
+      <p:sp>
+        <p:nvSpPr>
+          <p:cNvPr id="11" name="Text 8"/>
+          <p:cNvSpPr/>
+          <p:nvPr/>
+        </p:nvSpPr>
+        <p:spPr>
+          <a:xfrm>
+            <a:off x="6080760" y="1417320"/>
+            <a:ext cx="2606040" cy="411480"/>
+          </a:xfrm>
+          <a:prstGeom prst="rect">
+            <a:avLst/>
+          </a:prstGeom>
+          <a:noFill/>
+          <a:ln/>
+        </p:spPr>
+        <p:txBody>
+          <a:bodyPr wrap="square" lIns="0" tIns="0" rIns="0" bIns="0" rtlCol="0" anchor="ctr"/>
+          <a:lstStyle/>
+          <a:p>
+            <a:pPr indent="0" marL="0">
+              <a:buNone/>
+            </a:pPr>
+            <a:r>
+              <a:rPr lang="en-US" sz="900" dirty="0">
+                <a:solidFill>
+                  <a:srgbClr val="1A1A2E"/>
+                </a:solidFill>
+              </a:rPr>
+              <a:t>Logical id + domain payload (vehicle, shipment, position, …)</a:t>
+            </a:r>
+            <a:endParaRPr lang="en-US" sz="900" dirty="0"/>
+          </a:p>
+        </p:txBody>
+      </p:sp>
+      <p:sp>
+        <p:nvSpPr>
+          <p:cNvPr id="12" name="Shape 9"/>
+          <p:cNvSpPr/>
+          <p:nvPr/>
+        </p:nvSpPr>
+        <p:spPr>
+          <a:xfrm>
+            <a:off x="4434840" y="1938528"/>
+            <a:ext cx="4297680" cy="502920"/>
+          </a:xfrm>
+          <a:prstGeom prst="rect">
+            <a:avLst/>
+          </a:prstGeom>
+          <a:solidFill>
+            <a:srgbClr val="FFFFFF"/>
+          </a:solidFill>
+          <a:ln w="6350">
+            <a:solidFill>
+              <a:srgbClr val="E2E8F0"/>
+            </a:solidFill>
+            <a:prstDash val="solid"/>
+          </a:ln>
+        </p:spPr>
+      </p:sp>
+      <p:sp>
+        <p:nvSpPr>
+          <p:cNvPr id="13" name="Text 10"/>
+          <p:cNvSpPr/>
+          <p:nvPr/>
+        </p:nvSpPr>
+        <p:spPr>
+          <a:xfrm>
+            <a:off x="4526280" y="1984248"/>
+            <a:ext cx="1554480" cy="411480"/>
+          </a:xfrm>
+          <a:prstGeom prst="rect">
+            <a:avLst/>
+          </a:prstGeom>
+          <a:noFill/>
+          <a:ln/>
+        </p:spPr>
+        <p:txBody>
+          <a:bodyPr wrap="square" lIns="0" tIns="0" rIns="0" bIns="0" rtlCol="0" anchor="ctr"/>
+          <a:lstStyle/>
+          <a:p>
+            <a:pPr indent="0" marL="0">
+              <a:buNone/>
+            </a:pPr>
+            <a:r>
+              <a:rPr lang="en-US" sz="1000" b="1" dirty="0">
+                <a:solidFill>
+                  <a:srgbClr val="006848"/>
+                </a:solidFill>
+                <a:latin typeface="Consolas" pitchFamily="34" charset="0"/>
+                <a:ea typeface="Consolas" pitchFamily="34" charset="-122"/>
+                <a:cs typeface="Consolas" pitchFamily="34" charset="-120"/>
+              </a:rPr>
+              <a:t>version</a:t>
+            </a:r>
+            <a:endParaRPr lang="en-US" sz="1000" dirty="0"/>
+          </a:p>
+        </p:txBody>
+      </p:sp>
+      <p:sp>
+        <p:nvSpPr>
+          <p:cNvPr id="14" name="Text 11"/>
+          <p:cNvSpPr/>
+          <p:nvPr/>
+        </p:nvSpPr>
+        <p:spPr>
+          <a:xfrm>
+            <a:off x="6080760" y="1984248"/>
+            <a:ext cx="2606040" cy="411480"/>
+          </a:xfrm>
+          <a:prstGeom prst="rect">
+            <a:avLst/>
+          </a:prstGeom>
+          <a:noFill/>
+          <a:ln/>
+        </p:spPr>
+        <p:txBody>
+          <a:bodyPr wrap="square" lIns="0" tIns="0" rIns="0" bIns="0" rtlCol="0" anchor="ctr"/>
+          <a:lstStyle/>
+          <a:p>
+            <a:pPr indent="0" marL="0">
+              <a:buNone/>
+            </a:pPr>
+            <a:r>
+              <a:rPr lang="en-US" sz="900" dirty="0">
+                <a:solidFill>
+                  <a:srgbClr val="1A1A2E"/>
+                </a:solidFill>
+              </a:rPr>
+              <a:t>Monotonic counter — the reconciliation key for async (w=1) writes</a:t>
+            </a:r>
+            <a:endParaRPr lang="en-US" sz="900" dirty="0"/>
+          </a:p>
+        </p:txBody>
+      </p:sp>
+      <p:sp>
+        <p:nvSpPr>
+          <p:cNvPr id="15" name="Shape 12"/>
+          <p:cNvSpPr/>
+          <p:nvPr/>
+        </p:nvSpPr>
+        <p:spPr>
+          <a:xfrm>
+            <a:off x="4434840" y="2505456"/>
+            <a:ext cx="4297680" cy="502920"/>
+          </a:xfrm>
+          <a:prstGeom prst="rect">
+            <a:avLst/>
+          </a:prstGeom>
+          <a:solidFill>
+            <a:srgbClr val="E8F5F0"/>
+          </a:solidFill>
+          <a:ln w="6350">
+            <a:solidFill>
+              <a:srgbClr val="E2E8F0"/>
+            </a:solidFill>
+            <a:prstDash val="solid"/>
+          </a:ln>
+        </p:spPr>
+      </p:sp>
+      <p:sp>
+        <p:nvSpPr>
+          <p:cNvPr id="16" name="Text 13"/>
+          <p:cNvSpPr/>
+          <p:nvPr/>
+        </p:nvSpPr>
+        <p:spPr>
+          <a:xfrm>
+            <a:off x="4526280" y="2551176"/>
+            <a:ext cx="1554480" cy="411480"/>
+          </a:xfrm>
+          <a:prstGeom prst="rect">
+            <a:avLst/>
+          </a:prstGeom>
+          <a:noFill/>
+          <a:ln/>
+        </p:spPr>
+        <p:txBody>
+          <a:bodyPr wrap="square" lIns="0" tIns="0" rIns="0" bIns="0" rtlCol="0" anchor="ctr"/>
+          <a:lstStyle/>
+          <a:p>
+            <a:pPr indent="0" marL="0">
+              <a:buNone/>
+            </a:pPr>
+            <a:r>
+              <a:rPr lang="en-US" sz="1000" b="1" dirty="0">
+                <a:solidFill>
+                  <a:srgbClr val="006848"/>
+                </a:solidFill>
+                <a:latin typeface="Consolas" pitchFamily="34" charset="0"/>
+                <a:ea typeface="Consolas" pitchFamily="34" charset="-122"/>
+                <a:cs typeface="Consolas" pitchFamily="34" charset="-120"/>
+              </a:rPr>
+              <a:t>last_updated</a:t>
+            </a:r>
+            <a:endParaRPr lang="en-US" sz="1000" dirty="0"/>
+          </a:p>
+        </p:txBody>
+      </p:sp>
+      <p:sp>
+        <p:nvSpPr>
+          <p:cNvPr id="17" name="Text 14"/>
+          <p:cNvSpPr/>
+          <p:nvPr/>
+        </p:nvSpPr>
+        <p:spPr>
+          <a:xfrm>
+            <a:off x="6080760" y="2551176"/>
+            <a:ext cx="2606040" cy="411480"/>
+          </a:xfrm>
+          <a:prstGeom prst="rect">
+            <a:avLst/>
+          </a:prstGeom>
+          <a:noFill/>
+          <a:ln/>
+        </p:spPr>
+        <p:txBody>
+          <a:bodyPr wrap="square" lIns="0" tIns="0" rIns="0" bIns="0" rtlCol="0" anchor="ctr"/>
+          <a:lstStyle/>
+          <a:p>
+            <a:pPr indent="0" marL="0">
+              <a:buNone/>
+            </a:pPr>
+            <a:r>
+              <a:rPr lang="en-US" sz="900" dirty="0">
+                <a:solidFill>
+                  <a:srgbClr val="1A1A2E"/>
+                </a:solidFill>
+              </a:rPr>
+              <a:t>UTC timestamp set on every insert / update / delete</a:t>
+            </a:r>
+            <a:endParaRPr lang="en-US" sz="900" dirty="0"/>
+          </a:p>
+        </p:txBody>
+      </p:sp>
+      <p:sp>
+        <p:nvSpPr>
+          <p:cNvPr id="18" name="Shape 15"/>
+          <p:cNvSpPr/>
+          <p:nvPr/>
+        </p:nvSpPr>
+        <p:spPr>
+          <a:xfrm>
+            <a:off x="4434840" y="3072384"/>
+            <a:ext cx="4297680" cy="502920"/>
+          </a:xfrm>
+          <a:prstGeom prst="rect">
+            <a:avLst/>
+          </a:prstGeom>
+          <a:solidFill>
+            <a:srgbClr val="FFFFFF"/>
+          </a:solidFill>
+          <a:ln w="6350">
+            <a:solidFill>
+              <a:srgbClr val="E2E8F0"/>
+            </a:solidFill>
+            <a:prstDash val="solid"/>
+          </a:ln>
+        </p:spPr>
+      </p:sp>
+      <p:sp>
+        <p:nvSpPr>
+          <p:cNvPr id="19" name="Text 16"/>
+          <p:cNvSpPr/>
+          <p:nvPr/>
+        </p:nvSpPr>
+        <p:spPr>
+          <a:xfrm>
+            <a:off x="4526280" y="3118104"/>
+            <a:ext cx="1554480" cy="411480"/>
+          </a:xfrm>
+          <a:prstGeom prst="rect">
+            <a:avLst/>
+          </a:prstGeom>
+          <a:noFill/>
+          <a:ln/>
+        </p:spPr>
+        <p:txBody>
+          <a:bodyPr wrap="square" lIns="0" tIns="0" rIns="0" bIns="0" rtlCol="0" anchor="ctr"/>
+          <a:lstStyle/>
+          <a:p>
+            <a:pPr indent="0" marL="0">
+              <a:buNone/>
+            </a:pPr>
+            <a:r>
+              <a:rPr lang="en-US" sz="1000" b="1" dirty="0">
+                <a:solidFill>
+                  <a:srgbClr val="006848"/>
+                </a:solidFill>
+                <a:latin typeface="Consolas" pitchFamily="34" charset="0"/>
+                <a:ea typeface="Consolas" pitchFamily="34" charset="-122"/>
+                <a:cs typeface="Consolas" pitchFamily="34" charset="-120"/>
+              </a:rPr>
+              <a:t>deleted</a:t>
+            </a:r>
+            <a:endParaRPr lang="en-US" sz="1000" dirty="0"/>
+          </a:p>
+        </p:txBody>
+      </p:sp>
+      <p:sp>
+        <p:nvSpPr>
+          <p:cNvPr id="20" name="Text 17"/>
+          <p:cNvSpPr/>
+          <p:nvPr/>
+        </p:nvSpPr>
+        <p:spPr>
+          <a:xfrm>
+            <a:off x="6080760" y="3118104"/>
+            <a:ext cx="2606040" cy="411480"/>
+          </a:xfrm>
+          <a:prstGeom prst="rect">
+            <a:avLst/>
+          </a:prstGeom>
+          <a:noFill/>
+          <a:ln/>
+        </p:spPr>
+        <p:txBody>
+          <a:bodyPr wrap="square" lIns="0" tIns="0" rIns="0" bIns="0" rtlCol="0" anchor="ctr"/>
+          <a:lstStyle/>
+          <a:p>
+            <a:pPr indent="0" marL="0">
+              <a:buNone/>
+            </a:pPr>
+            <a:r>
+              <a:rPr lang="en-US" sz="900" dirty="0">
+                <a:solidFill>
+                  <a:srgbClr val="1A1A2E"/>
+                </a:solidFill>
+              </a:rPr>
+              <a:t>Soft-delete flag — documents are never hard-removed</a:t>
+            </a:r>
+            <a:endParaRPr lang="en-US" sz="900" dirty="0"/>
+          </a:p>
+        </p:txBody>
+      </p:sp>
+      <p:sp>
+        <p:nvSpPr>
+          <p:cNvPr id="21" name="Shape 18"/>
+          <p:cNvSpPr/>
+          <p:nvPr/>
+        </p:nvSpPr>
+        <p:spPr>
+          <a:xfrm>
+            <a:off x="4434840" y="3730752"/>
+            <a:ext cx="4297680" cy="1005840"/>
+          </a:xfrm>
+          <a:prstGeom prst="rect">
+            <a:avLst/>
+          </a:prstGeom>
+          <a:solidFill>
+            <a:srgbClr val="ECFDF5"/>
+          </a:solidFill>
+          <a:ln w="12700">
+            <a:solidFill>
+              <a:srgbClr val="006848"/>
+            </a:solidFill>
+            <a:prstDash val="solid"/>
+          </a:ln>
+        </p:spPr>
+      </p:sp>
+      <p:sp>
+        <p:nvSpPr>
+          <p:cNvPr id="22" name="Text 19"/>
+          <p:cNvSpPr/>
+          <p:nvPr/>
+        </p:nvSpPr>
+        <p:spPr>
+          <a:xfrm>
+            <a:off x="4544568" y="3803904"/>
+            <a:ext cx="4078224" cy="868680"/>
+          </a:xfrm>
+          <a:prstGeom prst="rect">
+            <a:avLst/>
+          </a:prstGeom>
+          <a:noFill/>
+          <a:ln/>
+        </p:spPr>
+        <p:txBody>
+          <a:bodyPr wrap="square" lIns="0" tIns="0" rIns="0" bIns="0" rtlCol="0" anchor="ctr"/>
+          <a:lstStyle/>
+          <a:p>
+            <a:pPr indent="0" marL="0">
+              <a:lnSpc>
+                <a:spcPct val="112000"/>
+              </a:lnSpc>
+              <a:buNone/>
+            </a:pPr>
+            <a:r>
+              <a:rPr lang="en-US" sz="950" b="1" dirty="0">
+                <a:solidFill>
+                  <a:srgbClr val="006848"/>
+                </a:solidFill>
+                <a:latin typeface="Consolas" pitchFamily="34" charset="0"/>
+                <a:ea typeface="Consolas" pitchFamily="34" charset="-122"/>
+                <a:cs typeface="Consolas" pitchFamily="34" charset="-120"/>
+              </a:rPr>
+              <a:t>operation_logs </a:t>
+            </a:r>
+            <a:pPr indent="0" marL="0">
+              <a:lnSpc>
+                <a:spcPct val="112000"/>
+              </a:lnSpc>
+              <a:buNone/>
+            </a:pPr>
+            <a:r>
+              <a:rPr lang="en-US" sz="950" dirty="0">
+                <a:solidFill>
+                  <a:srgbClr val="1A1A2E"/>
+                </a:solidFill>
+              </a:rPr>
+              <a:t>links to all 6 fleet collections via </a:t>
+            </a:r>
+            <a:pPr indent="0" marL="0">
+              <a:lnSpc>
+                <a:spcPct val="112000"/>
+              </a:lnSpc>
+              <a:buNone/>
+            </a:pPr>
+            <a:r>
+              <a:rPr lang="en-US" sz="950" b="1" dirty="0">
+                <a:solidFill>
+                  <a:srgbClr val="006848"/>
+                </a:solidFill>
+                <a:latin typeface="Consolas" pitchFamily="34" charset="0"/>
+                <a:ea typeface="Consolas" pitchFamily="34" charset="-122"/>
+                <a:cs typeface="Consolas" pitchFamily="34" charset="-120"/>
+              </a:rPr>
+              <a:t>target_id</a:t>
+            </a:r>
+            <a:pPr indent="0" marL="0">
+              <a:lnSpc>
+                <a:spcPct val="112000"/>
+              </a:lnSpc>
+              <a:buNone/>
+            </a:pPr>
+            <a:r>
+              <a:rPr lang="en-US" sz="950" dirty="0">
+                <a:solidFill>
+                  <a:srgbClr val="1A1A2E"/>
+                </a:solidFill>
+              </a:rPr>
+              <a:t> — every insert / update / delete produces exactly one WAL-style entry, used to measure replication delay and drive reconciliation.</a:t>
             </a:r>
             <a:endParaRPr lang="en-US" sz="950" dirty="0"/>
           </a:p>
@@ -7291,7 +6098,7 @@
                   <a:srgbClr val="006848"/>
                 </a:solidFill>
               </a:rPr>
-              <a:t>61.8 ms</a:t>
+              <a:t>166.4 ms</a:t>
             </a:r>
             <a:endParaRPr lang="en-US" sz="3200" dirty="0"/>
           </a:p>
@@ -7363,7 +6170,7 @@
                   <a:srgbClr val="00A86B"/>
                 </a:solidFill>
               </a:rPr>
-              <a:t>10.6 ms</a:t>
+              <a:t>~159.8 ms</a:t>
             </a:r>
             <a:endParaRPr lang="en-US" sz="3200" dirty="0"/>
           </a:p>
@@ -7399,7 +6206,7 @@
                   <a:srgbClr val="64748B"/>
                 </a:solidFill>
               </a:rPr>
-              <a:t>Oplog propagation</a:t>
+              <a:t>SECONDARY apply + ACK</a:t>
             </a:r>
             <a:endParaRPr lang="en-US" sz="1000" dirty="0"/>
           </a:p>
@@ -7435,7 +6242,7 @@
                   <a:srgbClr val="D97706"/>
                 </a:solidFill>
               </a:rPr>
-              <a:t>~52 ms</a:t>
+              <a:t>&lt; 4 ms</a:t>
             </a:r>
             <a:endParaRPr lang="en-US" sz="3200" dirty="0"/>
           </a:p>
@@ -7471,7 +6278,7 @@
                   <a:srgbClr val="64748B"/>
                 </a:solidFill>
               </a:rPr>
-              <a:t>Sync overhead vs async</a:t>
+              <a:t>Each network leg (one-way)</a:t>
             </a:r>
             <a:endParaRPr lang="en-US" sz="1000" dirty="0"/>
           </a:p>
@@ -7624,7 +6431,7 @@
               <a:buNone/>
             </a:pPr>
             <a:r>
-              <a:rPr lang="en-US" sz="1100" b="1" dirty="0">
+              <a:rPr lang="en-US" sz="1050" b="1" dirty="0">
                 <a:solidFill>
                   <a:srgbClr val="006848"/>
                 </a:solidFill>
@@ -7635,14 +6442,14 @@
               <a:buNone/>
             </a:pPr>
             <a:r>
-              <a:rPr lang="en-US" sz="1100" dirty="0">
+              <a:rPr lang="en-US" sz="1050" dirty="0">
                 <a:solidFill>
                   <a:srgbClr val="1A1A2E"/>
                 </a:solidFill>
               </a:rPr>
-              <a:t>PRIMARY lane shows a wide processing band blocked on SECONDARY's ACK — this directly visualises the synchronous replication penalty (the price of durability).</a:t>
-            </a:r>
-            <a:endParaRPr lang="en-US" sz="1100" dirty="0"/>
+              <a:t>PRIMARY lane shows a wide ~160 ms processing band blocked on SECONDARY's ACK — this directly visualises the synchronous replication penalty (the price of durability). The dominant cost is SECONDARY's oplog replay &amp; disk fsync, not the network — each hop is under 4 ms.</a:t>
+            </a:r>
+            <a:endParaRPr lang="en-US" sz="1050" dirty="0"/>
           </a:p>
         </p:txBody>
       </p:sp>
@@ -7661,13 +6468,13 @@
             <a:avLst/>
           </a:prstGeom>
           <a:solidFill>
-            <a:srgbClr val="F1F5F9"/>
+            <a:srgbClr val="0D1117"/>
           </a:solidFill>
-          <a:ln w="12700">
+          <a:ln w="6350">
             <a:solidFill>
-              <a:srgbClr val="CBD5E1"/>
+              <a:srgbClr val="E2E8F0"/>
             </a:solidFill>
-            <a:prstDash val="dash"/>
+            <a:prstDash val="solid"/>
           </a:ln>
           <a:effectLst>
             <a:outerShdw sx="100000" sy="100000" kx="0" ky="0" algn="bl" rotWithShape="0" blurRad="101600" dist="38100" dir="8100000">
@@ -7678,42 +6485,30 @@
           </a:effectLst>
         </p:spPr>
       </p:sp>
-      <p:sp>
-        <p:nvSpPr>
-          <p:cNvPr id="18" name="Text 16"/>
-          <p:cNvSpPr/>
-          <p:nvPr/>
-        </p:nvSpPr>
-        <p:spPr>
-          <a:xfrm>
-            <a:off x="365760" y="3035808"/>
-            <a:ext cx="8412480" cy="1783080"/>
-          </a:xfrm>
-          <a:prstGeom prst="rect">
-            <a:avLst/>
-          </a:prstGeom>
-          <a:noFill/>
-          <a:ln/>
-        </p:spPr>
-        <p:txBody>
-          <a:bodyPr wrap="square" lIns="0" tIns="0" rIns="0" bIns="0" rtlCol="0" anchor="ctr"/>
-          <a:lstStyle/>
-          <a:p>
-            <a:pPr algn="ctr" indent="0" marL="0">
-              <a:buNone/>
-            </a:pPr>
-            <a:r>
-              <a:rPr lang="en-US" sz="1400" i="1" dirty="0">
-                <a:solidFill>
-                  <a:srgbClr val="94A3B8"/>
-                </a:solidFill>
-              </a:rPr>
-              <a:t>[  Insert timeline screenshot here  ]</a:t>
-            </a:r>
-            <a:endParaRPr lang="en-US" sz="1400" dirty="0"/>
-          </a:p>
-        </p:txBody>
-      </p:sp>
+      <p:pic>
+        <p:nvPicPr>
+          <p:cNvPr id="18" name="Image 0" descr="/Users/mertkarahan/ceng465_project/presentation/exp1.png">    </p:cNvPr>
+          <p:cNvPicPr>
+            <a:picLocks noChangeAspect="1"/>
+          </p:cNvPicPr>
+          <p:nvPr/>
+        </p:nvPicPr>
+        <p:blipFill>
+          <a:blip r:embed="rId1"/>
+          <a:stretch>
+            <a:fillRect/>
+          </a:stretch>
+        </p:blipFill>
+        <p:spPr>
+          <a:xfrm>
+            <a:off x="1773936" y="3035808"/>
+            <a:ext cx="5605272" cy="1783080"/>
+          </a:xfrm>
+          <a:prstGeom prst="rect">
+            <a:avLst/>
+          </a:prstGeom>
+        </p:spPr>
+      </p:pic>
     </p:spTree>
   </p:cSld>
   <p:clrMapOvr>
@@ -7868,7 +6663,7 @@
                   <a:srgbClr val="1A1A2E"/>
                 </a:solidFill>
               </a:rPr>
-              <a:t>Asynchronous update (v1→v2) issued; ok returns without waiting. Three secondary reads at 330 ms, 680 ms, 1281 ms from experiment start.</a:t>
+              <a:t>Asynchronous update (v1→v2) issued with w=1; ok returns in 10.6 ms without waiting for SECONDARY. Three secondary reads at 212 ms, 561 ms, 1163 ms from experiment start, interleaved with PRIMARY reference reads.</a:t>
             </a:r>
             <a:endParaRPr lang="en-US" sz="1150" dirty="0"/>
           </a:p>
@@ -7901,10 +6696,10 @@
             <a:r>
               <a:rPr lang="en-US" sz="3200" b="1" dirty="0">
                 <a:solidFill>
-                  <a:srgbClr val="D97706"/>
-                </a:solidFill>
-              </a:rPr>
-              <a:t>127 ms</a:t>
+                  <a:srgbClr val="00A86B"/>
+                </a:solidFill>
+              </a:rPr>
+              <a:t>10.6 ms</a:t>
             </a:r>
             <a:endParaRPr lang="en-US" sz="3200" dirty="0"/>
           </a:p>
@@ -7940,7 +6735,7 @@
                   <a:srgbClr val="64748B"/>
                 </a:solidFill>
               </a:rPr>
-              <a:t>Write returned*</a:t>
+              <a:t>Write returned (async)</a:t>
             </a:r>
             <a:endParaRPr lang="en-US" sz="1000" dirty="0"/>
           </a:p>
@@ -8012,7 +6807,7 @@
                   <a:srgbClr val="64748B"/>
                 </a:solidFill>
               </a:rPr>
-              <a:t>Stale reads observed</a:t>
+              <a:t>Stale secondary reads</a:t>
             </a:r>
             <a:endParaRPr lang="en-US" sz="1000" dirty="0"/>
           </a:p>
@@ -8048,7 +6843,7 @@
                   <a:srgbClr val="D97706"/>
                 </a:solidFill>
               </a:rPr>
-              <a:t>1281 ms</a:t>
+              <a:t>1163 ms</a:t>
             </a:r>
             <a:endParaRPr lang="en-US" sz="3200" dirty="0"/>
           </a:p>
@@ -8164,1311 +6959,14 @@
       </p:sp>
       <p:sp>
         <p:nvSpPr>
-          <p:cNvPr id="14" name="Text 12"/>
-          <p:cNvSpPr/>
-          <p:nvPr/>
-        </p:nvSpPr>
-        <p:spPr>
-          <a:xfrm>
-            <a:off x="365760" y="2286000"/>
-            <a:ext cx="8412480" cy="228600"/>
-          </a:xfrm>
-          <a:prstGeom prst="rect">
-            <a:avLst/>
-          </a:prstGeom>
-          <a:noFill/>
-          <a:ln/>
-        </p:spPr>
-        <p:txBody>
-          <a:bodyPr wrap="square" lIns="0" tIns="0" rIns="0" bIns="0" rtlCol="0" anchor="ctr"/>
-          <a:lstStyle/>
-          <a:p>
-            <a:pPr indent="0" marL="0">
-              <a:buNone/>
-            </a:pPr>
-            <a:r>
-              <a:rPr lang="en-US" sz="900" i="1" dirty="0">
-                <a:solidFill>
-                  <a:srgbClr val="64748B"/>
-                </a:solidFill>
-              </a:rPr>
-              <a:t>* Elevated due to replica-set reconfig overhead; typical async write: 9–12 ms</a:t>
-            </a:r>
-            <a:endParaRPr lang="en-US" sz="900" dirty="0"/>
-          </a:p>
-        </p:txBody>
-      </p:sp>
-      <p:graphicFrame>
-        <p:nvGraphicFramePr>
-          <p:cNvPr id="7" name="Table 0"/>
-          <p:cNvGraphicFramePr>
-            <a:graphicFrameLocks noGrp="1"/>
-          </p:cNvGraphicFramePr>
-          <p:nvPr>
-            <p:extLst>
-              <p:ext uri="{D42A27DB-BD31-4B8C-83A1-F6EECF244321}">
-                <p14:modId xmlns:p14="http://schemas.microsoft.com/office/powerpoint/2010/main" val="1579011935"/>
-              </p:ext>
-            </p:extLst>
-          </p:nvPr>
-        </p:nvGraphicFramePr>
-        <p:xfrm>
-          <a:off x="365760" y="2578608"/>
-          <a:ext cx="8412480" cy="1508760"/>
-        </p:xfrm>
-        <a:graphic>
-          <a:graphicData uri="http://schemas.openxmlformats.org/drawingml/2006/table">
-            <a:tbl>
-              <a:tblPr/>
-              <a:tblGrid>
-                <a:gridCol w="640080"/>
-                <a:gridCol w="1371600"/>
-                <a:gridCol w="2103120"/>
-                <a:gridCol w="2103120"/>
-                <a:gridCol w="2194560"/>
-              </a:tblGrid>
-              <a:tr h="374904">
-                <a:tc>
-                  <a:txBody>
-                    <a:bodyPr/>
-                    <a:lstStyle/>
-                    <a:p>
-                      <a:pPr indent="0" marL="0">
-                        <a:buNone/>
-                      </a:pPr>
-                      <a:r>
-                        <a:rPr lang="en-US" sz="1000" b="1" dirty="0">
-                          <a:solidFill>
-                            <a:srgbClr val="FFFFFF"/>
-                          </a:solidFill>
-                        </a:rPr>
-                        <a:t>Read</a:t>
-                      </a:r>
-                      <a:endParaRPr lang="en-US" sz="1000" dirty="0"/>
-                    </a:p>
-                  </a:txBody>
-                  <a:tcPr marL="91440" marR="91440" marT="45720" marB="45720" anchor="ctr">
-                    <a:lnL w="6350" cap="flat" cmpd="sng" algn="ctr">
-                      <a:solidFill>
-                        <a:srgbClr val="E2E8F0"/>
-                      </a:solidFill>
-                      <a:prstDash val="solid"/>
-                      <a:round/>
-                      <a:headEnd type="none" w="med" len="med"/>
-                      <a:tailEnd type="none" w="med" len="med"/>
-                    </a:lnL>
-                    <a:lnR w="6350" cap="flat" cmpd="sng" algn="ctr">
-                      <a:solidFill>
-                        <a:srgbClr val="E2E8F0"/>
-                      </a:solidFill>
-                      <a:prstDash val="solid"/>
-                      <a:round/>
-                      <a:headEnd type="none" w="med" len="med"/>
-                      <a:tailEnd type="none" w="med" len="med"/>
-                    </a:lnR>
-                    <a:lnT w="6350" cap="flat" cmpd="sng" algn="ctr">
-                      <a:solidFill>
-                        <a:srgbClr val="E2E8F0"/>
-                      </a:solidFill>
-                      <a:prstDash val="solid"/>
-                      <a:round/>
-                      <a:headEnd type="none" w="med" len="med"/>
-                      <a:tailEnd type="none" w="med" len="med"/>
-                    </a:lnT>
-                    <a:lnB w="6350" cap="flat" cmpd="sng" algn="ctr">
-                      <a:solidFill>
-                        <a:srgbClr val="E2E8F0"/>
-                      </a:solidFill>
-                      <a:prstDash val="solid"/>
-                      <a:round/>
-                      <a:headEnd type="none" w="med" len="med"/>
-                      <a:tailEnd type="none" w="med" len="med"/>
-                    </a:lnB>
-                    <a:solidFill>
-                      <a:srgbClr val="006848"/>
-                    </a:solidFill>
-                  </a:tcPr>
-                </a:tc>
-                <a:tc>
-                  <a:txBody>
-                    <a:bodyPr/>
-                    <a:lstStyle/>
-                    <a:p>
-                      <a:pPr indent="0" marL="0">
-                        <a:buNone/>
-                      </a:pPr>
-                      <a:r>
-                        <a:rPr lang="en-US" sz="1000" b="1" dirty="0">
-                          <a:solidFill>
-                            <a:srgbClr val="FFFFFF"/>
-                          </a:solidFill>
-                        </a:rPr>
-                        <a:t>Time (ms)</a:t>
-                      </a:r>
-                      <a:endParaRPr lang="en-US" sz="1000" dirty="0"/>
-                    </a:p>
-                  </a:txBody>
-                  <a:tcPr marL="91440" marR="91440" marT="45720" marB="45720" anchor="ctr">
-                    <a:lnL w="6350" cap="flat" cmpd="sng" algn="ctr">
-                      <a:solidFill>
-                        <a:srgbClr val="E2E8F0"/>
-                      </a:solidFill>
-                      <a:prstDash val="solid"/>
-                      <a:round/>
-                      <a:headEnd type="none" w="med" len="med"/>
-                      <a:tailEnd type="none" w="med" len="med"/>
-                    </a:lnL>
-                    <a:lnR w="6350" cap="flat" cmpd="sng" algn="ctr">
-                      <a:solidFill>
-                        <a:srgbClr val="E2E8F0"/>
-                      </a:solidFill>
-                      <a:prstDash val="solid"/>
-                      <a:round/>
-                      <a:headEnd type="none" w="med" len="med"/>
-                      <a:tailEnd type="none" w="med" len="med"/>
-                    </a:lnR>
-                    <a:lnT w="6350" cap="flat" cmpd="sng" algn="ctr">
-                      <a:solidFill>
-                        <a:srgbClr val="E2E8F0"/>
-                      </a:solidFill>
-                      <a:prstDash val="solid"/>
-                      <a:round/>
-                      <a:headEnd type="none" w="med" len="med"/>
-                      <a:tailEnd type="none" w="med" len="med"/>
-                    </a:lnT>
-                    <a:lnB w="6350" cap="flat" cmpd="sng" algn="ctr">
-                      <a:solidFill>
-                        <a:srgbClr val="E2E8F0"/>
-                      </a:solidFill>
-                      <a:prstDash val="solid"/>
-                      <a:round/>
-                      <a:headEnd type="none" w="med" len="med"/>
-                      <a:tailEnd type="none" w="med" len="med"/>
-                    </a:lnB>
-                    <a:solidFill>
-                      <a:srgbClr val="006848"/>
-                    </a:solidFill>
-                  </a:tcPr>
-                </a:tc>
-                <a:tc>
-                  <a:txBody>
-                    <a:bodyPr/>
-                    <a:lstStyle/>
-                    <a:p>
-                      <a:pPr indent="0" marL="0">
-                        <a:buNone/>
-                      </a:pPr>
-                      <a:r>
-                        <a:rPr lang="en-US" sz="1000" b="1" dirty="0">
-                          <a:solidFill>
-                            <a:srgbClr val="FFFFFF"/>
-                          </a:solidFill>
-                        </a:rPr>
-                        <a:t>Node</a:t>
-                      </a:r>
-                      <a:endParaRPr lang="en-US" sz="1000" dirty="0"/>
-                    </a:p>
-                  </a:txBody>
-                  <a:tcPr marL="91440" marR="91440" marT="45720" marB="45720" anchor="ctr">
-                    <a:lnL w="6350" cap="flat" cmpd="sng" algn="ctr">
-                      <a:solidFill>
-                        <a:srgbClr val="E2E8F0"/>
-                      </a:solidFill>
-                      <a:prstDash val="solid"/>
-                      <a:round/>
-                      <a:headEnd type="none" w="med" len="med"/>
-                      <a:tailEnd type="none" w="med" len="med"/>
-                    </a:lnL>
-                    <a:lnR w="6350" cap="flat" cmpd="sng" algn="ctr">
-                      <a:solidFill>
-                        <a:srgbClr val="E2E8F0"/>
-                      </a:solidFill>
-                      <a:prstDash val="solid"/>
-                      <a:round/>
-                      <a:headEnd type="none" w="med" len="med"/>
-                      <a:tailEnd type="none" w="med" len="med"/>
-                    </a:lnR>
-                    <a:lnT w="6350" cap="flat" cmpd="sng" algn="ctr">
-                      <a:solidFill>
-                        <a:srgbClr val="E2E8F0"/>
-                      </a:solidFill>
-                      <a:prstDash val="solid"/>
-                      <a:round/>
-                      <a:headEnd type="none" w="med" len="med"/>
-                      <a:tailEnd type="none" w="med" len="med"/>
-                    </a:lnT>
-                    <a:lnB w="6350" cap="flat" cmpd="sng" algn="ctr">
-                      <a:solidFill>
-                        <a:srgbClr val="E2E8F0"/>
-                      </a:solidFill>
-                      <a:prstDash val="solid"/>
-                      <a:round/>
-                      <a:headEnd type="none" w="med" len="med"/>
-                      <a:tailEnd type="none" w="med" len="med"/>
-                    </a:lnB>
-                    <a:solidFill>
-                      <a:srgbClr val="006848"/>
-                    </a:solidFill>
-                  </a:tcPr>
-                </a:tc>
-                <a:tc>
-                  <a:txBody>
-                    <a:bodyPr/>
-                    <a:lstStyle/>
-                    <a:p>
-                      <a:pPr indent="0" marL="0">
-                        <a:buNone/>
-                      </a:pPr>
-                      <a:r>
-                        <a:rPr lang="en-US" sz="1000" b="1" dirty="0">
-                          <a:solidFill>
-                            <a:srgbClr val="FFFFFF"/>
-                          </a:solidFill>
-                        </a:rPr>
-                        <a:t>Version seen</a:t>
-                      </a:r>
-                      <a:endParaRPr lang="en-US" sz="1000" dirty="0"/>
-                    </a:p>
-                  </a:txBody>
-                  <a:tcPr marL="91440" marR="91440" marT="45720" marB="45720" anchor="ctr">
-                    <a:lnL w="6350" cap="flat" cmpd="sng" algn="ctr">
-                      <a:solidFill>
-                        <a:srgbClr val="E2E8F0"/>
-                      </a:solidFill>
-                      <a:prstDash val="solid"/>
-                      <a:round/>
-                      <a:headEnd type="none" w="med" len="med"/>
-                      <a:tailEnd type="none" w="med" len="med"/>
-                    </a:lnL>
-                    <a:lnR w="6350" cap="flat" cmpd="sng" algn="ctr">
-                      <a:solidFill>
-                        <a:srgbClr val="E2E8F0"/>
-                      </a:solidFill>
-                      <a:prstDash val="solid"/>
-                      <a:round/>
-                      <a:headEnd type="none" w="med" len="med"/>
-                      <a:tailEnd type="none" w="med" len="med"/>
-                    </a:lnR>
-                    <a:lnT w="6350" cap="flat" cmpd="sng" algn="ctr">
-                      <a:solidFill>
-                        <a:srgbClr val="E2E8F0"/>
-                      </a:solidFill>
-                      <a:prstDash val="solid"/>
-                      <a:round/>
-                      <a:headEnd type="none" w="med" len="med"/>
-                      <a:tailEnd type="none" w="med" len="med"/>
-                    </a:lnT>
-                    <a:lnB w="6350" cap="flat" cmpd="sng" algn="ctr">
-                      <a:solidFill>
-                        <a:srgbClr val="E2E8F0"/>
-                      </a:solidFill>
-                      <a:prstDash val="solid"/>
-                      <a:round/>
-                      <a:headEnd type="none" w="med" len="med"/>
-                      <a:tailEnd type="none" w="med" len="med"/>
-                    </a:lnB>
-                    <a:solidFill>
-                      <a:srgbClr val="006848"/>
-                    </a:solidFill>
-                  </a:tcPr>
-                </a:tc>
-                <a:tc>
-                  <a:txBody>
-                    <a:bodyPr/>
-                    <a:lstStyle/>
-                    <a:p>
-                      <a:pPr indent="0" marL="0">
-                        <a:buNone/>
-                      </a:pPr>
-                      <a:r>
-                        <a:rPr lang="en-US" sz="1000" b="1" dirty="0">
-                          <a:solidFill>
-                            <a:srgbClr val="FFFFFF"/>
-                          </a:solidFill>
-                        </a:rPr>
-                        <a:t>Status</a:t>
-                      </a:r>
-                      <a:endParaRPr lang="en-US" sz="1000" dirty="0"/>
-                    </a:p>
-                  </a:txBody>
-                  <a:tcPr marL="91440" marR="91440" marT="45720" marB="45720" anchor="ctr">
-                    <a:lnL w="6350" cap="flat" cmpd="sng" algn="ctr">
-                      <a:solidFill>
-                        <a:srgbClr val="E2E8F0"/>
-                      </a:solidFill>
-                      <a:prstDash val="solid"/>
-                      <a:round/>
-                      <a:headEnd type="none" w="med" len="med"/>
-                      <a:tailEnd type="none" w="med" len="med"/>
-                    </a:lnL>
-                    <a:lnR w="6350" cap="flat" cmpd="sng" algn="ctr">
-                      <a:solidFill>
-                        <a:srgbClr val="E2E8F0"/>
-                      </a:solidFill>
-                      <a:prstDash val="solid"/>
-                      <a:round/>
-                      <a:headEnd type="none" w="med" len="med"/>
-                      <a:tailEnd type="none" w="med" len="med"/>
-                    </a:lnR>
-                    <a:lnT w="6350" cap="flat" cmpd="sng" algn="ctr">
-                      <a:solidFill>
-                        <a:srgbClr val="E2E8F0"/>
-                      </a:solidFill>
-                      <a:prstDash val="solid"/>
-                      <a:round/>
-                      <a:headEnd type="none" w="med" len="med"/>
-                      <a:tailEnd type="none" w="med" len="med"/>
-                    </a:lnT>
-                    <a:lnB w="6350" cap="flat" cmpd="sng" algn="ctr">
-                      <a:solidFill>
-                        <a:srgbClr val="E2E8F0"/>
-                      </a:solidFill>
-                      <a:prstDash val="solid"/>
-                      <a:round/>
-                      <a:headEnd type="none" w="med" len="med"/>
-                      <a:tailEnd type="none" w="med" len="med"/>
-                    </a:lnB>
-                    <a:solidFill>
-                      <a:srgbClr val="006848"/>
-                    </a:solidFill>
-                  </a:tcPr>
-                </a:tc>
-              </a:tr>
-              <a:tr h="374904">
-                <a:tc>
-                  <a:txBody>
-                    <a:bodyPr/>
-                    <a:lstStyle/>
-                    <a:p>
-                      <a:pPr indent="0" marL="0">
-                        <a:buNone/>
-                      </a:pPr>
-                      <a:r>
-                        <a:rPr lang="en-US" sz="1100" dirty="0">
-                          <a:solidFill>
-                            <a:srgbClr val="000000"/>
-                          </a:solidFill>
-                        </a:rPr>
-                        <a:t>#1</a:t>
-                      </a:r>
-                      <a:endParaRPr lang="en-US" sz="1100" dirty="0"/>
-                    </a:p>
-                  </a:txBody>
-                  <a:tcPr marL="91440" marR="91440" marT="45720" marB="45720" anchor="ctr">
-                    <a:lnL w="6350" cap="flat" cmpd="sng" algn="ctr">
-                      <a:solidFill>
-                        <a:srgbClr val="E2E8F0"/>
-                      </a:solidFill>
-                      <a:prstDash val="solid"/>
-                      <a:round/>
-                      <a:headEnd type="none" w="med" len="med"/>
-                      <a:tailEnd type="none" w="med" len="med"/>
-                    </a:lnL>
-                    <a:lnR w="6350" cap="flat" cmpd="sng" algn="ctr">
-                      <a:solidFill>
-                        <a:srgbClr val="E2E8F0"/>
-                      </a:solidFill>
-                      <a:prstDash val="solid"/>
-                      <a:round/>
-                      <a:headEnd type="none" w="med" len="med"/>
-                      <a:tailEnd type="none" w="med" len="med"/>
-                    </a:lnR>
-                    <a:lnT w="6350" cap="flat" cmpd="sng" algn="ctr">
-                      <a:solidFill>
-                        <a:srgbClr val="E2E8F0"/>
-                      </a:solidFill>
-                      <a:prstDash val="solid"/>
-                      <a:round/>
-                      <a:headEnd type="none" w="med" len="med"/>
-                      <a:tailEnd type="none" w="med" len="med"/>
-                    </a:lnT>
-                    <a:lnB w="6350" cap="flat" cmpd="sng" algn="ctr">
-                      <a:solidFill>
-                        <a:srgbClr val="E2E8F0"/>
-                      </a:solidFill>
-                      <a:prstDash val="solid"/>
-                      <a:round/>
-                      <a:headEnd type="none" w="med" len="med"/>
-                      <a:tailEnd type="none" w="med" len="med"/>
-                    </a:lnB>
-                    <a:solidFill>
-                      <a:srgbClr val="FFFFFF"/>
-                    </a:solidFill>
-                  </a:tcPr>
-                </a:tc>
-                <a:tc>
-                  <a:txBody>
-                    <a:bodyPr/>
-                    <a:lstStyle/>
-                    <a:p>
-                      <a:pPr indent="0" marL="0">
-                        <a:buNone/>
-                      </a:pPr>
-                      <a:r>
-                        <a:rPr lang="en-US" sz="1100" dirty="0">
-                          <a:solidFill>
-                            <a:srgbClr val="000000"/>
-                          </a:solidFill>
-                        </a:rPr>
-                        <a:t>330 ms</a:t>
-                      </a:r>
-                      <a:endParaRPr lang="en-US" sz="1100" dirty="0"/>
-                    </a:p>
-                  </a:txBody>
-                  <a:tcPr marL="91440" marR="91440" marT="45720" marB="45720" anchor="ctr">
-                    <a:lnL w="6350" cap="flat" cmpd="sng" algn="ctr">
-                      <a:solidFill>
-                        <a:srgbClr val="E2E8F0"/>
-                      </a:solidFill>
-                      <a:prstDash val="solid"/>
-                      <a:round/>
-                      <a:headEnd type="none" w="med" len="med"/>
-                      <a:tailEnd type="none" w="med" len="med"/>
-                    </a:lnL>
-                    <a:lnR w="6350" cap="flat" cmpd="sng" algn="ctr">
-                      <a:solidFill>
-                        <a:srgbClr val="E2E8F0"/>
-                      </a:solidFill>
-                      <a:prstDash val="solid"/>
-                      <a:round/>
-                      <a:headEnd type="none" w="med" len="med"/>
-                      <a:tailEnd type="none" w="med" len="med"/>
-                    </a:lnR>
-                    <a:lnT w="6350" cap="flat" cmpd="sng" algn="ctr">
-                      <a:solidFill>
-                        <a:srgbClr val="E2E8F0"/>
-                      </a:solidFill>
-                      <a:prstDash val="solid"/>
-                      <a:round/>
-                      <a:headEnd type="none" w="med" len="med"/>
-                      <a:tailEnd type="none" w="med" len="med"/>
-                    </a:lnT>
-                    <a:lnB w="6350" cap="flat" cmpd="sng" algn="ctr">
-                      <a:solidFill>
-                        <a:srgbClr val="E2E8F0"/>
-                      </a:solidFill>
-                      <a:prstDash val="solid"/>
-                      <a:round/>
-                      <a:headEnd type="none" w="med" len="med"/>
-                      <a:tailEnd type="none" w="med" len="med"/>
-                    </a:lnB>
-                    <a:solidFill>
-                      <a:srgbClr val="FFFFFF"/>
-                    </a:solidFill>
-                  </a:tcPr>
-                </a:tc>
-                <a:tc>
-                  <a:txBody>
-                    <a:bodyPr/>
-                    <a:lstStyle/>
-                    <a:p>
-                      <a:pPr indent="0" marL="0">
-                        <a:buNone/>
-                      </a:pPr>
-                      <a:r>
-                        <a:rPr lang="en-US" sz="1100" dirty="0">
-                          <a:solidFill>
-                            <a:srgbClr val="2563EB"/>
-                          </a:solidFill>
-                        </a:rPr>
-                        <a:t>SECONDARY</a:t>
-                      </a:r>
-                      <a:endParaRPr lang="en-US" sz="1100" dirty="0"/>
-                    </a:p>
-                  </a:txBody>
-                  <a:tcPr marL="91440" marR="91440" marT="45720" marB="45720" anchor="ctr">
-                    <a:lnL w="6350" cap="flat" cmpd="sng" algn="ctr">
-                      <a:solidFill>
-                        <a:srgbClr val="E2E8F0"/>
-                      </a:solidFill>
-                      <a:prstDash val="solid"/>
-                      <a:round/>
-                      <a:headEnd type="none" w="med" len="med"/>
-                      <a:tailEnd type="none" w="med" len="med"/>
-                    </a:lnL>
-                    <a:lnR w="6350" cap="flat" cmpd="sng" algn="ctr">
-                      <a:solidFill>
-                        <a:srgbClr val="E2E8F0"/>
-                      </a:solidFill>
-                      <a:prstDash val="solid"/>
-                      <a:round/>
-                      <a:headEnd type="none" w="med" len="med"/>
-                      <a:tailEnd type="none" w="med" len="med"/>
-                    </a:lnR>
-                    <a:lnT w="6350" cap="flat" cmpd="sng" algn="ctr">
-                      <a:solidFill>
-                        <a:srgbClr val="E2E8F0"/>
-                      </a:solidFill>
-                      <a:prstDash val="solid"/>
-                      <a:round/>
-                      <a:headEnd type="none" w="med" len="med"/>
-                      <a:tailEnd type="none" w="med" len="med"/>
-                    </a:lnT>
-                    <a:lnB w="6350" cap="flat" cmpd="sng" algn="ctr">
-                      <a:solidFill>
-                        <a:srgbClr val="E2E8F0"/>
-                      </a:solidFill>
-                      <a:prstDash val="solid"/>
-                      <a:round/>
-                      <a:headEnd type="none" w="med" len="med"/>
-                      <a:tailEnd type="none" w="med" len="med"/>
-                    </a:lnB>
-                    <a:solidFill>
-                      <a:srgbClr val="FFFFFF"/>
-                    </a:solidFill>
-                  </a:tcPr>
-                </a:tc>
-                <a:tc>
-                  <a:txBody>
-                    <a:bodyPr/>
-                    <a:lstStyle/>
-                    <a:p>
-                      <a:pPr indent="0" marL="0">
-                        <a:buNone/>
-                      </a:pPr>
-                      <a:r>
-                        <a:rPr lang="en-US" sz="1100" b="1" dirty="0">
-                          <a:solidFill>
-                            <a:srgbClr val="DC2626"/>
-                          </a:solidFill>
-                        </a:rPr>
-                        <a:t>v1</a:t>
-                      </a:r>
-                      <a:endParaRPr lang="en-US" sz="1100" dirty="0"/>
-                    </a:p>
-                  </a:txBody>
-                  <a:tcPr marL="91440" marR="91440" marT="45720" marB="45720" anchor="ctr">
-                    <a:lnL w="6350" cap="flat" cmpd="sng" algn="ctr">
-                      <a:solidFill>
-                        <a:srgbClr val="E2E8F0"/>
-                      </a:solidFill>
-                      <a:prstDash val="solid"/>
-                      <a:round/>
-                      <a:headEnd type="none" w="med" len="med"/>
-                      <a:tailEnd type="none" w="med" len="med"/>
-                    </a:lnL>
-                    <a:lnR w="6350" cap="flat" cmpd="sng" algn="ctr">
-                      <a:solidFill>
-                        <a:srgbClr val="E2E8F0"/>
-                      </a:solidFill>
-                      <a:prstDash val="solid"/>
-                      <a:round/>
-                      <a:headEnd type="none" w="med" len="med"/>
-                      <a:tailEnd type="none" w="med" len="med"/>
-                    </a:lnR>
-                    <a:lnT w="6350" cap="flat" cmpd="sng" algn="ctr">
-                      <a:solidFill>
-                        <a:srgbClr val="E2E8F0"/>
-                      </a:solidFill>
-                      <a:prstDash val="solid"/>
-                      <a:round/>
-                      <a:headEnd type="none" w="med" len="med"/>
-                      <a:tailEnd type="none" w="med" len="med"/>
-                    </a:lnT>
-                    <a:lnB w="6350" cap="flat" cmpd="sng" algn="ctr">
-                      <a:solidFill>
-                        <a:srgbClr val="E2E8F0"/>
-                      </a:solidFill>
-                      <a:prstDash val="solid"/>
-                      <a:round/>
-                      <a:headEnd type="none" w="med" len="med"/>
-                      <a:tailEnd type="none" w="med" len="med"/>
-                    </a:lnB>
-                    <a:solidFill>
-                      <a:srgbClr val="FFFFFF"/>
-                    </a:solidFill>
-                  </a:tcPr>
-                </a:tc>
-                <a:tc>
-                  <a:txBody>
-                    <a:bodyPr/>
-                    <a:lstStyle/>
-                    <a:p>
-                      <a:pPr indent="0" marL="0">
-                        <a:buNone/>
-                      </a:pPr>
-                      <a:r>
-                        <a:rPr lang="en-US" sz="1100" b="1" dirty="0">
-                          <a:solidFill>
-                            <a:srgbClr val="DC2626"/>
-                          </a:solidFill>
-                        </a:rPr>
-                        <a:t>⚠ STALE</a:t>
-                      </a:r>
-                      <a:endParaRPr lang="en-US" sz="1100" dirty="0"/>
-                    </a:p>
-                  </a:txBody>
-                  <a:tcPr marL="91440" marR="91440" marT="45720" marB="45720" anchor="ctr">
-                    <a:lnL w="6350" cap="flat" cmpd="sng" algn="ctr">
-                      <a:solidFill>
-                        <a:srgbClr val="E2E8F0"/>
-                      </a:solidFill>
-                      <a:prstDash val="solid"/>
-                      <a:round/>
-                      <a:headEnd type="none" w="med" len="med"/>
-                      <a:tailEnd type="none" w="med" len="med"/>
-                    </a:lnL>
-                    <a:lnR w="6350" cap="flat" cmpd="sng" algn="ctr">
-                      <a:solidFill>
-                        <a:srgbClr val="E2E8F0"/>
-                      </a:solidFill>
-                      <a:prstDash val="solid"/>
-                      <a:round/>
-                      <a:headEnd type="none" w="med" len="med"/>
-                      <a:tailEnd type="none" w="med" len="med"/>
-                    </a:lnR>
-                    <a:lnT w="6350" cap="flat" cmpd="sng" algn="ctr">
-                      <a:solidFill>
-                        <a:srgbClr val="E2E8F0"/>
-                      </a:solidFill>
-                      <a:prstDash val="solid"/>
-                      <a:round/>
-                      <a:headEnd type="none" w="med" len="med"/>
-                      <a:tailEnd type="none" w="med" len="med"/>
-                    </a:lnT>
-                    <a:lnB w="6350" cap="flat" cmpd="sng" algn="ctr">
-                      <a:solidFill>
-                        <a:srgbClr val="E2E8F0"/>
-                      </a:solidFill>
-                      <a:prstDash val="solid"/>
-                      <a:round/>
-                      <a:headEnd type="none" w="med" len="med"/>
-                      <a:tailEnd type="none" w="med" len="med"/>
-                    </a:lnB>
-                    <a:solidFill>
-                      <a:srgbClr val="FFFFFF"/>
-                    </a:solidFill>
-                  </a:tcPr>
-                </a:tc>
-              </a:tr>
-              <a:tr h="374904">
-                <a:tc>
-                  <a:txBody>
-                    <a:bodyPr/>
-                    <a:lstStyle/>
-                    <a:p>
-                      <a:pPr indent="0" marL="0">
-                        <a:buNone/>
-                      </a:pPr>
-                      <a:r>
-                        <a:rPr lang="en-US" sz="1100" dirty="0">
-                          <a:solidFill>
-                            <a:srgbClr val="000000"/>
-                          </a:solidFill>
-                        </a:rPr>
-                        <a:t>#2</a:t>
-                      </a:r>
-                      <a:endParaRPr lang="en-US" sz="1100" dirty="0"/>
-                    </a:p>
-                  </a:txBody>
-                  <a:tcPr marL="91440" marR="91440" marT="45720" marB="45720" anchor="ctr">
-                    <a:lnL w="6350" cap="flat" cmpd="sng" algn="ctr">
-                      <a:solidFill>
-                        <a:srgbClr val="E2E8F0"/>
-                      </a:solidFill>
-                      <a:prstDash val="solid"/>
-                      <a:round/>
-                      <a:headEnd type="none" w="med" len="med"/>
-                      <a:tailEnd type="none" w="med" len="med"/>
-                    </a:lnL>
-                    <a:lnR w="6350" cap="flat" cmpd="sng" algn="ctr">
-                      <a:solidFill>
-                        <a:srgbClr val="E2E8F0"/>
-                      </a:solidFill>
-                      <a:prstDash val="solid"/>
-                      <a:round/>
-                      <a:headEnd type="none" w="med" len="med"/>
-                      <a:tailEnd type="none" w="med" len="med"/>
-                    </a:lnR>
-                    <a:lnT w="6350" cap="flat" cmpd="sng" algn="ctr">
-                      <a:solidFill>
-                        <a:srgbClr val="E2E8F0"/>
-                      </a:solidFill>
-                      <a:prstDash val="solid"/>
-                      <a:round/>
-                      <a:headEnd type="none" w="med" len="med"/>
-                      <a:tailEnd type="none" w="med" len="med"/>
-                    </a:lnT>
-                    <a:lnB w="6350" cap="flat" cmpd="sng" algn="ctr">
-                      <a:solidFill>
-                        <a:srgbClr val="E2E8F0"/>
-                      </a:solidFill>
-                      <a:prstDash val="solid"/>
-                      <a:round/>
-                      <a:headEnd type="none" w="med" len="med"/>
-                      <a:tailEnd type="none" w="med" len="med"/>
-                    </a:lnB>
-                    <a:solidFill>
-                      <a:srgbClr val="FFFFFF"/>
-                    </a:solidFill>
-                  </a:tcPr>
-                </a:tc>
-                <a:tc>
-                  <a:txBody>
-                    <a:bodyPr/>
-                    <a:lstStyle/>
-                    <a:p>
-                      <a:pPr indent="0" marL="0">
-                        <a:buNone/>
-                      </a:pPr>
-                      <a:r>
-                        <a:rPr lang="en-US" sz="1100" dirty="0">
-                          <a:solidFill>
-                            <a:srgbClr val="000000"/>
-                          </a:solidFill>
-                        </a:rPr>
-                        <a:t>680 ms</a:t>
-                      </a:r>
-                      <a:endParaRPr lang="en-US" sz="1100" dirty="0"/>
-                    </a:p>
-                  </a:txBody>
-                  <a:tcPr marL="91440" marR="91440" marT="45720" marB="45720" anchor="ctr">
-                    <a:lnL w="6350" cap="flat" cmpd="sng" algn="ctr">
-                      <a:solidFill>
-                        <a:srgbClr val="E2E8F0"/>
-                      </a:solidFill>
-                      <a:prstDash val="solid"/>
-                      <a:round/>
-                      <a:headEnd type="none" w="med" len="med"/>
-                      <a:tailEnd type="none" w="med" len="med"/>
-                    </a:lnL>
-                    <a:lnR w="6350" cap="flat" cmpd="sng" algn="ctr">
-                      <a:solidFill>
-                        <a:srgbClr val="E2E8F0"/>
-                      </a:solidFill>
-                      <a:prstDash val="solid"/>
-                      <a:round/>
-                      <a:headEnd type="none" w="med" len="med"/>
-                      <a:tailEnd type="none" w="med" len="med"/>
-                    </a:lnR>
-                    <a:lnT w="6350" cap="flat" cmpd="sng" algn="ctr">
-                      <a:solidFill>
-                        <a:srgbClr val="E2E8F0"/>
-                      </a:solidFill>
-                      <a:prstDash val="solid"/>
-                      <a:round/>
-                      <a:headEnd type="none" w="med" len="med"/>
-                      <a:tailEnd type="none" w="med" len="med"/>
-                    </a:lnT>
-                    <a:lnB w="6350" cap="flat" cmpd="sng" algn="ctr">
-                      <a:solidFill>
-                        <a:srgbClr val="E2E8F0"/>
-                      </a:solidFill>
-                      <a:prstDash val="solid"/>
-                      <a:round/>
-                      <a:headEnd type="none" w="med" len="med"/>
-                      <a:tailEnd type="none" w="med" len="med"/>
-                    </a:lnB>
-                    <a:solidFill>
-                      <a:srgbClr val="FFFFFF"/>
-                    </a:solidFill>
-                  </a:tcPr>
-                </a:tc>
-                <a:tc>
-                  <a:txBody>
-                    <a:bodyPr/>
-                    <a:lstStyle/>
-                    <a:p>
-                      <a:pPr indent="0" marL="0">
-                        <a:buNone/>
-                      </a:pPr>
-                      <a:r>
-                        <a:rPr lang="en-US" sz="1100" dirty="0">
-                          <a:solidFill>
-                            <a:srgbClr val="2563EB"/>
-                          </a:solidFill>
-                        </a:rPr>
-                        <a:t>SECONDARY</a:t>
-                      </a:r>
-                      <a:endParaRPr lang="en-US" sz="1100" dirty="0"/>
-                    </a:p>
-                  </a:txBody>
-                  <a:tcPr marL="91440" marR="91440" marT="45720" marB="45720" anchor="ctr">
-                    <a:lnL w="6350" cap="flat" cmpd="sng" algn="ctr">
-                      <a:solidFill>
-                        <a:srgbClr val="E2E8F0"/>
-                      </a:solidFill>
-                      <a:prstDash val="solid"/>
-                      <a:round/>
-                      <a:headEnd type="none" w="med" len="med"/>
-                      <a:tailEnd type="none" w="med" len="med"/>
-                    </a:lnL>
-                    <a:lnR w="6350" cap="flat" cmpd="sng" algn="ctr">
-                      <a:solidFill>
-                        <a:srgbClr val="E2E8F0"/>
-                      </a:solidFill>
-                      <a:prstDash val="solid"/>
-                      <a:round/>
-                      <a:headEnd type="none" w="med" len="med"/>
-                      <a:tailEnd type="none" w="med" len="med"/>
-                    </a:lnR>
-                    <a:lnT w="6350" cap="flat" cmpd="sng" algn="ctr">
-                      <a:solidFill>
-                        <a:srgbClr val="E2E8F0"/>
-                      </a:solidFill>
-                      <a:prstDash val="solid"/>
-                      <a:round/>
-                      <a:headEnd type="none" w="med" len="med"/>
-                      <a:tailEnd type="none" w="med" len="med"/>
-                    </a:lnT>
-                    <a:lnB w="6350" cap="flat" cmpd="sng" algn="ctr">
-                      <a:solidFill>
-                        <a:srgbClr val="E2E8F0"/>
-                      </a:solidFill>
-                      <a:prstDash val="solid"/>
-                      <a:round/>
-                      <a:headEnd type="none" w="med" len="med"/>
-                      <a:tailEnd type="none" w="med" len="med"/>
-                    </a:lnB>
-                    <a:solidFill>
-                      <a:srgbClr val="FFFFFF"/>
-                    </a:solidFill>
-                  </a:tcPr>
-                </a:tc>
-                <a:tc>
-                  <a:txBody>
-                    <a:bodyPr/>
-                    <a:lstStyle/>
-                    <a:p>
-                      <a:pPr indent="0" marL="0">
-                        <a:buNone/>
-                      </a:pPr>
-                      <a:r>
-                        <a:rPr lang="en-US" sz="1100" b="1" dirty="0">
-                          <a:solidFill>
-                            <a:srgbClr val="DC2626"/>
-                          </a:solidFill>
-                        </a:rPr>
-                        <a:t>v1</a:t>
-                      </a:r>
-                      <a:endParaRPr lang="en-US" sz="1100" dirty="0"/>
-                    </a:p>
-                  </a:txBody>
-                  <a:tcPr marL="91440" marR="91440" marT="45720" marB="45720" anchor="ctr">
-                    <a:lnL w="6350" cap="flat" cmpd="sng" algn="ctr">
-                      <a:solidFill>
-                        <a:srgbClr val="E2E8F0"/>
-                      </a:solidFill>
-                      <a:prstDash val="solid"/>
-                      <a:round/>
-                      <a:headEnd type="none" w="med" len="med"/>
-                      <a:tailEnd type="none" w="med" len="med"/>
-                    </a:lnL>
-                    <a:lnR w="6350" cap="flat" cmpd="sng" algn="ctr">
-                      <a:solidFill>
-                        <a:srgbClr val="E2E8F0"/>
-                      </a:solidFill>
-                      <a:prstDash val="solid"/>
-                      <a:round/>
-                      <a:headEnd type="none" w="med" len="med"/>
-                      <a:tailEnd type="none" w="med" len="med"/>
-                    </a:lnR>
-                    <a:lnT w="6350" cap="flat" cmpd="sng" algn="ctr">
-                      <a:solidFill>
-                        <a:srgbClr val="E2E8F0"/>
-                      </a:solidFill>
-                      <a:prstDash val="solid"/>
-                      <a:round/>
-                      <a:headEnd type="none" w="med" len="med"/>
-                      <a:tailEnd type="none" w="med" len="med"/>
-                    </a:lnT>
-                    <a:lnB w="6350" cap="flat" cmpd="sng" algn="ctr">
-                      <a:solidFill>
-                        <a:srgbClr val="E2E8F0"/>
-                      </a:solidFill>
-                      <a:prstDash val="solid"/>
-                      <a:round/>
-                      <a:headEnd type="none" w="med" len="med"/>
-                      <a:tailEnd type="none" w="med" len="med"/>
-                    </a:lnB>
-                    <a:solidFill>
-                      <a:srgbClr val="FFFFFF"/>
-                    </a:solidFill>
-                  </a:tcPr>
-                </a:tc>
-                <a:tc>
-                  <a:txBody>
-                    <a:bodyPr/>
-                    <a:lstStyle/>
-                    <a:p>
-                      <a:pPr indent="0" marL="0">
-                        <a:buNone/>
-                      </a:pPr>
-                      <a:r>
-                        <a:rPr lang="en-US" sz="1100" b="1" dirty="0">
-                          <a:solidFill>
-                            <a:srgbClr val="DC2626"/>
-                          </a:solidFill>
-                        </a:rPr>
-                        <a:t>⚠ STALE</a:t>
-                      </a:r>
-                      <a:endParaRPr lang="en-US" sz="1100" dirty="0"/>
-                    </a:p>
-                  </a:txBody>
-                  <a:tcPr marL="91440" marR="91440" marT="45720" marB="45720" anchor="ctr">
-                    <a:lnL w="6350" cap="flat" cmpd="sng" algn="ctr">
-                      <a:solidFill>
-                        <a:srgbClr val="E2E8F0"/>
-                      </a:solidFill>
-                      <a:prstDash val="solid"/>
-                      <a:round/>
-                      <a:headEnd type="none" w="med" len="med"/>
-                      <a:tailEnd type="none" w="med" len="med"/>
-                    </a:lnL>
-                    <a:lnR w="6350" cap="flat" cmpd="sng" algn="ctr">
-                      <a:solidFill>
-                        <a:srgbClr val="E2E8F0"/>
-                      </a:solidFill>
-                      <a:prstDash val="solid"/>
-                      <a:round/>
-                      <a:headEnd type="none" w="med" len="med"/>
-                      <a:tailEnd type="none" w="med" len="med"/>
-                    </a:lnR>
-                    <a:lnT w="6350" cap="flat" cmpd="sng" algn="ctr">
-                      <a:solidFill>
-                        <a:srgbClr val="E2E8F0"/>
-                      </a:solidFill>
-                      <a:prstDash val="solid"/>
-                      <a:round/>
-                      <a:headEnd type="none" w="med" len="med"/>
-                      <a:tailEnd type="none" w="med" len="med"/>
-                    </a:lnT>
-                    <a:lnB w="6350" cap="flat" cmpd="sng" algn="ctr">
-                      <a:solidFill>
-                        <a:srgbClr val="E2E8F0"/>
-                      </a:solidFill>
-                      <a:prstDash val="solid"/>
-                      <a:round/>
-                      <a:headEnd type="none" w="med" len="med"/>
-                      <a:tailEnd type="none" w="med" len="med"/>
-                    </a:lnB>
-                    <a:solidFill>
-                      <a:srgbClr val="FFFFFF"/>
-                    </a:solidFill>
-                  </a:tcPr>
-                </a:tc>
-              </a:tr>
-              <a:tr h="374904">
-                <a:tc>
-                  <a:txBody>
-                    <a:bodyPr/>
-                    <a:lstStyle/>
-                    <a:p>
-                      <a:pPr indent="0" marL="0">
-                        <a:buNone/>
-                      </a:pPr>
-                      <a:r>
-                        <a:rPr lang="en-US" sz="1100" dirty="0">
-                          <a:solidFill>
-                            <a:srgbClr val="000000"/>
-                          </a:solidFill>
-                        </a:rPr>
-                        <a:t>#3</a:t>
-                      </a:r>
-                      <a:endParaRPr lang="en-US" sz="1100" dirty="0"/>
-                    </a:p>
-                  </a:txBody>
-                  <a:tcPr marL="91440" marR="91440" marT="45720" marB="45720" anchor="ctr">
-                    <a:lnL w="6350" cap="flat" cmpd="sng" algn="ctr">
-                      <a:solidFill>
-                        <a:srgbClr val="E2E8F0"/>
-                      </a:solidFill>
-                      <a:prstDash val="solid"/>
-                      <a:round/>
-                      <a:headEnd type="none" w="med" len="med"/>
-                      <a:tailEnd type="none" w="med" len="med"/>
-                    </a:lnL>
-                    <a:lnR w="6350" cap="flat" cmpd="sng" algn="ctr">
-                      <a:solidFill>
-                        <a:srgbClr val="E2E8F0"/>
-                      </a:solidFill>
-                      <a:prstDash val="solid"/>
-                      <a:round/>
-                      <a:headEnd type="none" w="med" len="med"/>
-                      <a:tailEnd type="none" w="med" len="med"/>
-                    </a:lnR>
-                    <a:lnT w="6350" cap="flat" cmpd="sng" algn="ctr">
-                      <a:solidFill>
-                        <a:srgbClr val="E2E8F0"/>
-                      </a:solidFill>
-                      <a:prstDash val="solid"/>
-                      <a:round/>
-                      <a:headEnd type="none" w="med" len="med"/>
-                      <a:tailEnd type="none" w="med" len="med"/>
-                    </a:lnT>
-                    <a:lnB w="6350" cap="flat" cmpd="sng" algn="ctr">
-                      <a:solidFill>
-                        <a:srgbClr val="E2E8F0"/>
-                      </a:solidFill>
-                      <a:prstDash val="solid"/>
-                      <a:round/>
-                      <a:headEnd type="none" w="med" len="med"/>
-                      <a:tailEnd type="none" w="med" len="med"/>
-                    </a:lnB>
-                    <a:solidFill>
-                      <a:srgbClr val="FFFFFF"/>
-                    </a:solidFill>
-                  </a:tcPr>
-                </a:tc>
-                <a:tc>
-                  <a:txBody>
-                    <a:bodyPr/>
-                    <a:lstStyle/>
-                    <a:p>
-                      <a:pPr indent="0" marL="0">
-                        <a:buNone/>
-                      </a:pPr>
-                      <a:r>
-                        <a:rPr lang="en-US" sz="1100" dirty="0">
-                          <a:solidFill>
-                            <a:srgbClr val="000000"/>
-                          </a:solidFill>
-                        </a:rPr>
-                        <a:t>1281 ms</a:t>
-                      </a:r>
-                      <a:endParaRPr lang="en-US" sz="1100" dirty="0"/>
-                    </a:p>
-                  </a:txBody>
-                  <a:tcPr marL="91440" marR="91440" marT="45720" marB="45720" anchor="ctr">
-                    <a:lnL w="6350" cap="flat" cmpd="sng" algn="ctr">
-                      <a:solidFill>
-                        <a:srgbClr val="E2E8F0"/>
-                      </a:solidFill>
-                      <a:prstDash val="solid"/>
-                      <a:round/>
-                      <a:headEnd type="none" w="med" len="med"/>
-                      <a:tailEnd type="none" w="med" len="med"/>
-                    </a:lnL>
-                    <a:lnR w="6350" cap="flat" cmpd="sng" algn="ctr">
-                      <a:solidFill>
-                        <a:srgbClr val="E2E8F0"/>
-                      </a:solidFill>
-                      <a:prstDash val="solid"/>
-                      <a:round/>
-                      <a:headEnd type="none" w="med" len="med"/>
-                      <a:tailEnd type="none" w="med" len="med"/>
-                    </a:lnR>
-                    <a:lnT w="6350" cap="flat" cmpd="sng" algn="ctr">
-                      <a:solidFill>
-                        <a:srgbClr val="E2E8F0"/>
-                      </a:solidFill>
-                      <a:prstDash val="solid"/>
-                      <a:round/>
-                      <a:headEnd type="none" w="med" len="med"/>
-                      <a:tailEnd type="none" w="med" len="med"/>
-                    </a:lnT>
-                    <a:lnB w="6350" cap="flat" cmpd="sng" algn="ctr">
-                      <a:solidFill>
-                        <a:srgbClr val="E2E8F0"/>
-                      </a:solidFill>
-                      <a:prstDash val="solid"/>
-                      <a:round/>
-                      <a:headEnd type="none" w="med" len="med"/>
-                      <a:tailEnd type="none" w="med" len="med"/>
-                    </a:lnB>
-                    <a:solidFill>
-                      <a:srgbClr val="FFFFFF"/>
-                    </a:solidFill>
-                  </a:tcPr>
-                </a:tc>
-                <a:tc>
-                  <a:txBody>
-                    <a:bodyPr/>
-                    <a:lstStyle/>
-                    <a:p>
-                      <a:pPr indent="0" marL="0">
-                        <a:buNone/>
-                      </a:pPr>
-                      <a:r>
-                        <a:rPr lang="en-US" sz="1100" dirty="0">
-                          <a:solidFill>
-                            <a:srgbClr val="2563EB"/>
-                          </a:solidFill>
-                        </a:rPr>
-                        <a:t>SECONDARY</a:t>
-                      </a:r>
-                      <a:endParaRPr lang="en-US" sz="1100" dirty="0"/>
-                    </a:p>
-                  </a:txBody>
-                  <a:tcPr marL="91440" marR="91440" marT="45720" marB="45720" anchor="ctr">
-                    <a:lnL w="6350" cap="flat" cmpd="sng" algn="ctr">
-                      <a:solidFill>
-                        <a:srgbClr val="E2E8F0"/>
-                      </a:solidFill>
-                      <a:prstDash val="solid"/>
-                      <a:round/>
-                      <a:headEnd type="none" w="med" len="med"/>
-                      <a:tailEnd type="none" w="med" len="med"/>
-                    </a:lnL>
-                    <a:lnR w="6350" cap="flat" cmpd="sng" algn="ctr">
-                      <a:solidFill>
-                        <a:srgbClr val="E2E8F0"/>
-                      </a:solidFill>
-                      <a:prstDash val="solid"/>
-                      <a:round/>
-                      <a:headEnd type="none" w="med" len="med"/>
-                      <a:tailEnd type="none" w="med" len="med"/>
-                    </a:lnR>
-                    <a:lnT w="6350" cap="flat" cmpd="sng" algn="ctr">
-                      <a:solidFill>
-                        <a:srgbClr val="E2E8F0"/>
-                      </a:solidFill>
-                      <a:prstDash val="solid"/>
-                      <a:round/>
-                      <a:headEnd type="none" w="med" len="med"/>
-                      <a:tailEnd type="none" w="med" len="med"/>
-                    </a:lnT>
-                    <a:lnB w="6350" cap="flat" cmpd="sng" algn="ctr">
-                      <a:solidFill>
-                        <a:srgbClr val="E2E8F0"/>
-                      </a:solidFill>
-                      <a:prstDash val="solid"/>
-                      <a:round/>
-                      <a:headEnd type="none" w="med" len="med"/>
-                      <a:tailEnd type="none" w="med" len="med"/>
-                    </a:lnB>
-                    <a:solidFill>
-                      <a:srgbClr val="FFFFFF"/>
-                    </a:solidFill>
-                  </a:tcPr>
-                </a:tc>
-                <a:tc>
-                  <a:txBody>
-                    <a:bodyPr/>
-                    <a:lstStyle/>
-                    <a:p>
-                      <a:pPr indent="0" marL="0">
-                        <a:buNone/>
-                      </a:pPr>
-                      <a:r>
-                        <a:rPr lang="en-US" sz="1100" b="1" dirty="0">
-                          <a:solidFill>
-                            <a:srgbClr val="006848"/>
-                          </a:solidFill>
-                        </a:rPr>
-                        <a:t>v2</a:t>
-                      </a:r>
-                      <a:endParaRPr lang="en-US" sz="1100" dirty="0"/>
-                    </a:p>
-                  </a:txBody>
-                  <a:tcPr marL="91440" marR="91440" marT="45720" marB="45720" anchor="ctr">
-                    <a:lnL w="6350" cap="flat" cmpd="sng" algn="ctr">
-                      <a:solidFill>
-                        <a:srgbClr val="E2E8F0"/>
-                      </a:solidFill>
-                      <a:prstDash val="solid"/>
-                      <a:round/>
-                      <a:headEnd type="none" w="med" len="med"/>
-                      <a:tailEnd type="none" w="med" len="med"/>
-                    </a:lnL>
-                    <a:lnR w="6350" cap="flat" cmpd="sng" algn="ctr">
-                      <a:solidFill>
-                        <a:srgbClr val="E2E8F0"/>
-                      </a:solidFill>
-                      <a:prstDash val="solid"/>
-                      <a:round/>
-                      <a:headEnd type="none" w="med" len="med"/>
-                      <a:tailEnd type="none" w="med" len="med"/>
-                    </a:lnR>
-                    <a:lnT w="6350" cap="flat" cmpd="sng" algn="ctr">
-                      <a:solidFill>
-                        <a:srgbClr val="E2E8F0"/>
-                      </a:solidFill>
-                      <a:prstDash val="solid"/>
-                      <a:round/>
-                      <a:headEnd type="none" w="med" len="med"/>
-                      <a:tailEnd type="none" w="med" len="med"/>
-                    </a:lnT>
-                    <a:lnB w="6350" cap="flat" cmpd="sng" algn="ctr">
-                      <a:solidFill>
-                        <a:srgbClr val="E2E8F0"/>
-                      </a:solidFill>
-                      <a:prstDash val="solid"/>
-                      <a:round/>
-                      <a:headEnd type="none" w="med" len="med"/>
-                      <a:tailEnd type="none" w="med" len="med"/>
-                    </a:lnB>
-                    <a:solidFill>
-                      <a:srgbClr val="FFFFFF"/>
-                    </a:solidFill>
-                  </a:tcPr>
-                </a:tc>
-                <a:tc>
-                  <a:txBody>
-                    <a:bodyPr/>
-                    <a:lstStyle/>
-                    <a:p>
-                      <a:pPr indent="0" marL="0">
-                        <a:buNone/>
-                      </a:pPr>
-                      <a:r>
-                        <a:rPr lang="en-US" sz="1100" b="1" dirty="0">
-                          <a:solidFill>
-                            <a:srgbClr val="006848"/>
-                          </a:solidFill>
-                        </a:rPr>
-                        <a:t>✓ Consistent</a:t>
-                      </a:r>
-                      <a:endParaRPr lang="en-US" sz="1100" dirty="0"/>
-                    </a:p>
-                  </a:txBody>
-                  <a:tcPr marL="91440" marR="91440" marT="45720" marB="45720" anchor="ctr">
-                    <a:lnL w="6350" cap="flat" cmpd="sng" algn="ctr">
-                      <a:solidFill>
-                        <a:srgbClr val="E2E8F0"/>
-                      </a:solidFill>
-                      <a:prstDash val="solid"/>
-                      <a:round/>
-                      <a:headEnd type="none" w="med" len="med"/>
-                      <a:tailEnd type="none" w="med" len="med"/>
-                    </a:lnL>
-                    <a:lnR w="6350" cap="flat" cmpd="sng" algn="ctr">
-                      <a:solidFill>
-                        <a:srgbClr val="E2E8F0"/>
-                      </a:solidFill>
-                      <a:prstDash val="solid"/>
-                      <a:round/>
-                      <a:headEnd type="none" w="med" len="med"/>
-                      <a:tailEnd type="none" w="med" len="med"/>
-                    </a:lnR>
-                    <a:lnT w="6350" cap="flat" cmpd="sng" algn="ctr">
-                      <a:solidFill>
-                        <a:srgbClr val="E2E8F0"/>
-                      </a:solidFill>
-                      <a:prstDash val="solid"/>
-                      <a:round/>
-                      <a:headEnd type="none" w="med" len="med"/>
-                      <a:tailEnd type="none" w="med" len="med"/>
-                    </a:lnT>
-                    <a:lnB w="6350" cap="flat" cmpd="sng" algn="ctr">
-                      <a:solidFill>
-                        <a:srgbClr val="E2E8F0"/>
-                      </a:solidFill>
-                      <a:prstDash val="solid"/>
-                      <a:round/>
-                      <a:headEnd type="none" w="med" len="med"/>
-                      <a:tailEnd type="none" w="med" len="med"/>
-                    </a:lnB>
-                    <a:solidFill>
-                      <a:srgbClr val="FFFFFF"/>
-                    </a:solidFill>
-                  </a:tcPr>
-                </a:tc>
-              </a:tr>
-            </a:tbl>
-          </a:graphicData>
-        </a:graphic>
-      </p:graphicFrame>
-      <p:sp>
-        <p:nvSpPr>
-          <p:cNvPr id="16" name="Shape 13"/>
-          <p:cNvSpPr/>
-          <p:nvPr/>
-        </p:nvSpPr>
-        <p:spPr>
-          <a:xfrm>
-            <a:off x="365760" y="4206240"/>
-            <a:ext cx="8412480" cy="548640"/>
+          <p:cNvPr id="14" name="Shape 12"/>
+          <p:cNvSpPr/>
+          <p:nvPr/>
+        </p:nvSpPr>
+        <p:spPr>
+          <a:xfrm>
+            <a:off x="365760" y="2395728"/>
+            <a:ext cx="8412480" cy="731520"/>
           </a:xfrm>
           <a:prstGeom prst="rect">
             <a:avLst/>
@@ -9486,14 +6984,14 @@
       </p:sp>
       <p:sp>
         <p:nvSpPr>
-          <p:cNvPr id="17" name="Shape 14"/>
-          <p:cNvSpPr/>
-          <p:nvPr/>
-        </p:nvSpPr>
-        <p:spPr>
-          <a:xfrm>
-            <a:off x="365760" y="4206240"/>
-            <a:ext cx="64008" cy="548640"/>
+          <p:cNvPr id="15" name="Shape 13"/>
+          <p:cNvSpPr/>
+          <p:nvPr/>
+        </p:nvSpPr>
+        <p:spPr>
+          <a:xfrm>
+            <a:off x="365760" y="2395728"/>
+            <a:ext cx="64008" cy="731520"/>
           </a:xfrm>
           <a:prstGeom prst="rect">
             <a:avLst/>
@@ -9511,14 +7009,14 @@
       </p:sp>
       <p:sp>
         <p:nvSpPr>
-          <p:cNvPr id="18" name="Text 15"/>
-          <p:cNvSpPr/>
-          <p:nvPr/>
-        </p:nvSpPr>
-        <p:spPr>
-          <a:xfrm>
-            <a:off x="530352" y="4206240"/>
-            <a:ext cx="8183880" cy="548640"/>
+          <p:cNvPr id="16" name="Text 14"/>
+          <p:cNvSpPr/>
+          <p:nvPr/>
+        </p:nvSpPr>
+        <p:spPr>
+          <a:xfrm>
+            <a:off x="530352" y="2395728"/>
+            <a:ext cx="8183880" cy="731520"/>
           </a:xfrm>
           <a:prstGeom prst="rect">
             <a:avLst/>
@@ -9534,7 +7032,7 @@
               <a:buNone/>
             </a:pPr>
             <a:r>
-              <a:rPr lang="en-US" sz="1100" b="1" dirty="0">
+              <a:rPr lang="en-US" sz="1000" b="1" dirty="0">
                 <a:solidFill>
                   <a:srgbClr val="006848"/>
                 </a:solidFill>
@@ -9545,17 +7043,73 @@
               <a:buNone/>
             </a:pPr>
             <a:r>
-              <a:rPr lang="en-US" sz="1100" dirty="0">
+              <a:rPr lang="en-US" sz="1000" dirty="0">
                 <a:solidFill>
                   <a:srgbClr val="1A1A2E"/>
                 </a:solidFill>
               </a:rPr>
-              <a:t>The system is inconsistent for ~1.28 s. On a real WAN this window would be much larger — secondaryDelaySecs=1 makes it observable on LAN.</a:t>
-            </a:r>
-            <a:endParaRPr lang="en-US" sz="1100" dirty="0"/>
-          </a:p>
-        </p:txBody>
-      </p:sp>
+              <a:t>PRIMARY already serves v2 at 222 ms while SECONDARY still answers v1 at 212 ms and 561 ms — 2 of 3 reads are stale. Only the 3rd secondary read, at 1163 ms, converges to v2: the system is inconsistent for ~1.16 s. secondaryDelaySecs=1 was set on the replica set purely to make this window observable on a LAN (real replication_delay_ms = 252 ms).</a:t>
+            </a:r>
+            <a:endParaRPr lang="en-US" sz="1000" dirty="0"/>
+          </a:p>
+        </p:txBody>
+      </p:sp>
+      <p:sp>
+        <p:nvSpPr>
+          <p:cNvPr id="17" name="Shape 15"/>
+          <p:cNvSpPr/>
+          <p:nvPr/>
+        </p:nvSpPr>
+        <p:spPr>
+          <a:xfrm>
+            <a:off x="1820773" y="3255264"/>
+            <a:ext cx="5502454" cy="1837944"/>
+          </a:xfrm>
+          <a:prstGeom prst="rect">
+            <a:avLst/>
+          </a:prstGeom>
+          <a:solidFill>
+            <a:srgbClr val="0D1117"/>
+          </a:solidFill>
+          <a:ln w="6350">
+            <a:solidFill>
+              <a:srgbClr val="E2E8F0"/>
+            </a:solidFill>
+            <a:prstDash val="solid"/>
+          </a:ln>
+          <a:effectLst>
+            <a:outerShdw sx="100000" sy="100000" kx="0" ky="0" algn="bl" rotWithShape="0" blurRad="101600" dist="38100" dir="8100000">
+              <a:srgbClr val="000000">
+                <a:alpha val="10000"/>
+              </a:srgbClr>
+            </a:outerShdw>
+          </a:effectLst>
+        </p:spPr>
+      </p:sp>
+      <p:pic>
+        <p:nvPicPr>
+          <p:cNvPr id="18" name="Image 0" descr="/Users/mertkarahan/ceng465_project/presentation/exp2.png">    </p:cNvPr>
+          <p:cNvPicPr>
+            <a:picLocks noChangeAspect="1"/>
+          </p:cNvPicPr>
+          <p:nvPr/>
+        </p:nvPicPr>
+        <p:blipFill>
+          <a:blip r:embed="rId1"/>
+          <a:stretch>
+            <a:fillRect/>
+          </a:stretch>
+        </p:blipFill>
+        <p:spPr>
+          <a:xfrm>
+            <a:off x="1893925" y="3328416"/>
+            <a:ext cx="5356150" cy="1691640"/>
+          </a:xfrm>
+          <a:prstGeom prst="rect">
+            <a:avLst/>
+          </a:prstGeom>
+        </p:spPr>
+      </p:pic>
     </p:spTree>
   </p:cSld>
   <p:clrMapOvr>
@@ -14655,7 +12209,7 @@
                 <a:gridCol w="2560320"/>
                 <a:gridCol w="1371600"/>
               </a:tblGrid>
-              <a:tr h="384048">
+              <a:tr h="333756">
                 <a:tc>
                   <a:txBody>
                     <a:bodyPr/>
@@ -14779,7 +12333,7 @@
                   </a:tcPr>
                 </a:tc>
               </a:tr>
-              <a:tr h="384048">
+              <a:tr h="333756">
                 <a:tc>
                   <a:txBody>
                     <a:bodyPr/>
@@ -14789,14 +12343,14 @@
                         <a:buNone/>
                       </a:pPr>
                       <a:r>
-                        <a:rPr lang="en-US" sz="1050" dirty="0">
+                        <a:rPr lang="en-US" sz="1000" dirty="0">
                           <a:solidFill>
                             <a:srgbClr val="000000"/>
                           </a:solidFill>
                         </a:rPr>
                         <a:t>One-way → PRIMARY</a:t>
                       </a:r>
-                      <a:endParaRPr lang="en-US" sz="1050" dirty="0"/>
+                      <a:endParaRPr lang="en-US" sz="1000" dirty="0"/>
                     </a:p>
                   </a:txBody>
                   <a:tcPr marL="91440" marR="91440" marT="45720" marB="45720" anchor="ctr">
@@ -14850,14 +12404,14 @@
                         <a:buNone/>
                       </a:pPr>
                       <a:r>
-                        <a:rPr lang="en-US" sz="1050" dirty="0">
+                        <a:rPr lang="en-US" sz="1000" dirty="0">
                           <a:solidFill>
                             <a:srgbClr val="000000"/>
                           </a:solidFill>
                         </a:rPr>
                         <a:t>9.6 ms</a:t>
                       </a:r>
-                      <a:endParaRPr lang="en-US" sz="1050" dirty="0"/>
+                      <a:endParaRPr lang="en-US" sz="1000" dirty="0"/>
                     </a:p>
                   </a:txBody>
                   <a:tcPr marL="91440" marR="91440" marT="45720" marB="45720" anchor="ctr">
@@ -14903,7 +12457,7 @@
                   </a:tcPr>
                 </a:tc>
               </a:tr>
-              <a:tr h="384048">
+              <a:tr h="333756">
                 <a:tc>
                   <a:txBody>
                     <a:bodyPr/>
@@ -14913,14 +12467,14 @@
                         <a:buNone/>
                       </a:pPr>
                       <a:r>
-                        <a:rPr lang="en-US" sz="1050" dirty="0">
+                        <a:rPr lang="en-US" sz="1000" dirty="0">
                           <a:solidFill>
                             <a:srgbClr val="000000"/>
                           </a:solidFill>
                         </a:rPr>
                         <a:t>One-way → SECONDARY</a:t>
                       </a:r>
-                      <a:endParaRPr lang="en-US" sz="1050" dirty="0"/>
+                      <a:endParaRPr lang="en-US" sz="1000" dirty="0"/>
                     </a:p>
                   </a:txBody>
                   <a:tcPr marL="91440" marR="91440" marT="45720" marB="45720" anchor="ctr">
@@ -14974,14 +12528,14 @@
                         <a:buNone/>
                       </a:pPr>
                       <a:r>
-                        <a:rPr lang="en-US" sz="1050" dirty="0">
+                        <a:rPr lang="en-US" sz="1000" dirty="0">
                           <a:solidFill>
                             <a:srgbClr val="000000"/>
                           </a:solidFill>
                         </a:rPr>
                         <a:t>2.2 ms</a:t>
                       </a:r>
-                      <a:endParaRPr lang="en-US" sz="1050" dirty="0"/>
+                      <a:endParaRPr lang="en-US" sz="1000" dirty="0"/>
                     </a:p>
                   </a:txBody>
                   <a:tcPr marL="91440" marR="91440" marT="45720" marB="45720" anchor="ctr">
@@ -15027,7 +12581,7 @@
                   </a:tcPr>
                 </a:tc>
               </a:tr>
-              <a:tr h="384048">
+              <a:tr h="333756">
                 <a:tc>
                   <a:txBody>
                     <a:bodyPr/>
@@ -15037,14 +12591,14 @@
                         <a:buNone/>
                       </a:pPr>
                       <a:r>
-                        <a:rPr lang="en-US" sz="1050" b="1" dirty="0">
+                        <a:rPr lang="en-US" sz="1000" b="1" dirty="0">
                           <a:solidFill>
                             <a:srgbClr val="006848"/>
                           </a:solidFill>
                         </a:rPr>
                         <a:t>Synchronous write total</a:t>
                       </a:r>
-                      <a:endParaRPr lang="en-US" sz="1050" dirty="0"/>
+                      <a:endParaRPr lang="en-US" sz="1000" dirty="0"/>
                     </a:p>
                   </a:txBody>
                   <a:tcPr marL="91440" marR="91440" marT="45720" marB="45720" anchor="ctr">
@@ -15098,14 +12652,14 @@
                         <a:buNone/>
                       </a:pPr>
                       <a:r>
-                        <a:rPr lang="en-US" sz="1050" b="1" dirty="0">
+                        <a:rPr lang="en-US" sz="1000" b="1" dirty="0">
                           <a:solidFill>
                             <a:srgbClr val="006848"/>
                           </a:solidFill>
                         </a:rPr>
                         <a:t>61.8 ms</a:t>
                       </a:r>
-                      <a:endParaRPr lang="en-US" sz="1050" dirty="0"/>
+                      <a:endParaRPr lang="en-US" sz="1000" dirty="0"/>
                     </a:p>
                   </a:txBody>
                   <a:tcPr marL="91440" marR="91440" marT="45720" marB="45720" anchor="ctr">
@@ -15151,7 +12705,7 @@
                   </a:tcPr>
                 </a:tc>
               </a:tr>
-              <a:tr h="384048">
+              <a:tr h="333756">
                 <a:tc>
                   <a:txBody>
                     <a:bodyPr/>
@@ -15161,14 +12715,14 @@
                         <a:buNone/>
                       </a:pPr>
                       <a:r>
-                        <a:rPr lang="en-US" sz="1050" dirty="0">
+                        <a:rPr lang="en-US" sz="1000" dirty="0">
                           <a:solidFill>
                             <a:srgbClr val="D97706"/>
                           </a:solidFill>
                         </a:rPr>
                         <a:t>Asynchronous write total</a:t>
                       </a:r>
-                      <a:endParaRPr lang="en-US" sz="1050" dirty="0"/>
+                      <a:endParaRPr lang="en-US" sz="1000" dirty="0"/>
                     </a:p>
                   </a:txBody>
                   <a:tcPr marL="91440" marR="91440" marT="45720" marB="45720" anchor="ctr">
@@ -15222,14 +12776,14 @@
                         <a:buNone/>
                       </a:pPr>
                       <a:r>
-                        <a:rPr lang="en-US" sz="1050" dirty="0">
+                        <a:rPr lang="en-US" sz="1000" dirty="0">
                           <a:solidFill>
                             <a:srgbClr val="D97706"/>
                           </a:solidFill>
                         </a:rPr>
                         <a:t>9–12 ms</a:t>
                       </a:r>
-                      <a:endParaRPr lang="en-US" sz="1050" dirty="0"/>
+                      <a:endParaRPr lang="en-US" sz="1000" dirty="0"/>
                     </a:p>
                   </a:txBody>
                   <a:tcPr marL="91440" marR="91440" marT="45720" marB="45720" anchor="ctr">
@@ -15275,7 +12829,7 @@
                   </a:tcPr>
                 </a:tc>
               </a:tr>
-              <a:tr h="384048">
+              <a:tr h="333756">
                 <a:tc>
                   <a:txBody>
                     <a:bodyPr/>
@@ -15285,14 +12839,14 @@
                         <a:buNone/>
                       </a:pPr>
                       <a:r>
-                        <a:rPr lang="en-US" sz="1050" dirty="0">
+                        <a:rPr lang="en-US" sz="1000" dirty="0">
                           <a:solidFill>
                             <a:srgbClr val="000000"/>
                           </a:solidFill>
                         </a:rPr>
                         <a:t>Sync overhead over async</a:t>
                       </a:r>
-                      <a:endParaRPr lang="en-US" sz="1050" dirty="0"/>
+                      <a:endParaRPr lang="en-US" sz="1000" dirty="0"/>
                     </a:p>
                   </a:txBody>
                   <a:tcPr marL="91440" marR="91440" marT="45720" marB="45720" anchor="ctr">
@@ -15346,14 +12900,14 @@
                         <a:buNone/>
                       </a:pPr>
                       <a:r>
-                        <a:rPr lang="en-US" sz="1050" dirty="0">
+                        <a:rPr lang="en-US" sz="1000" dirty="0">
                           <a:solidFill>
                             <a:srgbClr val="000000"/>
                           </a:solidFill>
                         </a:rPr>
                         <a:t>~52 ms</a:t>
                       </a:r>
-                      <a:endParaRPr lang="en-US" sz="1050" dirty="0"/>
+                      <a:endParaRPr lang="en-US" sz="1000" dirty="0"/>
                     </a:p>
                   </a:txBody>
                   <a:tcPr marL="91440" marR="91440" marT="45720" marB="45720" anchor="ctr">
@@ -15399,7 +12953,7 @@
                   </a:tcPr>
                 </a:tc>
               </a:tr>
-              <a:tr h="384048">
+              <a:tr h="333756">
                 <a:tc>
                   <a:txBody>
                     <a:bodyPr/>
@@ -15409,14 +12963,14 @@
                         <a:buNone/>
                       </a:pPr>
                       <a:r>
-                        <a:rPr lang="en-US" sz="1050" dirty="0">
+                        <a:rPr lang="en-US" sz="1000" dirty="0">
                           <a:solidFill>
                             <a:srgbClr val="000000"/>
                           </a:solidFill>
                         </a:rPr>
                         <a:t>Oplog (no delay)</a:t>
                       </a:r>
-                      <a:endParaRPr lang="en-US" sz="1050" dirty="0"/>
+                      <a:endParaRPr lang="en-US" sz="1000" dirty="0"/>
                     </a:p>
                   </a:txBody>
                   <a:tcPr marL="91440" marR="91440" marT="45720" marB="45720" anchor="ctr">
@@ -15470,14 +13024,14 @@
                         <a:buNone/>
                       </a:pPr>
                       <a:r>
-                        <a:rPr lang="en-US" sz="1050" dirty="0">
+                        <a:rPr lang="en-US" sz="1000" dirty="0">
                           <a:solidFill>
                             <a:srgbClr val="000000"/>
                           </a:solidFill>
                         </a:rPr>
                         <a:t>10–44 ms</a:t>
                       </a:r>
-                      <a:endParaRPr lang="en-US" sz="1050" dirty="0"/>
+                      <a:endParaRPr lang="en-US" sz="1000" dirty="0"/>
                     </a:p>
                   </a:txBody>
                   <a:tcPr marL="91440" marR="91440" marT="45720" marB="45720" anchor="ctr">
@@ -15523,7 +13077,7 @@
                   </a:tcPr>
                 </a:tc>
               </a:tr>
-              <a:tr h="384048">
+              <a:tr h="333756">
                 <a:tc>
                   <a:txBody>
                     <a:bodyPr/>
@@ -15533,14 +13087,14 @@
                         <a:buNone/>
                       </a:pPr>
                       <a:r>
-                        <a:rPr lang="en-US" sz="1050" dirty="0">
+                        <a:rPr lang="en-US" sz="1000" dirty="0">
                           <a:solidFill>
                             <a:srgbClr val="000000"/>
                           </a:solidFill>
                         </a:rPr>
                         <a:t>Oplog (1 s delay)</a:t>
                       </a:r>
-                      <a:endParaRPr lang="en-US" sz="1050" dirty="0"/>
+                      <a:endParaRPr lang="en-US" sz="1000" dirty="0"/>
                     </a:p>
                   </a:txBody>
                   <a:tcPr marL="91440" marR="91440" marT="45720" marB="45720" anchor="ctr">
@@ -15594,14 +13148,14 @@
                         <a:buNone/>
                       </a:pPr>
                       <a:r>
-                        <a:rPr lang="en-US" sz="1050" dirty="0">
+                        <a:rPr lang="en-US" sz="1000" dirty="0">
                           <a:solidFill>
                             <a:srgbClr val="000000"/>
                           </a:solidFill>
                         </a:rPr>
                         <a:t>326–1281 ms</a:t>
                       </a:r>
-                      <a:endParaRPr lang="en-US" sz="1050" dirty="0"/>
+                      <a:endParaRPr lang="en-US" sz="1000" dirty="0"/>
                     </a:p>
                   </a:txBody>
                   <a:tcPr marL="91440" marR="91440" marT="45720" marB="45720" anchor="ctr">
@@ -15659,8 +13213,8 @@
         </p:nvSpPr>
         <p:spPr>
           <a:xfrm>
-            <a:off x="4846320" y="4224528"/>
-            <a:ext cx="3931920" cy="320040"/>
+            <a:off x="4846320" y="4114800"/>
+            <a:ext cx="3931920" cy="411480"/>
           </a:xfrm>
           <a:prstGeom prst="rect">
             <a:avLst/>

--- a/presentation/report_presentation.pptx
+++ b/presentation/report_presentation.pptx
@@ -1784,31 +1784,71 @@
           </a:p>
         </p:txBody>
       </p:sp>
-      <p:sp>
-        <p:nvSpPr>
-          <p:cNvPr id="10" name="Text 8"/>
-          <p:cNvSpPr/>
-          <p:nvPr/>
-        </p:nvSpPr>
-        <p:spPr>
-          <a:xfrm>
-            <a:off x="2194560" y="3977640"/>
-            <a:ext cx="4754880" cy="685800"/>
-          </a:xfrm>
-          <a:prstGeom prst="rect">
-            <a:avLst/>
-          </a:prstGeom>
-          <a:noFill/>
-          <a:ln/>
-        </p:spPr>
-        <p:txBody>
-          <a:bodyPr wrap="square" lIns="0" tIns="0" rIns="0" bIns="0" rtlCol="0" anchor="ctr"/>
-          <a:lstStyle/>
-          <a:p>
-            <a:pPr marL="0" indent="0" algn="ctr">
-              <a:buNone/>
-            </a:pPr>
-            <a:endParaRPr lang="en-US" sz="1100" dirty="0"/>
+      <p:pic>
+        <p:nvPicPr>
+          <p:cNvPr id="10" name="ClaudeLogo"/>
+          <p:cNvPicPr>
+            <a:picLocks noChangeAspect="1"/>
+          </p:cNvPicPr>
+          <p:nvPr/>
+        </p:nvPicPr>
+        <p:blipFill>
+          <a:blip r:embed="rId3"/>
+          <a:stretch>
+            <a:fillRect/>
+          </a:stretch>
+        </p:blipFill>
+        <p:spPr>
+          <a:xfrm>
+            <a:off x="8028378" y="4368687"/>
+            <a:ext cx="395431" cy="395431"/>
+          </a:xfrm>
+          <a:prstGeom prst="rect">
+            <a:avLst/>
+          </a:prstGeom>
+        </p:spPr>
+      </p:pic>
+      <p:sp>
+        <p:nvSpPr>
+          <p:cNvPr id="11" name="PoweredBy"/>
+          <p:cNvSpPr/>
+          <p:nvPr/>
+        </p:nvSpPr>
+        <p:spPr>
+          <a:xfrm>
+            <a:off x="6754589" y="4320540"/>
+            <a:ext cx="2028862" cy="491726"/>
+          </a:xfrm>
+          <a:prstGeom prst="rect">
+            <a:avLst/>
+          </a:prstGeom>
+          <a:noFill/>
+          <a:ln/>
+        </p:spPr>
+        <p:txBody>
+          <a:bodyPr wrap="square" lIns="0" tIns="0" rIns="0" bIns="0" rtlCol="0" anchor="ctr"/>
+          <a:lstStyle/>
+          <a:p>
+            <a:pPr marL="0" indent="0" algn="l">
+              <a:buNone/>
+            </a:pPr>
+            <a:r>
+              <a:rPr lang="en-US" sz="900" dirty="0">
+                <a:solidFill>
+                  <a:srgbClr val="7DC8A8"/>
+                </a:solidFill>
+              </a:rPr>
+              <a:t>Powered by </a:t>
+            </a:r>
+            <a:r>
+              <a:rPr lang="en-US" sz="900" b="1" dirty="0">
+                <a:solidFill>
+                  <a:srgbClr val="D97656"/>
+                </a:solidFill>
+              </a:rPr>
+              <a:t>Claude Code</a:t>
+            </a:r>
+            <a:endParaRPr lang="en-US" sz="900" dirty="0"/>
           </a:p>
         </p:txBody>
       </p:sp>
@@ -6856,7 +6896,7 @@
       </p:grpSpPr>
       <p:sp>
         <p:nvSpPr>
-          <p:cNvPr id="2" name="Shape 0"/>
+          <p:cNvPr id="2" name="BG"/>
           <p:cNvSpPr/>
           <p:nvPr/>
         </p:nvSpPr>
@@ -6883,7 +6923,7 @@
       </p:sp>
       <p:sp>
         <p:nvSpPr>
-          <p:cNvPr id="3" name="Text 1"/>
+          <p:cNvPr id="3" name="Text"/>
           <p:cNvSpPr/>
           <p:nvPr/>
         </p:nvSpPr>
@@ -6911,22 +6951,22 @@
                   <a:srgbClr val="FFFFFF"/>
                 </a:solidFill>
               </a:rPr>
-              <a:t>Operation Log</a:t>
-            </a:r>
-            <a:endParaRPr lang="en-US" sz="2200" dirty="0"/>
-          </a:p>
-        </p:txBody>
-      </p:sp>
-      <p:sp>
-        <p:nvSpPr>
-          <p:cNvPr id="4" name="Text 2"/>
+              <a:t>Operation Log — Collections &amp; Consistency Map</a:t>
+            </a:r>
+            <a:endParaRPr lang="en-US" dirty="0"/>
+          </a:p>
+        </p:txBody>
+      </p:sp>
+      <p:sp>
+        <p:nvSpPr>
+          <p:cNvPr id="4" name="Text"/>
           <p:cNvSpPr/>
           <p:nvPr/>
         </p:nvSpPr>
         <p:spPr>
           <a:xfrm>
             <a:off x="411480" y="594360"/>
-            <a:ext cx="8321040" cy="347472"/>
+            <a:ext cx="8321040" cy="320040"/>
           </a:xfrm>
           <a:prstGeom prst="rect">
             <a:avLst/>
@@ -6942,27 +6982,27 @@
               <a:buNone/>
             </a:pPr>
             <a:r>
-              <a:rPr lang="en-US" sz="1100" dirty="0">
+              <a:rPr lang="en-US" sz="1050" dirty="0">
                 <a:solidFill>
                   <a:srgbClr val="AADFC8"/>
                 </a:solidFill>
               </a:rPr>
-              <a:t>Every insert / update / delete produces exactly one entry in operation_logs</a:t>
-            </a:r>
-            <a:endParaRPr lang="en-US" sz="1100" dirty="0"/>
-          </a:p>
-        </p:txBody>
-      </p:sp>
-      <p:sp>
-        <p:nvSpPr>
-          <p:cNvPr id="5" name="Text 3"/>
-          <p:cNvSpPr/>
-          <p:nvPr/>
-        </p:nvSpPr>
-        <p:spPr>
-          <a:xfrm>
-            <a:off x="365760" y="1005840"/>
-            <a:ext cx="4114800" cy="292608"/>
+              <a:t>Each collection maps to a distinct access pattern and consistency experiment</a:t>
+            </a:r>
+            <a:endParaRPr lang="en-US" dirty="0"/>
+          </a:p>
+        </p:txBody>
+      </p:sp>
+      <p:sp>
+        <p:nvSpPr>
+          <p:cNvPr id="5" name="Text"/>
+          <p:cNvSpPr/>
+          <p:nvPr/>
+        </p:nvSpPr>
+        <p:spPr>
+          <a:xfrm>
+            <a:off x="274320" y="969192"/>
+            <a:ext cx="4297680" cy="292608"/>
           </a:xfrm>
           <a:prstGeom prst="rect">
             <a:avLst/>
@@ -6983,21 +7023,192 @@
                   <a:srgbClr val="006848"/>
                 </a:solidFill>
               </a:rPr>
-              <a:t>Key Fields</a:t>
-            </a:r>
-            <a:endParaRPr lang="en-US" sz="1300" dirty="0"/>
-          </a:p>
-        </p:txBody>
-      </p:sp>
-      <p:sp>
-        <p:nvSpPr>
-          <p:cNvPr id="6" name="Shape 4"/>
-          <p:cNvSpPr/>
-          <p:nvPr/>
-        </p:nvSpPr>
-        <p:spPr>
-          <a:xfrm>
-            <a:off x="365760" y="1353312"/>
+              <a:t>Collections &amp; Access Patterns</a:t>
+            </a:r>
+            <a:endParaRPr lang="en-US" dirty="0"/>
+          </a:p>
+        </p:txBody>
+      </p:sp>
+      <p:sp>
+        <p:nvSpPr>
+          <p:cNvPr id="6" name="BG"/>
+          <p:cNvSpPr/>
+          <p:nvPr/>
+        </p:nvSpPr>
+        <p:spPr>
+          <a:xfrm>
+            <a:off x="274320" y="1261800"/>
+            <a:ext cx="4297680" cy="329184"/>
+          </a:xfrm>
+          <a:prstGeom prst="rect">
+            <a:avLst/>
+          </a:prstGeom>
+          <a:solidFill>
+            <a:srgbClr val="006848"/>
+          </a:solidFill>
+          <a:ln/>
+        </p:spPr>
+        <p:txBody>
+          <a:bodyPr/>
+          <a:lstStyle/>
+          <a:p>
+            <a:endParaRPr lang="en-TR"/>
+          </a:p>
+        </p:txBody>
+      </p:sp>
+      <p:sp>
+        <p:nvSpPr>
+          <p:cNvPr id="7" name="Text"/>
+          <p:cNvSpPr/>
+          <p:nvPr/>
+        </p:nvSpPr>
+        <p:spPr>
+          <a:xfrm>
+            <a:off x="347472" y="1289232"/>
+            <a:ext cx="1073696" cy="274320"/>
+          </a:xfrm>
+          <a:prstGeom prst="rect">
+            <a:avLst/>
+          </a:prstGeom>
+          <a:noFill/>
+          <a:ln/>
+        </p:spPr>
+        <p:txBody>
+          <a:bodyPr wrap="square" lIns="0" tIns="0" rIns="0" bIns="0" rtlCol="0" anchor="ctr"/>
+          <a:lstStyle/>
+          <a:p>
+            <a:pPr marL="0" indent="0">
+              <a:buNone/>
+            </a:pPr>
+            <a:r>
+              <a:rPr lang="en-US" sz="1000" b="1" dirty="0">
+                <a:solidFill>
+                  <a:srgbClr val="FFFFFF"/>
+                </a:solidFill>
+              </a:rPr>
+              <a:t>Collection</a:t>
+            </a:r>
+            <a:endParaRPr lang="en-US" dirty="0"/>
+          </a:p>
+        </p:txBody>
+      </p:sp>
+      <p:sp>
+        <p:nvSpPr>
+          <p:cNvPr id="8" name="Text"/>
+          <p:cNvSpPr/>
+          <p:nvPr/>
+        </p:nvSpPr>
+        <p:spPr>
+          <a:xfrm>
+            <a:off x="1567472" y="1289232"/>
+            <a:ext cx="553696" cy="274320"/>
+          </a:xfrm>
+          <a:prstGeom prst="rect">
+            <a:avLst/>
+          </a:prstGeom>
+          <a:noFill/>
+          <a:ln/>
+        </p:spPr>
+        <p:txBody>
+          <a:bodyPr wrap="square" lIns="0" tIns="0" rIns="0" bIns="0" rtlCol="0" anchor="ctr"/>
+          <a:lstStyle/>
+          <a:p>
+            <a:pPr marL="0" indent="0">
+              <a:buNone/>
+            </a:pPr>
+            <a:r>
+              <a:rPr lang="en-US" sz="1000" b="1" dirty="0">
+                <a:solidFill>
+                  <a:srgbClr val="FFFFFF"/>
+                </a:solidFill>
+              </a:rPr>
+              <a:t>Write Freq.</a:t>
+            </a:r>
+            <a:endParaRPr lang="en-US" dirty="0"/>
+          </a:p>
+        </p:txBody>
+      </p:sp>
+      <p:sp>
+        <p:nvSpPr>
+          <p:cNvPr id="9" name="Text"/>
+          <p:cNvSpPr/>
+          <p:nvPr/>
+        </p:nvSpPr>
+        <p:spPr>
+          <a:xfrm>
+            <a:off x="2267472" y="1289232"/>
+            <a:ext cx="1381376" cy="274320"/>
+          </a:xfrm>
+          <a:prstGeom prst="rect">
+            <a:avLst/>
+          </a:prstGeom>
+          <a:noFill/>
+          <a:ln/>
+        </p:spPr>
+        <p:txBody>
+          <a:bodyPr wrap="square" lIns="0" tIns="0" rIns="0" bIns="0" rtlCol="0" anchor="ctr"/>
+          <a:lstStyle/>
+          <a:p>
+            <a:pPr marL="0" indent="0">
+              <a:buNone/>
+            </a:pPr>
+            <a:r>
+              <a:rPr lang="en-US" sz="1000" b="1" dirty="0">
+                <a:solidFill>
+                  <a:srgbClr val="FFFFFF"/>
+                </a:solidFill>
+              </a:rPr>
+              <a:t>Consistency Need</a:t>
+            </a:r>
+            <a:endParaRPr lang="en-US" dirty="0"/>
+          </a:p>
+        </p:txBody>
+      </p:sp>
+      <p:sp>
+        <p:nvSpPr>
+          <p:cNvPr id="10" name="Text"/>
+          <p:cNvSpPr/>
+          <p:nvPr/>
+        </p:nvSpPr>
+        <p:spPr>
+          <a:xfrm>
+            <a:off x="3795152" y="1289232"/>
+            <a:ext cx="703696" cy="274320"/>
+          </a:xfrm>
+          <a:prstGeom prst="rect">
+            <a:avLst/>
+          </a:prstGeom>
+          <a:noFill/>
+          <a:ln/>
+        </p:spPr>
+        <p:txBody>
+          <a:bodyPr wrap="square" lIns="0" tIns="0" rIns="0" bIns="0" rtlCol="0" anchor="ctr"/>
+          <a:lstStyle/>
+          <a:p>
+            <a:pPr marL="0" indent="0">
+              <a:buNone/>
+            </a:pPr>
+            <a:r>
+              <a:rPr lang="en-US" sz="1000" b="1" dirty="0">
+                <a:solidFill>
+                  <a:srgbClr val="FFFFFF"/>
+                </a:solidFill>
+              </a:rPr>
+              <a:t>Experiment</a:t>
+            </a:r>
+            <a:endParaRPr lang="en-US" dirty="0"/>
+          </a:p>
+        </p:txBody>
+      </p:sp>
+      <p:sp>
+        <p:nvSpPr>
+          <p:cNvPr id="11" name="BG"/>
+          <p:cNvSpPr/>
+          <p:nvPr/>
+        </p:nvSpPr>
+        <p:spPr>
+          <a:xfrm>
+            <a:off x="274320" y="1590984"/>
             <a:ext cx="4297680" cy="420624"/>
           </a:xfrm>
           <a:prstGeom prst="rect">
@@ -7023,14 +7234,14 @@
       </p:sp>
       <p:sp>
         <p:nvSpPr>
-          <p:cNvPr id="7" name="Text 5"/>
-          <p:cNvSpPr/>
-          <p:nvPr/>
-        </p:nvSpPr>
-        <p:spPr>
-          <a:xfrm>
-            <a:off x="457200" y="1389888"/>
-            <a:ext cx="1691640" cy="329184"/>
+          <p:cNvPr id="12" name="Text"/>
+          <p:cNvSpPr/>
+          <p:nvPr/>
+        </p:nvSpPr>
+        <p:spPr>
+          <a:xfrm>
+            <a:off x="347472" y="1618416"/>
+            <a:ext cx="1073696" cy="365760"/>
           </a:xfrm>
           <a:prstGeom prst="rect">
             <a:avLst/>
@@ -7054,22 +7265,22 @@
                 <a:ea typeface="Consolas" pitchFamily="34" charset="-122"/>
                 <a:cs typeface="Consolas" pitchFamily="34" charset="-120"/>
               </a:rPr>
-              <a:t>log_index</a:t>
-            </a:r>
-            <a:endParaRPr lang="en-US" sz="950" dirty="0"/>
-          </a:p>
-        </p:txBody>
-      </p:sp>
-      <p:sp>
-        <p:nvSpPr>
-          <p:cNvPr id="8" name="Text 6"/>
-          <p:cNvSpPr/>
-          <p:nvPr/>
-        </p:nvSpPr>
-        <p:spPr>
-          <a:xfrm>
-            <a:off x="2194560" y="1389888"/>
-            <a:ext cx="2423160" cy="329184"/>
+              <a:t>vehicles</a:t>
+            </a:r>
+            <a:endParaRPr lang="en-US" dirty="0"/>
+          </a:p>
+        </p:txBody>
+      </p:sp>
+      <p:sp>
+        <p:nvSpPr>
+          <p:cNvPr id="13" name="Text"/>
+          <p:cNvSpPr/>
+          <p:nvPr/>
+        </p:nvSpPr>
+        <p:spPr>
+          <a:xfrm>
+            <a:off x="1567472" y="1618416"/>
+            <a:ext cx="553696" cy="365760"/>
           </a:xfrm>
           <a:prstGeom prst="rect">
             <a:avLst/>
@@ -7090,21 +7301,93 @@
                   <a:srgbClr val="1A1A2E"/>
                 </a:solidFill>
               </a:rPr>
-              <a:t>Global monotonic counter (Raft-style)</a:t>
-            </a:r>
-            <a:endParaRPr lang="en-US" sz="950" dirty="0"/>
-          </a:p>
-        </p:txBody>
-      </p:sp>
-      <p:sp>
-        <p:nvSpPr>
-          <p:cNvPr id="9" name="Shape 7"/>
-          <p:cNvSpPr/>
-          <p:nvPr/>
-        </p:nvSpPr>
-        <p:spPr>
-          <a:xfrm>
-            <a:off x="365760" y="1828800"/>
+              <a:t>Low</a:t>
+            </a:r>
+            <a:endParaRPr lang="en-US" dirty="0"/>
+          </a:p>
+        </p:txBody>
+      </p:sp>
+      <p:sp>
+        <p:nvSpPr>
+          <p:cNvPr id="14" name="Text"/>
+          <p:cNvSpPr/>
+          <p:nvPr/>
+        </p:nvSpPr>
+        <p:spPr>
+          <a:xfrm>
+            <a:off x="2267472" y="1618416"/>
+            <a:ext cx="1381376" cy="365760"/>
+          </a:xfrm>
+          <a:prstGeom prst="rect">
+            <a:avLst/>
+          </a:prstGeom>
+          <a:noFill/>
+          <a:ln/>
+        </p:spPr>
+        <p:txBody>
+          <a:bodyPr wrap="square" lIns="0" tIns="0" rIns="0" bIns="0" rtlCol="0" anchor="ctr"/>
+          <a:lstStyle/>
+          <a:p>
+            <a:pPr marL="0" indent="0">
+              <a:buNone/>
+            </a:pPr>
+            <a:r>
+              <a:rPr lang="en-US" sz="950" dirty="0">
+                <a:solidFill>
+                  <a:srgbClr val="006848"/>
+                </a:solidFill>
+              </a:rPr>
+              <a:t>Eventual — OK</a:t>
+            </a:r>
+            <a:endParaRPr lang="en-US" dirty="0"/>
+          </a:p>
+        </p:txBody>
+      </p:sp>
+      <p:sp>
+        <p:nvSpPr>
+          <p:cNvPr id="15" name="Text"/>
+          <p:cNvSpPr/>
+          <p:nvPr/>
+        </p:nvSpPr>
+        <p:spPr>
+          <a:xfrm>
+            <a:off x="3795152" y="1618416"/>
+            <a:ext cx="703696" cy="365760"/>
+          </a:xfrm>
+          <a:prstGeom prst="rect">
+            <a:avLst/>
+          </a:prstGeom>
+          <a:noFill/>
+          <a:ln/>
+        </p:spPr>
+        <p:txBody>
+          <a:bodyPr wrap="square" lIns="0" tIns="0" rIns="0" bIns="0" rtlCol="0" anchor="ctr"/>
+          <a:lstStyle/>
+          <a:p>
+            <a:pPr marL="0" indent="0">
+              <a:buNone/>
+            </a:pPr>
+            <a:r>
+              <a:rPr lang="en-US" sz="950" dirty="0">
+                <a:solidFill>
+                  <a:srgbClr val="006848"/>
+                </a:solidFill>
+              </a:rPr>
+              <a:t>Exp 2</a:t>
+            </a:r>
+            <a:endParaRPr lang="en-US" dirty="0"/>
+          </a:p>
+        </p:txBody>
+      </p:sp>
+      <p:sp>
+        <p:nvSpPr>
+          <p:cNvPr id="16" name="BG"/>
+          <p:cNvSpPr/>
+          <p:nvPr/>
+        </p:nvSpPr>
+        <p:spPr>
+          <a:xfrm>
+            <a:off x="274320" y="2011608"/>
             <a:ext cx="4297680" cy="420624"/>
           </a:xfrm>
           <a:prstGeom prst="rect">
@@ -7130,14 +7413,14 @@
       </p:sp>
       <p:sp>
         <p:nvSpPr>
-          <p:cNvPr id="10" name="Text 8"/>
-          <p:cNvSpPr/>
-          <p:nvPr/>
-        </p:nvSpPr>
-        <p:spPr>
-          <a:xfrm>
-            <a:off x="457200" y="1865376"/>
-            <a:ext cx="1691640" cy="329184"/>
+          <p:cNvPr id="17" name="Text"/>
+          <p:cNvSpPr/>
+          <p:nvPr/>
+        </p:nvSpPr>
+        <p:spPr>
+          <a:xfrm>
+            <a:off x="347472" y="2039040"/>
+            <a:ext cx="1073696" cy="365760"/>
           </a:xfrm>
           <a:prstGeom prst="rect">
             <a:avLst/>
@@ -7161,22 +7444,22 @@
                 <a:ea typeface="Consolas" pitchFamily="34" charset="-122"/>
                 <a:cs typeface="Consolas" pitchFamily="34" charset="-120"/>
               </a:rPr>
-              <a:t>leader_write_time</a:t>
-            </a:r>
-            <a:endParaRPr lang="en-US" sz="950" dirty="0"/>
-          </a:p>
-        </p:txBody>
-      </p:sp>
-      <p:sp>
-        <p:nvSpPr>
-          <p:cNvPr id="11" name="Text 9"/>
-          <p:cNvSpPr/>
-          <p:nvPr/>
-        </p:nvSpPr>
-        <p:spPr>
-          <a:xfrm>
-            <a:off x="2194560" y="1865376"/>
-            <a:ext cx="2423160" cy="329184"/>
+              <a:t>drivers</a:t>
+            </a:r>
+            <a:endParaRPr lang="en-US" dirty="0"/>
+          </a:p>
+        </p:txBody>
+      </p:sp>
+      <p:sp>
+        <p:nvSpPr>
+          <p:cNvPr id="18" name="Text"/>
+          <p:cNvSpPr/>
+          <p:nvPr/>
+        </p:nvSpPr>
+        <p:spPr>
+          <a:xfrm>
+            <a:off x="1567472" y="2039040"/>
+            <a:ext cx="553696" cy="365760"/>
           </a:xfrm>
           <a:prstGeom prst="rect">
             <a:avLst/>
@@ -7197,21 +7480,93 @@
                   <a:srgbClr val="1A1A2E"/>
                 </a:solidFill>
               </a:rPr>
-              <a:t>UTC — when PRIMARY committed</a:t>
-            </a:r>
-            <a:endParaRPr lang="en-US" sz="950" dirty="0"/>
-          </a:p>
-        </p:txBody>
-      </p:sp>
-      <p:sp>
-        <p:nvSpPr>
-          <p:cNvPr id="12" name="Shape 10"/>
-          <p:cNvSpPr/>
-          <p:nvPr/>
-        </p:nvSpPr>
-        <p:spPr>
-          <a:xfrm>
-            <a:off x="365760" y="2304288"/>
+              <a:t>Low</a:t>
+            </a:r>
+            <a:endParaRPr lang="en-US" dirty="0"/>
+          </a:p>
+        </p:txBody>
+      </p:sp>
+      <p:sp>
+        <p:nvSpPr>
+          <p:cNvPr id="19" name="Text"/>
+          <p:cNvSpPr/>
+          <p:nvPr/>
+        </p:nvSpPr>
+        <p:spPr>
+          <a:xfrm>
+            <a:off x="2267472" y="2039040"/>
+            <a:ext cx="1381376" cy="365760"/>
+          </a:xfrm>
+          <a:prstGeom prst="rect">
+            <a:avLst/>
+          </a:prstGeom>
+          <a:noFill/>
+          <a:ln/>
+        </p:spPr>
+        <p:txBody>
+          <a:bodyPr wrap="square" lIns="0" tIns="0" rIns="0" bIns="0" rtlCol="0" anchor="ctr"/>
+          <a:lstStyle/>
+          <a:p>
+            <a:pPr marL="0" indent="0">
+              <a:buNone/>
+            </a:pPr>
+            <a:r>
+              <a:rPr lang="en-US" sz="950" dirty="0">
+                <a:solidFill>
+                  <a:srgbClr val="006848"/>
+                </a:solidFill>
+              </a:rPr>
+              <a:t>Sync / lookup</a:t>
+            </a:r>
+            <a:endParaRPr lang="en-US" dirty="0"/>
+          </a:p>
+        </p:txBody>
+      </p:sp>
+      <p:sp>
+        <p:nvSpPr>
+          <p:cNvPr id="20" name="Text"/>
+          <p:cNvSpPr/>
+          <p:nvPr/>
+        </p:nvSpPr>
+        <p:spPr>
+          <a:xfrm>
+            <a:off x="3795152" y="2039040"/>
+            <a:ext cx="703696" cy="365760"/>
+          </a:xfrm>
+          <a:prstGeom prst="rect">
+            <a:avLst/>
+          </a:prstGeom>
+          <a:noFill/>
+          <a:ln/>
+        </p:spPr>
+        <p:txBody>
+          <a:bodyPr wrap="square" lIns="0" tIns="0" rIns="0" bIns="0" rtlCol="0" anchor="ctr"/>
+          <a:lstStyle/>
+          <a:p>
+            <a:pPr marL="0" indent="0">
+              <a:buNone/>
+            </a:pPr>
+            <a:r>
+              <a:rPr lang="en-US" sz="950" dirty="0">
+                <a:solidFill>
+                  <a:srgbClr val="006848"/>
+                </a:solidFill>
+              </a:rPr>
+              <a:t>Exp 1</a:t>
+            </a:r>
+            <a:endParaRPr lang="en-US" dirty="0"/>
+          </a:p>
+        </p:txBody>
+      </p:sp>
+      <p:sp>
+        <p:nvSpPr>
+          <p:cNvPr id="21" name="BG"/>
+          <p:cNvSpPr/>
+          <p:nvPr/>
+        </p:nvSpPr>
+        <p:spPr>
+          <a:xfrm>
+            <a:off x="274320" y="2432232"/>
             <a:ext cx="4297680" cy="420624"/>
           </a:xfrm>
           <a:prstGeom prst="rect">
@@ -7237,14 +7592,14 @@
       </p:sp>
       <p:sp>
         <p:nvSpPr>
-          <p:cNvPr id="13" name="Text 11"/>
-          <p:cNvSpPr/>
-          <p:nvPr/>
-        </p:nvSpPr>
-        <p:spPr>
-          <a:xfrm>
-            <a:off x="457200" y="2340864"/>
-            <a:ext cx="1691640" cy="329184"/>
+          <p:cNvPr id="22" name="Text"/>
+          <p:cNvSpPr/>
+          <p:nvPr/>
+        </p:nvSpPr>
+        <p:spPr>
+          <a:xfrm>
+            <a:off x="347472" y="2459664"/>
+            <a:ext cx="1073696" cy="365760"/>
           </a:xfrm>
           <a:prstGeom prst="rect">
             <a:avLst/>
@@ -7268,22 +7623,22 @@
                 <a:ea typeface="Consolas" pitchFamily="34" charset="-122"/>
                 <a:cs typeface="Consolas" pitchFamily="34" charset="-120"/>
               </a:rPr>
-              <a:t>follower_visible_time</a:t>
-            </a:r>
-            <a:endParaRPr lang="en-US" sz="950" dirty="0"/>
-          </a:p>
-        </p:txBody>
-      </p:sp>
-      <p:sp>
-        <p:nvSpPr>
-          <p:cNvPr id="14" name="Text 12"/>
-          <p:cNvSpPr/>
-          <p:nvPr/>
-        </p:nvSpPr>
-        <p:spPr>
-          <a:xfrm>
-            <a:off x="2194560" y="2340864"/>
-            <a:ext cx="2423160" cy="329184"/>
+              <a:t>depots</a:t>
+            </a:r>
+            <a:endParaRPr lang="en-US" dirty="0"/>
+          </a:p>
+        </p:txBody>
+      </p:sp>
+      <p:sp>
+        <p:nvSpPr>
+          <p:cNvPr id="23" name="Text"/>
+          <p:cNvSpPr/>
+          <p:nvPr/>
+        </p:nvSpPr>
+        <p:spPr>
+          <a:xfrm>
+            <a:off x="1567472" y="2459664"/>
+            <a:ext cx="553696" cy="365760"/>
           </a:xfrm>
           <a:prstGeom prst="rect">
             <a:avLst/>
@@ -7304,21 +7659,272 @@
                   <a:srgbClr val="1A1A2E"/>
                 </a:solidFill>
               </a:rPr>
-              <a:t>UTC — when SECONDARY showed version_after</a:t>
-            </a:r>
-            <a:endParaRPr lang="en-US" sz="950" dirty="0"/>
-          </a:p>
-        </p:txBody>
-      </p:sp>
-      <p:sp>
-        <p:nvSpPr>
-          <p:cNvPr id="15" name="Shape 13"/>
-          <p:cNvSpPr/>
-          <p:nvPr/>
-        </p:nvSpPr>
-        <p:spPr>
-          <a:xfrm>
-            <a:off x="365760" y="2779776"/>
+              <a:t>Static</a:t>
+            </a:r>
+            <a:endParaRPr lang="en-US" dirty="0"/>
+          </a:p>
+        </p:txBody>
+      </p:sp>
+      <p:sp>
+        <p:nvSpPr>
+          <p:cNvPr id="24" name="Text"/>
+          <p:cNvSpPr/>
+          <p:nvPr/>
+        </p:nvSpPr>
+        <p:spPr>
+          <a:xfrm>
+            <a:off x="2267472" y="2459664"/>
+            <a:ext cx="1381376" cy="365760"/>
+          </a:xfrm>
+          <a:prstGeom prst="rect">
+            <a:avLst/>
+          </a:prstGeom>
+          <a:noFill/>
+          <a:ln/>
+        </p:spPr>
+        <p:txBody>
+          <a:bodyPr wrap="square" lIns="0" tIns="0" rIns="0" bIns="0" rtlCol="0" anchor="ctr"/>
+          <a:lstStyle/>
+          <a:p>
+            <a:pPr marL="0" indent="0">
+              <a:buNone/>
+            </a:pPr>
+            <a:r>
+              <a:rPr lang="en-US" sz="950" dirty="0">
+                <a:solidFill>
+                  <a:srgbClr val="006848"/>
+                </a:solidFill>
+              </a:rPr>
+              <a:t>Sync — static</a:t>
+            </a:r>
+            <a:endParaRPr lang="en-US" dirty="0"/>
+          </a:p>
+        </p:txBody>
+      </p:sp>
+      <p:sp>
+        <p:nvSpPr>
+          <p:cNvPr id="25" name="Text"/>
+          <p:cNvSpPr/>
+          <p:nvPr/>
+        </p:nvSpPr>
+        <p:spPr>
+          <a:xfrm>
+            <a:off x="3795152" y="2459664"/>
+            <a:ext cx="703696" cy="365760"/>
+          </a:xfrm>
+          <a:prstGeom prst="rect">
+            <a:avLst/>
+          </a:prstGeom>
+          <a:noFill/>
+          <a:ln/>
+        </p:spPr>
+        <p:txBody>
+          <a:bodyPr wrap="square" lIns="0" tIns="0" rIns="0" bIns="0" rtlCol="0" anchor="ctr"/>
+          <a:lstStyle/>
+          <a:p>
+            <a:pPr marL="0" indent="0">
+              <a:buNone/>
+            </a:pPr>
+            <a:r>
+              <a:rPr lang="en-US" sz="950" dirty="0">
+                <a:solidFill>
+                  <a:srgbClr val="006848"/>
+                </a:solidFill>
+              </a:rPr>
+              <a:t>Exp 1</a:t>
+            </a:r>
+            <a:endParaRPr lang="en-US" dirty="0"/>
+          </a:p>
+        </p:txBody>
+      </p:sp>
+      <p:sp>
+        <p:nvSpPr>
+          <p:cNvPr id="26" name="BG"/>
+          <p:cNvSpPr/>
+          <p:nvPr/>
+        </p:nvSpPr>
+        <p:spPr>
+          <a:xfrm>
+            <a:off x="274320" y="2852856"/>
+            <a:ext cx="4297680" cy="420624"/>
+          </a:xfrm>
+          <a:prstGeom prst="rect">
+            <a:avLst/>
+          </a:prstGeom>
+          <a:solidFill>
+            <a:srgbClr val="FEF3C7"/>
+          </a:solidFill>
+          <a:ln w="6350">
+            <a:solidFill>
+              <a:srgbClr val="E2E8F0"/>
+            </a:solidFill>
+            <a:prstDash val="solid"/>
+          </a:ln>
+        </p:spPr>
+        <p:txBody>
+          <a:bodyPr/>
+          <a:lstStyle/>
+          <a:p>
+            <a:endParaRPr lang="en-TR"/>
+          </a:p>
+        </p:txBody>
+      </p:sp>
+      <p:sp>
+        <p:nvSpPr>
+          <p:cNvPr id="27" name="Text"/>
+          <p:cNvSpPr/>
+          <p:nvPr/>
+        </p:nvSpPr>
+        <p:spPr>
+          <a:xfrm>
+            <a:off x="347472" y="2880288"/>
+            <a:ext cx="1073696" cy="365760"/>
+          </a:xfrm>
+          <a:prstGeom prst="rect">
+            <a:avLst/>
+          </a:prstGeom>
+          <a:noFill/>
+          <a:ln/>
+        </p:spPr>
+        <p:txBody>
+          <a:bodyPr wrap="square" lIns="0" tIns="0" rIns="0" bIns="0" rtlCol="0" anchor="ctr"/>
+          <a:lstStyle/>
+          <a:p>
+            <a:pPr marL="0" indent="0">
+              <a:buNone/>
+            </a:pPr>
+            <a:r>
+              <a:rPr lang="en-US" sz="950" b="1" dirty="0">
+                <a:solidFill>
+                  <a:srgbClr val="D97706"/>
+                </a:solidFill>
+                <a:latin typeface="Consolas" pitchFamily="34" charset="0"/>
+                <a:ea typeface="Consolas" pitchFamily="34" charset="-122"/>
+                <a:cs typeface="Consolas" pitchFamily="34" charset="-120"/>
+              </a:rPr>
+              <a:t>shipments</a:t>
+            </a:r>
+            <a:endParaRPr lang="en-US" dirty="0"/>
+          </a:p>
+        </p:txBody>
+      </p:sp>
+      <p:sp>
+        <p:nvSpPr>
+          <p:cNvPr id="28" name="Text"/>
+          <p:cNvSpPr/>
+          <p:nvPr/>
+        </p:nvSpPr>
+        <p:spPr>
+          <a:xfrm>
+            <a:off x="1567472" y="2880288"/>
+            <a:ext cx="553696" cy="365760"/>
+          </a:xfrm>
+          <a:prstGeom prst="rect">
+            <a:avLst/>
+          </a:prstGeom>
+          <a:noFill/>
+          <a:ln/>
+        </p:spPr>
+        <p:txBody>
+          <a:bodyPr wrap="square" lIns="0" tIns="0" rIns="0" bIns="0" rtlCol="0" anchor="ctr"/>
+          <a:lstStyle/>
+          <a:p>
+            <a:pPr marL="0" indent="0">
+              <a:buNone/>
+            </a:pPr>
+            <a:r>
+              <a:rPr lang="en-US" sz="950" dirty="0">
+                <a:solidFill>
+                  <a:srgbClr val="1A1A2E"/>
+                </a:solidFill>
+              </a:rPr>
+              <a:t>Medium</a:t>
+            </a:r>
+            <a:endParaRPr lang="en-US" dirty="0"/>
+          </a:p>
+        </p:txBody>
+      </p:sp>
+      <p:sp>
+        <p:nvSpPr>
+          <p:cNvPr id="29" name="Text"/>
+          <p:cNvSpPr/>
+          <p:nvPr/>
+        </p:nvSpPr>
+        <p:spPr>
+          <a:xfrm>
+            <a:off x="2267472" y="2880288"/>
+            <a:ext cx="1381376" cy="365760"/>
+          </a:xfrm>
+          <a:prstGeom prst="rect">
+            <a:avLst/>
+          </a:prstGeom>
+          <a:noFill/>
+          <a:ln/>
+        </p:spPr>
+        <p:txBody>
+          <a:bodyPr wrap="square" lIns="0" tIns="0" rIns="0" bIns="0" rtlCol="0" anchor="ctr"/>
+          <a:lstStyle/>
+          <a:p>
+            <a:pPr marL="0" indent="0">
+              <a:buNone/>
+            </a:pPr>
+            <a:r>
+              <a:rPr lang="en-US" sz="950" b="1" dirty="0">
+                <a:solidFill>
+                  <a:srgbClr val="D97706"/>
+                </a:solidFill>
+              </a:rPr>
+              <a:t>Monotonic reads</a:t>
+            </a:r>
+            <a:endParaRPr lang="en-US" dirty="0"/>
+          </a:p>
+        </p:txBody>
+      </p:sp>
+      <p:sp>
+        <p:nvSpPr>
+          <p:cNvPr id="30" name="Text"/>
+          <p:cNvSpPr/>
+          <p:nvPr/>
+        </p:nvSpPr>
+        <p:spPr>
+          <a:xfrm>
+            <a:off x="3795152" y="2880288"/>
+            <a:ext cx="703696" cy="365760"/>
+          </a:xfrm>
+          <a:prstGeom prst="rect">
+            <a:avLst/>
+          </a:prstGeom>
+          <a:noFill/>
+          <a:ln/>
+        </p:spPr>
+        <p:txBody>
+          <a:bodyPr wrap="square" lIns="0" tIns="0" rIns="0" bIns="0" rtlCol="0" anchor="ctr"/>
+          <a:lstStyle/>
+          <a:p>
+            <a:pPr marL="0" indent="0">
+              <a:buNone/>
+            </a:pPr>
+            <a:r>
+              <a:rPr lang="en-US" sz="950" b="1" dirty="0">
+                <a:solidFill>
+                  <a:srgbClr val="D97706"/>
+                </a:solidFill>
+              </a:rPr>
+              <a:t>Exp 4</a:t>
+            </a:r>
+            <a:endParaRPr lang="en-US" dirty="0"/>
+          </a:p>
+        </p:txBody>
+      </p:sp>
+      <p:sp>
+        <p:nvSpPr>
+          <p:cNvPr id="31" name="BG"/>
+          <p:cNvSpPr/>
+          <p:nvPr/>
+        </p:nvSpPr>
+        <p:spPr>
+          <a:xfrm>
+            <a:off x="274320" y="3273480"/>
             <a:ext cx="4297680" cy="420624"/>
           </a:xfrm>
           <a:prstGeom prst="rect">
@@ -7344,14 +7950,14 @@
       </p:sp>
       <p:sp>
         <p:nvSpPr>
-          <p:cNvPr id="16" name="Text 14"/>
-          <p:cNvSpPr/>
-          <p:nvPr/>
-        </p:nvSpPr>
-        <p:spPr>
-          <a:xfrm>
-            <a:off x="457200" y="2816352"/>
-            <a:ext cx="1691640" cy="329184"/>
+          <p:cNvPr id="32" name="Text"/>
+          <p:cNvSpPr/>
+          <p:nvPr/>
+        </p:nvSpPr>
+        <p:spPr>
+          <a:xfrm>
+            <a:off x="347472" y="3300912"/>
+            <a:ext cx="1073696" cy="365760"/>
           </a:xfrm>
           <a:prstGeom prst="rect">
             <a:avLst/>
@@ -7369,28 +7975,28 @@
             <a:r>
               <a:rPr lang="en-US" sz="950" b="1" dirty="0">
                 <a:solidFill>
-                  <a:srgbClr val="006848"/>
+                  <a:srgbClr val="1A1A2E"/>
                 </a:solidFill>
                 <a:latin typeface="Consolas" pitchFamily="34" charset="0"/>
                 <a:ea typeface="Consolas" pitchFamily="34" charset="-122"/>
                 <a:cs typeface="Consolas" pitchFamily="34" charset="-120"/>
               </a:rPr>
-              <a:t>replication_delay_ms</a:t>
-            </a:r>
-            <a:endParaRPr lang="en-US" sz="950" dirty="0"/>
-          </a:p>
-        </p:txBody>
-      </p:sp>
-      <p:sp>
-        <p:nvSpPr>
-          <p:cNvPr id="17" name="Text 15"/>
-          <p:cNvSpPr/>
-          <p:nvPr/>
-        </p:nvSpPr>
-        <p:spPr>
-          <a:xfrm>
-            <a:off x="2194560" y="2816352"/>
-            <a:ext cx="2423160" cy="329184"/>
+              <a:t>positions</a:t>
+            </a:r>
+            <a:endParaRPr lang="en-US" dirty="0"/>
+          </a:p>
+        </p:txBody>
+      </p:sp>
+      <p:sp>
+        <p:nvSpPr>
+          <p:cNvPr id="33" name="Text"/>
+          <p:cNvSpPr/>
+          <p:nvPr/>
+        </p:nvSpPr>
+        <p:spPr>
+          <a:xfrm>
+            <a:off x="1567472" y="3300912"/>
+            <a:ext cx="553696" cy="365760"/>
           </a:xfrm>
           <a:prstGeom prst="rect">
             <a:avLst/>
@@ -7411,22 +8017,541 @@
                   <a:srgbClr val="1A1A2E"/>
                 </a:solidFill>
               </a:rPr>
-              <a:t>follower_visible_time − leader_write_time</a:t>
-            </a:r>
-            <a:endParaRPr lang="en-US" sz="950" dirty="0"/>
-          </a:p>
-        </p:txBody>
-      </p:sp>
-      <p:sp>
-        <p:nvSpPr>
-          <p:cNvPr id="18" name="Shape 16"/>
-          <p:cNvSpPr/>
-          <p:nvPr/>
-        </p:nvSpPr>
-        <p:spPr>
-          <a:xfrm>
-            <a:off x="365760" y="3255264"/>
+              <a:t>High ↑</a:t>
+            </a:r>
+            <a:endParaRPr lang="en-US" dirty="0"/>
+          </a:p>
+        </p:txBody>
+      </p:sp>
+      <p:sp>
+        <p:nvSpPr>
+          <p:cNvPr id="34" name="Text"/>
+          <p:cNvSpPr/>
+          <p:nvPr/>
+        </p:nvSpPr>
+        <p:spPr>
+          <a:xfrm>
+            <a:off x="2267472" y="3300912"/>
+            <a:ext cx="1381376" cy="365760"/>
+          </a:xfrm>
+          <a:prstGeom prst="rect">
+            <a:avLst/>
+          </a:prstGeom>
+          <a:noFill/>
+          <a:ln/>
+        </p:spPr>
+        <p:txBody>
+          <a:bodyPr wrap="square" lIns="0" tIns="0" rIns="0" bIns="0" rtlCol="0" anchor="ctr"/>
+          <a:lstStyle/>
+          <a:p>
+            <a:pPr marL="0" indent="0">
+              <a:buNone/>
+            </a:pPr>
+            <a:r>
+              <a:rPr lang="en-US" sz="950" dirty="0">
+                <a:solidFill>
+                  <a:srgbClr val="1E64C8"/>
+                </a:solidFill>
+              </a:rPr>
+              <a:t>Eventual — OK</a:t>
+            </a:r>
+            <a:endParaRPr lang="en-US" dirty="0"/>
+          </a:p>
+        </p:txBody>
+      </p:sp>
+      <p:sp>
+        <p:nvSpPr>
+          <p:cNvPr id="35" name="Text"/>
+          <p:cNvSpPr/>
+          <p:nvPr/>
+        </p:nvSpPr>
+        <p:spPr>
+          <a:xfrm>
+            <a:off x="3795152" y="3300912"/>
+            <a:ext cx="703696" cy="365760"/>
+          </a:xfrm>
+          <a:prstGeom prst="rect">
+            <a:avLst/>
+          </a:prstGeom>
+          <a:noFill/>
+          <a:ln/>
+        </p:spPr>
+        <p:txBody>
+          <a:bodyPr wrap="square" lIns="0" tIns="0" rIns="0" bIns="0" rtlCol="0" anchor="ctr"/>
+          <a:lstStyle/>
+          <a:p>
+            <a:pPr marL="0" indent="0">
+              <a:buNone/>
+            </a:pPr>
+            <a:r>
+              <a:rPr lang="en-US" sz="950" dirty="0">
+                <a:solidFill>
+                  <a:srgbClr val="1E64C8"/>
+                </a:solidFill>
+              </a:rPr>
+              <a:t>Exp 5</a:t>
+            </a:r>
+            <a:endParaRPr lang="en-US" dirty="0"/>
+          </a:p>
+        </p:txBody>
+      </p:sp>
+      <p:sp>
+        <p:nvSpPr>
+          <p:cNvPr id="36" name="BG"/>
+          <p:cNvSpPr/>
+          <p:nvPr/>
+        </p:nvSpPr>
+        <p:spPr>
+          <a:xfrm>
+            <a:off x="274320" y="3694104"/>
             <a:ext cx="4297680" cy="420624"/>
+          </a:xfrm>
+          <a:prstGeom prst="rect">
+            <a:avLst/>
+          </a:prstGeom>
+          <a:solidFill>
+            <a:srgbClr val="FEE2E2"/>
+          </a:solidFill>
+          <a:ln w="6350">
+            <a:solidFill>
+              <a:srgbClr val="E2E8F0"/>
+            </a:solidFill>
+            <a:prstDash val="solid"/>
+          </a:ln>
+        </p:spPr>
+        <p:txBody>
+          <a:bodyPr/>
+          <a:lstStyle/>
+          <a:p>
+            <a:endParaRPr lang="en-TR"/>
+          </a:p>
+        </p:txBody>
+      </p:sp>
+      <p:sp>
+        <p:nvSpPr>
+          <p:cNvPr id="37" name="Text"/>
+          <p:cNvSpPr/>
+          <p:nvPr/>
+        </p:nvSpPr>
+        <p:spPr>
+          <a:xfrm>
+            <a:off x="347472" y="3721536"/>
+            <a:ext cx="1073696" cy="365760"/>
+          </a:xfrm>
+          <a:prstGeom prst="rect">
+            <a:avLst/>
+          </a:prstGeom>
+          <a:noFill/>
+          <a:ln/>
+        </p:spPr>
+        <p:txBody>
+          <a:bodyPr wrap="square" lIns="0" tIns="0" rIns="0" bIns="0" rtlCol="0" anchor="ctr"/>
+          <a:lstStyle/>
+          <a:p>
+            <a:pPr marL="0" indent="0">
+              <a:buNone/>
+            </a:pPr>
+            <a:r>
+              <a:rPr lang="en-US" sz="950" b="1" dirty="0">
+                <a:solidFill>
+                  <a:srgbClr val="DC2626"/>
+                </a:solidFill>
+                <a:latin typeface="Consolas" pitchFamily="34" charset="0"/>
+                <a:ea typeface="Consolas" pitchFamily="34" charset="-122"/>
+                <a:cs typeface="Consolas" pitchFamily="34" charset="-120"/>
+              </a:rPr>
+              <a:t>incidents</a:t>
+            </a:r>
+            <a:endParaRPr lang="en-US" dirty="0"/>
+          </a:p>
+        </p:txBody>
+      </p:sp>
+      <p:sp>
+        <p:nvSpPr>
+          <p:cNvPr id="38" name="Text"/>
+          <p:cNvSpPr/>
+          <p:nvPr/>
+        </p:nvSpPr>
+        <p:spPr>
+          <a:xfrm>
+            <a:off x="1567472" y="3721536"/>
+            <a:ext cx="553696" cy="365760"/>
+          </a:xfrm>
+          <a:prstGeom prst="rect">
+            <a:avLst/>
+          </a:prstGeom>
+          <a:noFill/>
+          <a:ln/>
+        </p:spPr>
+        <p:txBody>
+          <a:bodyPr wrap="square" lIns="0" tIns="0" rIns="0" bIns="0" rtlCol="0" anchor="ctr"/>
+          <a:lstStyle/>
+          <a:p>
+            <a:pPr marL="0" indent="0">
+              <a:buNone/>
+            </a:pPr>
+            <a:r>
+              <a:rPr lang="en-US" sz="950" dirty="0">
+                <a:solidFill>
+                  <a:srgbClr val="1A1A2E"/>
+                </a:solidFill>
+              </a:rPr>
+              <a:t>Low</a:t>
+            </a:r>
+            <a:endParaRPr lang="en-US" dirty="0"/>
+          </a:p>
+        </p:txBody>
+      </p:sp>
+      <p:sp>
+        <p:nvSpPr>
+          <p:cNvPr id="39" name="Text"/>
+          <p:cNvSpPr/>
+          <p:nvPr/>
+        </p:nvSpPr>
+        <p:spPr>
+          <a:xfrm>
+            <a:off x="2267472" y="3721536"/>
+            <a:ext cx="1381376" cy="365760"/>
+          </a:xfrm>
+          <a:prstGeom prst="rect">
+            <a:avLst/>
+          </a:prstGeom>
+          <a:noFill/>
+          <a:ln/>
+        </p:spPr>
+        <p:txBody>
+          <a:bodyPr wrap="square" lIns="0" tIns="0" rIns="0" bIns="0" rtlCol="0" anchor="ctr"/>
+          <a:lstStyle/>
+          <a:p>
+            <a:pPr marL="0" indent="0">
+              <a:buNone/>
+            </a:pPr>
+            <a:r>
+              <a:rPr lang="en-US" sz="950" b="1" dirty="0">
+                <a:solidFill>
+                  <a:srgbClr val="DC2626"/>
+                </a:solidFill>
+              </a:rPr>
+              <a:t>Read-after-write</a:t>
+            </a:r>
+            <a:endParaRPr lang="en-US" dirty="0"/>
+          </a:p>
+        </p:txBody>
+      </p:sp>
+      <p:sp>
+        <p:nvSpPr>
+          <p:cNvPr id="40" name="Text"/>
+          <p:cNvSpPr/>
+          <p:nvPr/>
+        </p:nvSpPr>
+        <p:spPr>
+          <a:xfrm>
+            <a:off x="3795152" y="3721536"/>
+            <a:ext cx="703696" cy="365760"/>
+          </a:xfrm>
+          <a:prstGeom prst="rect">
+            <a:avLst/>
+          </a:prstGeom>
+          <a:noFill/>
+          <a:ln/>
+        </p:spPr>
+        <p:txBody>
+          <a:bodyPr wrap="square" lIns="0" tIns="0" rIns="0" bIns="0" rtlCol="0" anchor="ctr"/>
+          <a:lstStyle/>
+          <a:p>
+            <a:pPr marL="0" indent="0">
+              <a:buNone/>
+            </a:pPr>
+            <a:r>
+              <a:rPr lang="en-US" sz="950" b="1" dirty="0">
+                <a:solidFill>
+                  <a:srgbClr val="DC2626"/>
+                </a:solidFill>
+              </a:rPr>
+              <a:t>Exp 3</a:t>
+            </a:r>
+            <a:endParaRPr lang="en-US" dirty="0"/>
+          </a:p>
+        </p:txBody>
+      </p:sp>
+      <p:sp>
+        <p:nvSpPr>
+          <p:cNvPr id="41" name="BG"/>
+          <p:cNvSpPr/>
+          <p:nvPr/>
+        </p:nvSpPr>
+        <p:spPr>
+          <a:xfrm>
+            <a:off x="274320" y="4151304"/>
+            <a:ext cx="4297680" cy="900756"/>
+          </a:xfrm>
+          <a:prstGeom prst="rect">
+            <a:avLst/>
+          </a:prstGeom>
+          <a:solidFill>
+            <a:srgbClr val="ECFDF5"/>
+          </a:solidFill>
+          <a:ln w="12700">
+            <a:solidFill>
+              <a:srgbClr val="006848"/>
+            </a:solidFill>
+            <a:prstDash val="solid"/>
+          </a:ln>
+        </p:spPr>
+        <p:txBody>
+          <a:bodyPr/>
+          <a:lstStyle/>
+          <a:p>
+            <a:endParaRPr lang="en-TR"/>
+          </a:p>
+        </p:txBody>
+      </p:sp>
+      <p:sp>
+        <p:nvSpPr>
+          <p:cNvPr id="42" name="Text"/>
+          <p:cNvSpPr/>
+          <p:nvPr/>
+        </p:nvSpPr>
+        <p:spPr>
+          <a:xfrm>
+            <a:off x="347472" y="4178736"/>
+            <a:ext cx="4151376" cy="845892"/>
+          </a:xfrm>
+          <a:prstGeom prst="rect">
+            <a:avLst/>
+          </a:prstGeom>
+          <a:noFill/>
+          <a:ln/>
+        </p:spPr>
+        <p:txBody>
+          <a:bodyPr wrap="square" lIns="0" tIns="0" rIns="0" bIns="0" rtlCol="0" anchor="ctr"/>
+          <a:lstStyle/>
+          <a:p>
+            <a:pPr marL="0" indent="0">
+              <a:buNone/>
+            </a:pPr>
+            <a:r>
+              <a:rPr lang="en-US" sz="980" b="1" dirty="0">
+                <a:solidFill>
+                  <a:srgbClr val="006848"/>
+                </a:solidFill>
+              </a:rPr>
+              <a:t>Design principle: </a:t>
+            </a:r>
+            <a:r>
+              <a:rPr lang="en-US" sz="980" dirty="0">
+                <a:solidFill>
+                  <a:srgbClr val="1A1A2E"/>
+                </a:solidFill>
+              </a:rPr>
+              <a:t>write freq + criticality drives consistency model. </a:t>
+            </a:r>
+            <a:r>
+              <a:rPr lang="en-US" sz="980" b="1" dirty="0">
+                <a:solidFill>
+                  <a:srgbClr val="DC2626"/>
+                </a:solidFill>
+                <a:latin typeface="Consolas" pitchFamily="34" charset="0"/>
+                <a:ea typeface="Consolas" pitchFamily="34" charset="-122"/>
+                <a:cs typeface="Consolas" pitchFamily="34" charset="-120"/>
+              </a:rPr>
+              <a:t>incidents</a:t>
+            </a:r>
+            <a:r>
+              <a:rPr lang="en-US" sz="980" dirty="0">
+                <a:solidFill>
+                  <a:srgbClr val="1A1A2E"/>
+                </a:solidFill>
+              </a:rPr>
+              <a:t> needs RAW (safety-critical); </a:t>
+            </a:r>
+            <a:r>
+              <a:rPr lang="en-US" sz="980" b="1" dirty="0">
+                <a:solidFill>
+                  <a:srgbClr val="1E64C8"/>
+                </a:solidFill>
+                <a:latin typeface="Consolas" pitchFamily="34" charset="0"/>
+                <a:ea typeface="Consolas" pitchFamily="34" charset="-122"/>
+                <a:cs typeface="Consolas" pitchFamily="34" charset="-120"/>
+              </a:rPr>
+              <a:t>positions</a:t>
+            </a:r>
+            <a:r>
+              <a:rPr lang="en-US" sz="980" dirty="0">
+                <a:solidFill>
+                  <a:srgbClr val="1A1A2E"/>
+                </a:solidFill>
+              </a:rPr>
+              <a:t> tolerates lag (high throughput); </a:t>
+            </a:r>
+            <a:r>
+              <a:rPr lang="en-US" sz="980" b="1" dirty="0">
+                <a:solidFill>
+                  <a:srgbClr val="D97706"/>
+                </a:solidFill>
+                <a:latin typeface="Consolas" pitchFamily="34" charset="0"/>
+                <a:ea typeface="Consolas" pitchFamily="34" charset="-122"/>
+                <a:cs typeface="Consolas" pitchFamily="34" charset="-120"/>
+              </a:rPr>
+              <a:t>shipments</a:t>
+            </a:r>
+            <a:r>
+              <a:rPr lang="en-US" sz="980" dirty="0">
+                <a:solidFill>
+                  <a:srgbClr val="1A1A2E"/>
+                </a:solidFill>
+              </a:rPr>
+              <a:t> must never read a version backwards.</a:t>
+            </a:r>
+            <a:endParaRPr lang="en-US" dirty="0"/>
+          </a:p>
+        </p:txBody>
+      </p:sp>
+      <p:sp>
+        <p:nvSpPr>
+          <p:cNvPr id="43" name="Text"/>
+          <p:cNvSpPr/>
+          <p:nvPr/>
+        </p:nvSpPr>
+        <p:spPr>
+          <a:xfrm>
+            <a:off x="4846320" y="969192"/>
+            <a:ext cx="4023360" cy="292608"/>
+          </a:xfrm>
+          <a:prstGeom prst="rect">
+            <a:avLst/>
+          </a:prstGeom>
+          <a:noFill/>
+          <a:ln/>
+        </p:spPr>
+        <p:txBody>
+          <a:bodyPr wrap="square" lIns="0" tIns="0" rIns="0" bIns="0" rtlCol="0" anchor="ctr"/>
+          <a:lstStyle/>
+          <a:p>
+            <a:pPr marL="0" indent="0">
+              <a:buNone/>
+            </a:pPr>
+            <a:r>
+              <a:rPr lang="en-US" sz="1300" b="1" dirty="0">
+                <a:solidFill>
+                  <a:srgbClr val="006848"/>
+                </a:solidFill>
+              </a:rPr>
+              <a:t>operation_logs  —  Observability Layer</a:t>
+            </a:r>
+            <a:endParaRPr lang="en-US" dirty="0"/>
+          </a:p>
+        </p:txBody>
+      </p:sp>
+      <p:sp>
+        <p:nvSpPr>
+          <p:cNvPr id="44" name="BG"/>
+          <p:cNvSpPr/>
+          <p:nvPr/>
+        </p:nvSpPr>
+        <p:spPr>
+          <a:xfrm>
+            <a:off x="4846320" y="1261800"/>
+            <a:ext cx="4023360" cy="329184"/>
+          </a:xfrm>
+          <a:prstGeom prst="rect">
+            <a:avLst/>
+          </a:prstGeom>
+          <a:solidFill>
+            <a:srgbClr val="006848"/>
+          </a:solidFill>
+          <a:ln/>
+        </p:spPr>
+        <p:txBody>
+          <a:bodyPr/>
+          <a:lstStyle/>
+          <a:p>
+            <a:endParaRPr lang="en-TR"/>
+          </a:p>
+        </p:txBody>
+      </p:sp>
+      <p:sp>
+        <p:nvSpPr>
+          <p:cNvPr id="45" name="Text"/>
+          <p:cNvSpPr/>
+          <p:nvPr/>
+        </p:nvSpPr>
+        <p:spPr>
+          <a:xfrm>
+            <a:off x="4919472" y="1289232"/>
+            <a:ext cx="1353696" cy="274320"/>
+          </a:xfrm>
+          <a:prstGeom prst="rect">
+            <a:avLst/>
+          </a:prstGeom>
+          <a:noFill/>
+          <a:ln/>
+        </p:spPr>
+        <p:txBody>
+          <a:bodyPr wrap="square" lIns="0" tIns="0" rIns="0" bIns="0" rtlCol="0" anchor="ctr"/>
+          <a:lstStyle/>
+          <a:p>
+            <a:pPr marL="0" indent="0">
+              <a:buNone/>
+            </a:pPr>
+            <a:r>
+              <a:rPr lang="en-US" sz="1000" b="1" dirty="0">
+                <a:solidFill>
+                  <a:srgbClr val="FFFFFF"/>
+                </a:solidFill>
+              </a:rPr>
+              <a:t>Field</a:t>
+            </a:r>
+            <a:endParaRPr lang="en-US" dirty="0"/>
+          </a:p>
+        </p:txBody>
+      </p:sp>
+      <p:sp>
+        <p:nvSpPr>
+          <p:cNvPr id="46" name="Text"/>
+          <p:cNvSpPr/>
+          <p:nvPr/>
+        </p:nvSpPr>
+        <p:spPr>
+          <a:xfrm>
+            <a:off x="6419472" y="1289232"/>
+            <a:ext cx="2377056" cy="274320"/>
+          </a:xfrm>
+          <a:prstGeom prst="rect">
+            <a:avLst/>
+          </a:prstGeom>
+          <a:noFill/>
+          <a:ln/>
+        </p:spPr>
+        <p:txBody>
+          <a:bodyPr wrap="square" lIns="0" tIns="0" rIns="0" bIns="0" rtlCol="0" anchor="ctr"/>
+          <a:lstStyle/>
+          <a:p>
+            <a:pPr marL="0" indent="0">
+              <a:buNone/>
+            </a:pPr>
+            <a:r>
+              <a:rPr lang="en-US" sz="1000" b="1" dirty="0">
+                <a:solidFill>
+                  <a:srgbClr val="FFFFFF"/>
+                </a:solidFill>
+              </a:rPr>
+              <a:t>Description</a:t>
+            </a:r>
+            <a:endParaRPr lang="en-US" dirty="0"/>
+          </a:p>
+        </p:txBody>
+      </p:sp>
+      <p:sp>
+        <p:nvSpPr>
+          <p:cNvPr id="47" name="BG"/>
+          <p:cNvSpPr/>
+          <p:nvPr/>
+        </p:nvSpPr>
+        <p:spPr>
+          <a:xfrm>
+            <a:off x="4846320" y="1590984"/>
+            <a:ext cx="4023360" cy="350520"/>
           </a:xfrm>
           <a:prstGeom prst="rect">
             <a:avLst/>
@@ -7451,14 +8576,14 @@
       </p:sp>
       <p:sp>
         <p:nvSpPr>
-          <p:cNvPr id="19" name="Text 17"/>
-          <p:cNvSpPr/>
-          <p:nvPr/>
-        </p:nvSpPr>
-        <p:spPr>
-          <a:xfrm>
-            <a:off x="457200" y="3291840"/>
-            <a:ext cx="1691640" cy="329184"/>
+          <p:cNvPr id="48" name="Text"/>
+          <p:cNvSpPr/>
+          <p:nvPr/>
+        </p:nvSpPr>
+        <p:spPr>
+          <a:xfrm>
+            <a:off x="4919472" y="1618416"/>
+            <a:ext cx="1353696" cy="295656"/>
           </a:xfrm>
           <a:prstGeom prst="rect">
             <a:avLst/>
@@ -7474,7 +8599,7 @@
               <a:buNone/>
             </a:pPr>
             <a:r>
-              <a:rPr lang="en-US" sz="950" b="1" dirty="0">
+              <a:rPr lang="en-US" sz="900" b="1" dirty="0">
                 <a:solidFill>
                   <a:srgbClr val="006848"/>
                 </a:solidFill>
@@ -7482,22 +8607,22 @@
                 <a:ea typeface="Consolas" pitchFamily="34" charset="-122"/>
                 <a:cs typeface="Consolas" pitchFamily="34" charset="-120"/>
               </a:rPr>
-              <a:t>version_before / after</a:t>
-            </a:r>
-            <a:endParaRPr lang="en-US" sz="950" dirty="0"/>
-          </a:p>
-        </p:txBody>
-      </p:sp>
-      <p:sp>
-        <p:nvSpPr>
-          <p:cNvPr id="20" name="Text 18"/>
-          <p:cNvSpPr/>
-          <p:nvPr/>
-        </p:nvSpPr>
-        <p:spPr>
-          <a:xfrm>
-            <a:off x="2194560" y="3291840"/>
-            <a:ext cx="2423160" cy="329184"/>
+              <a:t>operation_type</a:t>
+            </a:r>
+            <a:endParaRPr lang="en-US" dirty="0"/>
+          </a:p>
+        </p:txBody>
+      </p:sp>
+      <p:sp>
+        <p:nvSpPr>
+          <p:cNvPr id="49" name="Text"/>
+          <p:cNvSpPr/>
+          <p:nvPr/>
+        </p:nvSpPr>
+        <p:spPr>
+          <a:xfrm>
+            <a:off x="6419472" y="1618416"/>
+            <a:ext cx="2377056" cy="295656"/>
           </a:xfrm>
           <a:prstGeom prst="rect">
             <a:avLst/>
@@ -7513,27 +8638,27 @@
               <a:buNone/>
             </a:pPr>
             <a:r>
-              <a:rPr lang="en-US" sz="950" dirty="0">
+              <a:rPr lang="en-US" sz="900" dirty="0">
                 <a:solidFill>
                   <a:srgbClr val="1A1A2E"/>
                 </a:solidFill>
               </a:rPr>
-              <a:t>Document version before and after write</a:t>
-            </a:r>
-            <a:endParaRPr lang="en-US" sz="950" dirty="0"/>
-          </a:p>
-        </p:txBody>
-      </p:sp>
-      <p:sp>
-        <p:nvSpPr>
-          <p:cNvPr id="21" name="Shape 19"/>
-          <p:cNvSpPr/>
-          <p:nvPr/>
-        </p:nvSpPr>
-        <p:spPr>
-          <a:xfrm>
-            <a:off x="365760" y="3730752"/>
-            <a:ext cx="4297680" cy="420624"/>
+              <a:t>insert / update / delete</a:t>
+            </a:r>
+            <a:endParaRPr lang="en-US" dirty="0"/>
+          </a:p>
+        </p:txBody>
+      </p:sp>
+      <p:sp>
+        <p:nvSpPr>
+          <p:cNvPr id="50" name="BG"/>
+          <p:cNvSpPr/>
+          <p:nvPr/>
+        </p:nvSpPr>
+        <p:spPr>
+          <a:xfrm>
+            <a:off x="4846320" y="1941504"/>
+            <a:ext cx="4023360" cy="350520"/>
           </a:xfrm>
           <a:prstGeom prst="rect">
             <a:avLst/>
@@ -7558,14 +8683,14 @@
       </p:sp>
       <p:sp>
         <p:nvSpPr>
-          <p:cNvPr id="22" name="Text 20"/>
-          <p:cNvSpPr/>
-          <p:nvPr/>
-        </p:nvSpPr>
-        <p:spPr>
-          <a:xfrm>
-            <a:off x="457200" y="3767328"/>
-            <a:ext cx="1691640" cy="329184"/>
+          <p:cNvPr id="51" name="Text"/>
+          <p:cNvSpPr/>
+          <p:nvPr/>
+        </p:nvSpPr>
+        <p:spPr>
+          <a:xfrm>
+            <a:off x="4919472" y="1968936"/>
+            <a:ext cx="1353696" cy="295656"/>
           </a:xfrm>
           <a:prstGeom prst="rect">
             <a:avLst/>
@@ -7581,7 +8706,7 @@
               <a:buNone/>
             </a:pPr>
             <a:r>
-              <a:rPr lang="en-US" sz="950" b="1" dirty="0">
+              <a:rPr lang="en-US" sz="900" b="1" dirty="0">
                 <a:solidFill>
                   <a:srgbClr val="006848"/>
                 </a:solidFill>
@@ -7589,22 +8714,22 @@
                 <a:ea typeface="Consolas" pitchFamily="34" charset="-122"/>
                 <a:cs typeface="Consolas" pitchFamily="34" charset="-120"/>
               </a:rPr>
-              <a:t>write_concern</a:t>
-            </a:r>
-            <a:endParaRPr lang="en-US" sz="950" dirty="0"/>
-          </a:p>
-        </p:txBody>
-      </p:sp>
-      <p:sp>
-        <p:nvSpPr>
-          <p:cNvPr id="23" name="Text 21"/>
-          <p:cNvSpPr/>
-          <p:nvPr/>
-        </p:nvSpPr>
-        <p:spPr>
-          <a:xfrm>
-            <a:off x="2194560" y="3767328"/>
-            <a:ext cx="2423160" cy="329184"/>
+              <a:t>log_index</a:t>
+            </a:r>
+            <a:endParaRPr lang="en-US" dirty="0"/>
+          </a:p>
+        </p:txBody>
+      </p:sp>
+      <p:sp>
+        <p:nvSpPr>
+          <p:cNvPr id="52" name="Text"/>
+          <p:cNvSpPr/>
+          <p:nvPr/>
+        </p:nvSpPr>
+        <p:spPr>
+          <a:xfrm>
+            <a:off x="6419472" y="1968936"/>
+            <a:ext cx="2377056" cy="295656"/>
           </a:xfrm>
           <a:prstGeom prst="rect">
             <a:avLst/>
@@ -7620,27 +8745,27 @@
               <a:buNone/>
             </a:pPr>
             <a:r>
-              <a:rPr lang="en-US" sz="950" dirty="0">
+              <a:rPr lang="en-US" sz="900" dirty="0">
                 <a:solidFill>
                   <a:srgbClr val="1A1A2E"/>
                 </a:solidFill>
               </a:rPr>
-              <a:t>synchronous (majority) or asynchronous (1)</a:t>
-            </a:r>
-            <a:endParaRPr lang="en-US" sz="950" dirty="0"/>
-          </a:p>
-        </p:txBody>
-      </p:sp>
-      <p:sp>
-        <p:nvSpPr>
-          <p:cNvPr id="24" name="Shape 22"/>
-          <p:cNvSpPr/>
-          <p:nvPr/>
-        </p:nvSpPr>
-        <p:spPr>
-          <a:xfrm>
-            <a:off x="365760" y="4206240"/>
-            <a:ext cx="4297680" cy="420624"/>
+              <a:t>Global monotonic counter (Raft-style)</a:t>
+            </a:r>
+            <a:endParaRPr lang="en-US" dirty="0"/>
+          </a:p>
+        </p:txBody>
+      </p:sp>
+      <p:sp>
+        <p:nvSpPr>
+          <p:cNvPr id="53" name="BG"/>
+          <p:cNvSpPr/>
+          <p:nvPr/>
+        </p:nvSpPr>
+        <p:spPr>
+          <a:xfrm>
+            <a:off x="4846320" y="2292024"/>
+            <a:ext cx="4023360" cy="350520"/>
           </a:xfrm>
           <a:prstGeom prst="rect">
             <a:avLst/>
@@ -7665,14 +8790,14 @@
       </p:sp>
       <p:sp>
         <p:nvSpPr>
-          <p:cNvPr id="25" name="Text 23"/>
-          <p:cNvSpPr/>
-          <p:nvPr/>
-        </p:nvSpPr>
-        <p:spPr>
-          <a:xfrm>
-            <a:off x="457200" y="4242816"/>
-            <a:ext cx="1691640" cy="329184"/>
+          <p:cNvPr id="54" name="Text"/>
+          <p:cNvSpPr/>
+          <p:nvPr/>
+        </p:nvSpPr>
+        <p:spPr>
+          <a:xfrm>
+            <a:off x="4919472" y="2319456"/>
+            <a:ext cx="1353696" cy="295656"/>
           </a:xfrm>
           <a:prstGeom prst="rect">
             <a:avLst/>
@@ -7688,7 +8813,7 @@
               <a:buNone/>
             </a:pPr>
             <a:r>
-              <a:rPr lang="en-US" sz="950" b="1" dirty="0">
+              <a:rPr lang="en-US" sz="900" b="1" dirty="0">
                 <a:solidFill>
                   <a:srgbClr val="006848"/>
                 </a:solidFill>
@@ -7696,22 +8821,450 @@
                 <a:ea typeface="Consolas" pitchFamily="34" charset="-122"/>
                 <a:cs typeface="Consolas" pitchFamily="34" charset="-120"/>
               </a:rPr>
+              <a:t>leader_write_time</a:t>
+            </a:r>
+            <a:endParaRPr lang="en-US" dirty="0"/>
+          </a:p>
+        </p:txBody>
+      </p:sp>
+      <p:sp>
+        <p:nvSpPr>
+          <p:cNvPr id="55" name="Text"/>
+          <p:cNvSpPr/>
+          <p:nvPr/>
+        </p:nvSpPr>
+        <p:spPr>
+          <a:xfrm>
+            <a:off x="6419472" y="2319456"/>
+            <a:ext cx="2377056" cy="295656"/>
+          </a:xfrm>
+          <a:prstGeom prst="rect">
+            <a:avLst/>
+          </a:prstGeom>
+          <a:noFill/>
+          <a:ln/>
+        </p:spPr>
+        <p:txBody>
+          <a:bodyPr wrap="square" lIns="0" tIns="0" rIns="0" bIns="0" rtlCol="0" anchor="ctr"/>
+          <a:lstStyle/>
+          <a:p>
+            <a:pPr marL="0" indent="0">
+              <a:buNone/>
+            </a:pPr>
+            <a:r>
+              <a:rPr lang="en-US" sz="900" dirty="0">
+                <a:solidFill>
+                  <a:srgbClr val="1A1A2E"/>
+                </a:solidFill>
+              </a:rPr>
+              <a:t>UTC — when PRIMARY committed</a:t>
+            </a:r>
+            <a:endParaRPr lang="en-US" dirty="0"/>
+          </a:p>
+        </p:txBody>
+      </p:sp>
+      <p:sp>
+        <p:nvSpPr>
+          <p:cNvPr id="56" name="BG"/>
+          <p:cNvSpPr/>
+          <p:nvPr/>
+        </p:nvSpPr>
+        <p:spPr>
+          <a:xfrm>
+            <a:off x="4846320" y="2642544"/>
+            <a:ext cx="4023360" cy="350520"/>
+          </a:xfrm>
+          <a:prstGeom prst="rect">
+            <a:avLst/>
+          </a:prstGeom>
+          <a:solidFill>
+            <a:srgbClr val="FFFFFF"/>
+          </a:solidFill>
+          <a:ln w="6350">
+            <a:solidFill>
+              <a:srgbClr val="E2E8F0"/>
+            </a:solidFill>
+            <a:prstDash val="solid"/>
+          </a:ln>
+        </p:spPr>
+        <p:txBody>
+          <a:bodyPr/>
+          <a:lstStyle/>
+          <a:p>
+            <a:endParaRPr lang="en-TR"/>
+          </a:p>
+        </p:txBody>
+      </p:sp>
+      <p:sp>
+        <p:nvSpPr>
+          <p:cNvPr id="57" name="Text"/>
+          <p:cNvSpPr/>
+          <p:nvPr/>
+        </p:nvSpPr>
+        <p:spPr>
+          <a:xfrm>
+            <a:off x="4919472" y="2669976"/>
+            <a:ext cx="1353696" cy="295656"/>
+          </a:xfrm>
+          <a:prstGeom prst="rect">
+            <a:avLst/>
+          </a:prstGeom>
+          <a:noFill/>
+          <a:ln/>
+        </p:spPr>
+        <p:txBody>
+          <a:bodyPr wrap="square" lIns="0" tIns="0" rIns="0" bIns="0" rtlCol="0" anchor="ctr"/>
+          <a:lstStyle/>
+          <a:p>
+            <a:pPr marL="0" indent="0">
+              <a:buNone/>
+            </a:pPr>
+            <a:r>
+              <a:rPr lang="en-US" sz="900" b="1" dirty="0">
+                <a:solidFill>
+                  <a:srgbClr val="006848"/>
+                </a:solidFill>
+                <a:latin typeface="Consolas" pitchFamily="34" charset="0"/>
+                <a:ea typeface="Consolas" pitchFamily="34" charset="-122"/>
+                <a:cs typeface="Consolas" pitchFamily="34" charset="-120"/>
+              </a:rPr>
+              <a:t>follower_visible_time</a:t>
+            </a:r>
+            <a:endParaRPr lang="en-US" dirty="0"/>
+          </a:p>
+        </p:txBody>
+      </p:sp>
+      <p:sp>
+        <p:nvSpPr>
+          <p:cNvPr id="58" name="Text"/>
+          <p:cNvSpPr/>
+          <p:nvPr/>
+        </p:nvSpPr>
+        <p:spPr>
+          <a:xfrm>
+            <a:off x="6419472" y="2669976"/>
+            <a:ext cx="2377056" cy="295656"/>
+          </a:xfrm>
+          <a:prstGeom prst="rect">
+            <a:avLst/>
+          </a:prstGeom>
+          <a:noFill/>
+          <a:ln/>
+        </p:spPr>
+        <p:txBody>
+          <a:bodyPr wrap="square" lIns="0" tIns="0" rIns="0" bIns="0" rtlCol="0" anchor="ctr"/>
+          <a:lstStyle/>
+          <a:p>
+            <a:pPr marL="0" indent="0">
+              <a:buNone/>
+            </a:pPr>
+            <a:r>
+              <a:rPr lang="en-US" sz="900" dirty="0">
+                <a:solidFill>
+                  <a:srgbClr val="1A1A2E"/>
+                </a:solidFill>
+              </a:rPr>
+              <a:t>UTC — when SECONDARY showed version_after</a:t>
+            </a:r>
+            <a:endParaRPr lang="en-US" dirty="0"/>
+          </a:p>
+        </p:txBody>
+      </p:sp>
+      <p:sp>
+        <p:nvSpPr>
+          <p:cNvPr id="59" name="BG"/>
+          <p:cNvSpPr/>
+          <p:nvPr/>
+        </p:nvSpPr>
+        <p:spPr>
+          <a:xfrm>
+            <a:off x="4846320" y="2993064"/>
+            <a:ext cx="4023360" cy="350520"/>
+          </a:xfrm>
+          <a:prstGeom prst="rect">
+            <a:avLst/>
+          </a:prstGeom>
+          <a:solidFill>
+            <a:srgbClr val="E8F5F0"/>
+          </a:solidFill>
+          <a:ln w="6350">
+            <a:solidFill>
+              <a:srgbClr val="E2E8F0"/>
+            </a:solidFill>
+            <a:prstDash val="solid"/>
+          </a:ln>
+        </p:spPr>
+        <p:txBody>
+          <a:bodyPr/>
+          <a:lstStyle/>
+          <a:p>
+            <a:endParaRPr lang="en-TR"/>
+          </a:p>
+        </p:txBody>
+      </p:sp>
+      <p:sp>
+        <p:nvSpPr>
+          <p:cNvPr id="60" name="Text"/>
+          <p:cNvSpPr/>
+          <p:nvPr/>
+        </p:nvSpPr>
+        <p:spPr>
+          <a:xfrm>
+            <a:off x="4919472" y="3020496"/>
+            <a:ext cx="1353696" cy="295656"/>
+          </a:xfrm>
+          <a:prstGeom prst="rect">
+            <a:avLst/>
+          </a:prstGeom>
+          <a:noFill/>
+          <a:ln/>
+        </p:spPr>
+        <p:txBody>
+          <a:bodyPr wrap="square" lIns="0" tIns="0" rIns="0" bIns="0" rtlCol="0" anchor="ctr"/>
+          <a:lstStyle/>
+          <a:p>
+            <a:pPr marL="0" indent="0">
+              <a:buNone/>
+            </a:pPr>
+            <a:r>
+              <a:rPr lang="en-US" sz="900" b="1" dirty="0">
+                <a:solidFill>
+                  <a:srgbClr val="006848"/>
+                </a:solidFill>
+                <a:latin typeface="Consolas" pitchFamily="34" charset="0"/>
+                <a:ea typeface="Consolas" pitchFamily="34" charset="-122"/>
+                <a:cs typeface="Consolas" pitchFamily="34" charset="-120"/>
+              </a:rPr>
+              <a:t>replication_delay_ms</a:t>
+            </a:r>
+            <a:endParaRPr lang="en-US" dirty="0"/>
+          </a:p>
+        </p:txBody>
+      </p:sp>
+      <p:sp>
+        <p:nvSpPr>
+          <p:cNvPr id="61" name="Text"/>
+          <p:cNvSpPr/>
+          <p:nvPr/>
+        </p:nvSpPr>
+        <p:spPr>
+          <a:xfrm>
+            <a:off x="6419472" y="3020496"/>
+            <a:ext cx="2377056" cy="295656"/>
+          </a:xfrm>
+          <a:prstGeom prst="rect">
+            <a:avLst/>
+          </a:prstGeom>
+          <a:noFill/>
+          <a:ln/>
+        </p:spPr>
+        <p:txBody>
+          <a:bodyPr wrap="square" lIns="0" tIns="0" rIns="0" bIns="0" rtlCol="0" anchor="ctr"/>
+          <a:lstStyle/>
+          <a:p>
+            <a:pPr marL="0" indent="0">
+              <a:buNone/>
+            </a:pPr>
+            <a:r>
+              <a:rPr lang="en-US" sz="900" dirty="0">
+                <a:solidFill>
+                  <a:srgbClr val="1A1A2E"/>
+                </a:solidFill>
+              </a:rPr>
+              <a:t>follower_visible_time − leader_write_time</a:t>
+            </a:r>
+            <a:endParaRPr lang="en-US" dirty="0"/>
+          </a:p>
+        </p:txBody>
+      </p:sp>
+      <p:sp>
+        <p:nvSpPr>
+          <p:cNvPr id="62" name="BG"/>
+          <p:cNvSpPr/>
+          <p:nvPr/>
+        </p:nvSpPr>
+        <p:spPr>
+          <a:xfrm>
+            <a:off x="4846320" y="3343584"/>
+            <a:ext cx="4023360" cy="350520"/>
+          </a:xfrm>
+          <a:prstGeom prst="rect">
+            <a:avLst/>
+          </a:prstGeom>
+          <a:solidFill>
+            <a:srgbClr val="FFFFFF"/>
+          </a:solidFill>
+          <a:ln w="6350">
+            <a:solidFill>
+              <a:srgbClr val="E2E8F0"/>
+            </a:solidFill>
+            <a:prstDash val="solid"/>
+          </a:ln>
+        </p:spPr>
+        <p:txBody>
+          <a:bodyPr/>
+          <a:lstStyle/>
+          <a:p>
+            <a:endParaRPr lang="en-TR"/>
+          </a:p>
+        </p:txBody>
+      </p:sp>
+      <p:sp>
+        <p:nvSpPr>
+          <p:cNvPr id="63" name="Text"/>
+          <p:cNvSpPr/>
+          <p:nvPr/>
+        </p:nvSpPr>
+        <p:spPr>
+          <a:xfrm>
+            <a:off x="4919472" y="3371016"/>
+            <a:ext cx="1353696" cy="295656"/>
+          </a:xfrm>
+          <a:prstGeom prst="rect">
+            <a:avLst/>
+          </a:prstGeom>
+          <a:noFill/>
+          <a:ln/>
+        </p:spPr>
+        <p:txBody>
+          <a:bodyPr wrap="square" lIns="0" tIns="0" rIns="0" bIns="0" rtlCol="0" anchor="ctr"/>
+          <a:lstStyle/>
+          <a:p>
+            <a:pPr marL="0" indent="0">
+              <a:buNone/>
+            </a:pPr>
+            <a:r>
+              <a:rPr lang="en-US" sz="900" b="1" dirty="0">
+                <a:solidFill>
+                  <a:srgbClr val="006848"/>
+                </a:solidFill>
+                <a:latin typeface="Consolas" pitchFamily="34" charset="0"/>
+                <a:ea typeface="Consolas" pitchFamily="34" charset="-122"/>
+                <a:cs typeface="Consolas" pitchFamily="34" charset="-120"/>
+              </a:rPr>
+              <a:t>version_before / after</a:t>
+            </a:r>
+            <a:endParaRPr lang="en-US" dirty="0"/>
+          </a:p>
+        </p:txBody>
+      </p:sp>
+      <p:sp>
+        <p:nvSpPr>
+          <p:cNvPr id="64" name="Text"/>
+          <p:cNvSpPr/>
+          <p:nvPr/>
+        </p:nvSpPr>
+        <p:spPr>
+          <a:xfrm>
+            <a:off x="6419472" y="3371016"/>
+            <a:ext cx="2377056" cy="295656"/>
+          </a:xfrm>
+          <a:prstGeom prst="rect">
+            <a:avLst/>
+          </a:prstGeom>
+          <a:noFill/>
+          <a:ln/>
+        </p:spPr>
+        <p:txBody>
+          <a:bodyPr wrap="square" lIns="0" tIns="0" rIns="0" bIns="0" rtlCol="0" anchor="ctr"/>
+          <a:lstStyle/>
+          <a:p>
+            <a:pPr marL="0" indent="0">
+              <a:buNone/>
+            </a:pPr>
+            <a:r>
+              <a:rPr lang="en-US" sz="900" dirty="0">
+                <a:solidFill>
+                  <a:srgbClr val="1A1A2E"/>
+                </a:solidFill>
+              </a:rPr>
+              <a:t>Document version before and after write</a:t>
+            </a:r>
+            <a:endParaRPr lang="en-US" dirty="0"/>
+          </a:p>
+        </p:txBody>
+      </p:sp>
+      <p:sp>
+        <p:nvSpPr>
+          <p:cNvPr id="65" name="BG"/>
+          <p:cNvSpPr/>
+          <p:nvPr/>
+        </p:nvSpPr>
+        <p:spPr>
+          <a:xfrm>
+            <a:off x="4846320" y="3694104"/>
+            <a:ext cx="4023360" cy="350520"/>
+          </a:xfrm>
+          <a:prstGeom prst="rect">
+            <a:avLst/>
+          </a:prstGeom>
+          <a:solidFill>
+            <a:srgbClr val="E8F5F0"/>
+          </a:solidFill>
+          <a:ln w="6350">
+            <a:solidFill>
+              <a:srgbClr val="E2E8F0"/>
+            </a:solidFill>
+            <a:prstDash val="solid"/>
+          </a:ln>
+        </p:spPr>
+        <p:txBody>
+          <a:bodyPr/>
+          <a:lstStyle/>
+          <a:p>
+            <a:endParaRPr lang="en-TR"/>
+          </a:p>
+        </p:txBody>
+      </p:sp>
+      <p:sp>
+        <p:nvSpPr>
+          <p:cNvPr id="66" name="Text"/>
+          <p:cNvSpPr/>
+          <p:nvPr/>
+        </p:nvSpPr>
+        <p:spPr>
+          <a:xfrm>
+            <a:off x="4919472" y="3721536"/>
+            <a:ext cx="1353696" cy="295656"/>
+          </a:xfrm>
+          <a:prstGeom prst="rect">
+            <a:avLst/>
+          </a:prstGeom>
+          <a:noFill/>
+          <a:ln/>
+        </p:spPr>
+        <p:txBody>
+          <a:bodyPr wrap="square" lIns="0" tIns="0" rIns="0" bIns="0" rtlCol="0" anchor="ctr"/>
+          <a:lstStyle/>
+          <a:p>
+            <a:pPr marL="0" indent="0">
+              <a:buNone/>
+            </a:pPr>
+            <a:r>
+              <a:rPr lang="en-US" sz="900" b="1" dirty="0">
+                <a:solidFill>
+                  <a:srgbClr val="006848"/>
+                </a:solidFill>
+                <a:latin typeface="Consolas" pitchFamily="34" charset="0"/>
+                <a:ea typeface="Consolas" pitchFamily="34" charset="-122"/>
+                <a:cs typeface="Consolas" pitchFamily="34" charset="-120"/>
+              </a:rPr>
               <a:t>status</a:t>
             </a:r>
-            <a:endParaRPr lang="en-US" sz="950" dirty="0"/>
-          </a:p>
-        </p:txBody>
-      </p:sp>
-      <p:sp>
-        <p:nvSpPr>
-          <p:cNvPr id="26" name="Text 24"/>
-          <p:cNvSpPr/>
-          <p:nvPr/>
-        </p:nvSpPr>
-        <p:spPr>
-          <a:xfrm>
-            <a:off x="2194560" y="4242816"/>
-            <a:ext cx="2423160" cy="329184"/>
+            <a:endParaRPr lang="en-US" dirty="0"/>
+          </a:p>
+        </p:txBody>
+      </p:sp>
+      <p:sp>
+        <p:nvSpPr>
+          <p:cNvPr id="67" name="Text"/>
+          <p:cNvSpPr/>
+          <p:nvPr/>
+        </p:nvSpPr>
+        <p:spPr>
+          <a:xfrm>
+            <a:off x="6419472" y="3721536"/>
+            <a:ext cx="2377056" cy="295656"/>
           </a:xfrm>
           <a:prstGeom prst="rect">
             <a:avLst/>
@@ -7727,27 +9280,59 @@
               <a:buNone/>
             </a:pPr>
             <a:r>
-              <a:rPr lang="en-US" sz="950" dirty="0">
+              <a:rPr lang="en-US" sz="900" dirty="0">
                 <a:solidFill>
                   <a:srgbClr val="1A1A2E"/>
                 </a:solidFill>
               </a:rPr>
-              <a:t>pending_follower → visible_on_follower / timeout</a:t>
-            </a:r>
-            <a:endParaRPr lang="en-US" sz="950" dirty="0"/>
-          </a:p>
-        </p:txBody>
-      </p:sp>
-      <p:sp>
-        <p:nvSpPr>
-          <p:cNvPr id="27" name="Text 25"/>
-          <p:cNvSpPr/>
-          <p:nvPr/>
-        </p:nvSpPr>
-        <p:spPr>
-          <a:xfrm>
-            <a:off x="5029200" y="1005840"/>
-            <a:ext cx="3749040" cy="292608"/>
+              <a:t>pending_follower  →  visible_on_follower / timeout</a:t>
+            </a:r>
+            <a:endParaRPr lang="en-US" dirty="0"/>
+          </a:p>
+        </p:txBody>
+      </p:sp>
+      <p:sp>
+        <p:nvSpPr>
+          <p:cNvPr id="68" name="BG"/>
+          <p:cNvSpPr/>
+          <p:nvPr/>
+        </p:nvSpPr>
+        <p:spPr>
+          <a:xfrm>
+            <a:off x="4846320" y="4044624"/>
+            <a:ext cx="4023360" cy="350520"/>
+          </a:xfrm>
+          <a:prstGeom prst="rect">
+            <a:avLst/>
+          </a:prstGeom>
+          <a:solidFill>
+            <a:srgbClr val="FFFFFF"/>
+          </a:solidFill>
+          <a:ln w="6350">
+            <a:solidFill>
+              <a:srgbClr val="E2E8F0"/>
+            </a:solidFill>
+            <a:prstDash val="solid"/>
+          </a:ln>
+        </p:spPr>
+        <p:txBody>
+          <a:bodyPr/>
+          <a:lstStyle/>
+          <a:p>
+            <a:endParaRPr lang="en-TR"/>
+          </a:p>
+        </p:txBody>
+      </p:sp>
+      <p:sp>
+        <p:nvSpPr>
+          <p:cNvPr id="69" name="Text"/>
+          <p:cNvSpPr/>
+          <p:nvPr/>
+        </p:nvSpPr>
+        <p:spPr>
+          <a:xfrm>
+            <a:off x="4919472" y="4072056"/>
+            <a:ext cx="1353696" cy="295656"/>
           </a:xfrm>
           <a:prstGeom prst="rect">
             <a:avLst/>
@@ -7763,27 +9348,66 @@
               <a:buNone/>
             </a:pPr>
             <a:r>
-              <a:rPr lang="en-US" sz="1300" b="1" dirty="0">
+              <a:rPr lang="en-US" sz="900" b="1" dirty="0">
                 <a:solidFill>
                   <a:srgbClr val="006848"/>
                 </a:solidFill>
-              </a:rPr>
-              <a:t>Log Entry Lifecycle</a:t>
-            </a:r>
-            <a:endParaRPr lang="en-US" sz="1300" dirty="0"/>
-          </a:p>
-        </p:txBody>
-      </p:sp>
-      <p:sp>
-        <p:nvSpPr>
-          <p:cNvPr id="28" name="Shape 26"/>
-          <p:cNvSpPr/>
-          <p:nvPr/>
-        </p:nvSpPr>
-        <p:spPr>
-          <a:xfrm>
-            <a:off x="5486400" y="1389888"/>
-            <a:ext cx="2743200" cy="640080"/>
+                <a:latin typeface="Consolas" pitchFamily="34" charset="0"/>
+                <a:ea typeface="Consolas" pitchFamily="34" charset="-122"/>
+                <a:cs typeface="Consolas" pitchFamily="34" charset="-120"/>
+              </a:rPr>
+              <a:t>write_concern</a:t>
+            </a:r>
+            <a:endParaRPr lang="en-US" dirty="0"/>
+          </a:p>
+        </p:txBody>
+      </p:sp>
+      <p:sp>
+        <p:nvSpPr>
+          <p:cNvPr id="70" name="Text"/>
+          <p:cNvSpPr/>
+          <p:nvPr/>
+        </p:nvSpPr>
+        <p:spPr>
+          <a:xfrm>
+            <a:off x="6419472" y="4072056"/>
+            <a:ext cx="2377056" cy="295656"/>
+          </a:xfrm>
+          <a:prstGeom prst="rect">
+            <a:avLst/>
+          </a:prstGeom>
+          <a:noFill/>
+          <a:ln/>
+        </p:spPr>
+        <p:txBody>
+          <a:bodyPr wrap="square" lIns="0" tIns="0" rIns="0" bIns="0" rtlCol="0" anchor="ctr"/>
+          <a:lstStyle/>
+          <a:p>
+            <a:pPr marL="0" indent="0">
+              <a:buNone/>
+            </a:pPr>
+            <a:r>
+              <a:rPr lang="en-US" sz="900" dirty="0">
+                <a:solidFill>
+                  <a:srgbClr val="1A1A2E"/>
+                </a:solidFill>
+              </a:rPr>
+              <a:t>majority (sync) or 1 (async)</a:t>
+            </a:r>
+            <a:endParaRPr lang="en-US" dirty="0"/>
+          </a:p>
+        </p:txBody>
+      </p:sp>
+      <p:sp>
+        <p:nvSpPr>
+          <p:cNvPr id="71" name="BG"/>
+          <p:cNvSpPr/>
+          <p:nvPr/>
+        </p:nvSpPr>
+        <p:spPr>
+          <a:xfrm>
+            <a:off x="4846320" y="4431720"/>
+            <a:ext cx="4023360" cy="620340"/>
           </a:xfrm>
           <a:prstGeom prst="rect">
             <a:avLst/>
@@ -7791,19 +9415,12 @@
           <a:solidFill>
             <a:srgbClr val="FEF3C7"/>
           </a:solidFill>
-          <a:ln w="19050">
+          <a:ln w="12700">
             <a:solidFill>
               <a:srgbClr val="D97706"/>
             </a:solidFill>
             <a:prstDash val="solid"/>
           </a:ln>
-          <a:effectLst>
-            <a:outerShdw blurRad="101600" dist="38100" dir="8100000" algn="bl" rotWithShape="0">
-              <a:srgbClr val="000000">
-                <a:alpha val="10000"/>
-              </a:srgbClr>
-            </a:outerShdw>
-          </a:effectLst>
         </p:spPr>
         <p:txBody>
           <a:bodyPr/>
@@ -7815,30 +9432,38 @@
       </p:sp>
       <p:sp>
         <p:nvSpPr>
-          <p:cNvPr id="29" name="Text 27"/>
-          <p:cNvSpPr/>
-          <p:nvPr/>
-        </p:nvSpPr>
-        <p:spPr>
-          <a:xfrm>
-            <a:off x="5486400" y="1389888"/>
-            <a:ext cx="2743200" cy="640080"/>
-          </a:xfrm>
-          <a:prstGeom prst="rect">
-            <a:avLst/>
-          </a:prstGeom>
-          <a:noFill/>
-          <a:ln/>
-        </p:spPr>
-        <p:txBody>
-          <a:bodyPr wrap="square" lIns="0" tIns="0" rIns="0" bIns="0" rtlCol="0" anchor="ctr"/>
-          <a:lstStyle/>
-          <a:p>
-            <a:pPr marL="0" indent="0" algn="ctr">
-              <a:buNone/>
-            </a:pPr>
-            <a:r>
-              <a:rPr lang="en-US" sz="1200" b="1" dirty="0">
+          <p:cNvPr id="72" name="Text"/>
+          <p:cNvSpPr/>
+          <p:nvPr/>
+        </p:nvSpPr>
+        <p:spPr>
+          <a:xfrm>
+            <a:off x="4919472" y="4459152"/>
+            <a:ext cx="3877056" cy="565476"/>
+          </a:xfrm>
+          <a:prstGeom prst="rect">
+            <a:avLst/>
+          </a:prstGeom>
+          <a:noFill/>
+          <a:ln/>
+        </p:spPr>
+        <p:txBody>
+          <a:bodyPr wrap="square" lIns="0" tIns="0" rIns="0" bIns="0" rtlCol="0" anchor="ctr"/>
+          <a:lstStyle/>
+          <a:p>
+            <a:pPr marL="0" indent="0">
+              <a:buNone/>
+            </a:pPr>
+            <a:r>
+              <a:rPr lang="en-US" sz="970" b="1" dirty="0">
+                <a:solidFill>
+                  <a:srgbClr val="D97706"/>
+                </a:solidFill>
+              </a:rPr>
+              <a:t>Log lifecycle: </a:t>
+            </a:r>
+            <a:r>
+              <a:rPr lang="en-US" sz="970" dirty="0">
                 <a:solidFill>
                   <a:srgbClr val="D97706"/>
                 </a:solidFill>
@@ -7848,141 +9473,16 @@
               </a:rPr>
               <a:t>pending_follower</a:t>
             </a:r>
-            <a:endParaRPr lang="en-US" sz="1200" dirty="0"/>
-          </a:p>
-        </p:txBody>
-      </p:sp>
-      <p:sp>
-        <p:nvSpPr>
-          <p:cNvPr id="30" name="Shape 28"/>
-          <p:cNvSpPr/>
-          <p:nvPr/>
-        </p:nvSpPr>
-        <p:spPr>
-          <a:xfrm>
-            <a:off x="6858000" y="2029968"/>
-            <a:ext cx="0" cy="365760"/>
-          </a:xfrm>
-          <a:prstGeom prst="line">
-            <a:avLst/>
-          </a:prstGeom>
-          <a:noFill/>
-          <a:ln w="19050">
-            <a:solidFill>
-              <a:srgbClr val="006848"/>
-            </a:solidFill>
-            <a:prstDash val="solid"/>
-          </a:ln>
-        </p:spPr>
-        <p:txBody>
-          <a:bodyPr/>
-          <a:lstStyle/>
-          <a:p>
-            <a:endParaRPr lang="en-TR"/>
-          </a:p>
-        </p:txBody>
-      </p:sp>
-      <p:sp>
-        <p:nvSpPr>
-          <p:cNvPr id="31" name="Text 29"/>
-          <p:cNvSpPr/>
-          <p:nvPr/>
-        </p:nvSpPr>
-        <p:spPr>
-          <a:xfrm>
-            <a:off x="4800600" y="2075688"/>
-            <a:ext cx="1920240" cy="329184"/>
-          </a:xfrm>
-          <a:prstGeom prst="rect">
-            <a:avLst/>
-          </a:prstGeom>
-          <a:noFill/>
-          <a:ln/>
-        </p:spPr>
-        <p:txBody>
-          <a:bodyPr wrap="square" lIns="0" tIns="0" rIns="0" bIns="0" rtlCol="0" anchor="ctr"/>
-          <a:lstStyle/>
-          <a:p>
-            <a:pPr marL="0" indent="0" algn="r">
-              <a:buNone/>
-            </a:pPr>
-            <a:r>
-              <a:rPr lang="en-US" sz="850" dirty="0">
+            <a:r>
+              <a:rPr lang="en-US" sz="970" b="1" dirty="0">
                 <a:solidFill>
                   <a:srgbClr val="006848"/>
                 </a:solidFill>
               </a:rPr>
-              <a:t>secondary.version ≥ version_after</a:t>
-            </a:r>
-            <a:endParaRPr lang="en-US" sz="850" dirty="0"/>
-          </a:p>
-        </p:txBody>
-      </p:sp>
-      <p:sp>
-        <p:nvSpPr>
-          <p:cNvPr id="32" name="Shape 30"/>
-          <p:cNvSpPr/>
-          <p:nvPr/>
-        </p:nvSpPr>
-        <p:spPr>
-          <a:xfrm>
-            <a:off x="5486400" y="2395728"/>
-            <a:ext cx="2743200" cy="640080"/>
-          </a:xfrm>
-          <a:prstGeom prst="rect">
-            <a:avLst/>
-          </a:prstGeom>
-          <a:solidFill>
-            <a:srgbClr val="ECFDF5"/>
-          </a:solidFill>
-          <a:ln w="19050">
-            <a:solidFill>
-              <a:srgbClr val="006848"/>
-            </a:solidFill>
-            <a:prstDash val="solid"/>
-          </a:ln>
-          <a:effectLst>
-            <a:outerShdw blurRad="101600" dist="38100" dir="8100000" algn="bl" rotWithShape="0">
-              <a:srgbClr val="000000">
-                <a:alpha val="10000"/>
-              </a:srgbClr>
-            </a:outerShdw>
-          </a:effectLst>
-        </p:spPr>
-        <p:txBody>
-          <a:bodyPr/>
-          <a:lstStyle/>
-          <a:p>
-            <a:endParaRPr lang="en-TR"/>
-          </a:p>
-        </p:txBody>
-      </p:sp>
-      <p:sp>
-        <p:nvSpPr>
-          <p:cNvPr id="33" name="Text 31"/>
-          <p:cNvSpPr/>
-          <p:nvPr/>
-        </p:nvSpPr>
-        <p:spPr>
-          <a:xfrm>
-            <a:off x="5486400" y="2395728"/>
-            <a:ext cx="2743200" cy="640080"/>
-          </a:xfrm>
-          <a:prstGeom prst="rect">
-            <a:avLst/>
-          </a:prstGeom>
-          <a:noFill/>
-          <a:ln/>
-        </p:spPr>
-        <p:txBody>
-          <a:bodyPr wrap="square" lIns="0" tIns="0" rIns="0" bIns="0" rtlCol="0" anchor="ctr"/>
-          <a:lstStyle/>
-          <a:p>
-            <a:pPr marL="0" indent="0" algn="ctr">
-              <a:buNone/>
-            </a:pPr>
-            <a:r>
-              <a:rPr lang="en-US" sz="1200" b="1" dirty="0">
+              <a:t>  →  </a:t>
+            </a:r>
+            <a:r>
+              <a:rPr lang="en-US" sz="970" dirty="0">
                 <a:solidFill>
                   <a:srgbClr val="006848"/>
                 </a:solidFill>
@@ -7992,141 +9492,16 @@
               </a:rPr>
               <a:t>visible_on_follower</a:t>
             </a:r>
-            <a:endParaRPr lang="en-US" sz="1200" dirty="0"/>
-          </a:p>
-        </p:txBody>
-      </p:sp>
-      <p:sp>
-        <p:nvSpPr>
-          <p:cNvPr id="34" name="Shape 32"/>
-          <p:cNvSpPr/>
-          <p:nvPr/>
-        </p:nvSpPr>
-        <p:spPr>
-          <a:xfrm>
-            <a:off x="8229600" y="1709928"/>
-            <a:ext cx="365760" cy="0"/>
-          </a:xfrm>
-          <a:prstGeom prst="line">
-            <a:avLst/>
-          </a:prstGeom>
-          <a:noFill/>
-          <a:ln w="19050">
-            <a:solidFill>
-              <a:srgbClr val="DC2626"/>
-            </a:solidFill>
-            <a:prstDash val="dash"/>
-          </a:ln>
-        </p:spPr>
-        <p:txBody>
-          <a:bodyPr/>
-          <a:lstStyle/>
-          <a:p>
-            <a:endParaRPr lang="en-TR"/>
-          </a:p>
-        </p:txBody>
-      </p:sp>
-      <p:sp>
-        <p:nvSpPr>
-          <p:cNvPr id="35" name="Text 33"/>
-          <p:cNvSpPr/>
-          <p:nvPr/>
-        </p:nvSpPr>
-        <p:spPr>
-          <a:xfrm>
-            <a:off x="8275320" y="1417320"/>
-            <a:ext cx="1371600" cy="256032"/>
-          </a:xfrm>
-          <a:prstGeom prst="rect">
-            <a:avLst/>
-          </a:prstGeom>
-          <a:noFill/>
-          <a:ln/>
-        </p:spPr>
-        <p:txBody>
-          <a:bodyPr wrap="square" lIns="0" tIns="0" rIns="0" bIns="0" rtlCol="0" anchor="ctr"/>
-          <a:lstStyle/>
-          <a:p>
-            <a:pPr marL="0" indent="0">
-              <a:buNone/>
-            </a:pPr>
-            <a:r>
-              <a:rPr lang="en-US" sz="800" dirty="0">
-                <a:solidFill>
-                  <a:srgbClr val="DC2626"/>
-                </a:solidFill>
-              </a:rPr>
-              <a:t>poll timeout (5 s)</a:t>
-            </a:r>
-            <a:endParaRPr lang="en-US" sz="800" dirty="0"/>
-          </a:p>
-        </p:txBody>
-      </p:sp>
-      <p:sp>
-        <p:nvSpPr>
-          <p:cNvPr id="36" name="Shape 34"/>
-          <p:cNvSpPr/>
-          <p:nvPr/>
-        </p:nvSpPr>
-        <p:spPr>
-          <a:xfrm>
-            <a:off x="5486400" y="3291840"/>
-            <a:ext cx="2743200" cy="548640"/>
-          </a:xfrm>
-          <a:prstGeom prst="rect">
-            <a:avLst/>
-          </a:prstGeom>
-          <a:solidFill>
-            <a:srgbClr val="FEE2E2"/>
-          </a:solidFill>
-          <a:ln w="12700">
-            <a:solidFill>
-              <a:srgbClr val="DC2626"/>
-            </a:solidFill>
-            <a:prstDash val="solid"/>
-          </a:ln>
-          <a:effectLst>
-            <a:outerShdw blurRad="101600" dist="38100" dir="8100000" algn="bl" rotWithShape="0">
-              <a:srgbClr val="000000">
-                <a:alpha val="10000"/>
-              </a:srgbClr>
-            </a:outerShdw>
-          </a:effectLst>
-        </p:spPr>
-        <p:txBody>
-          <a:bodyPr/>
-          <a:lstStyle/>
-          <a:p>
-            <a:endParaRPr lang="en-TR"/>
-          </a:p>
-        </p:txBody>
-      </p:sp>
-      <p:sp>
-        <p:nvSpPr>
-          <p:cNvPr id="37" name="Text 35"/>
-          <p:cNvSpPr/>
-          <p:nvPr/>
-        </p:nvSpPr>
-        <p:spPr>
-          <a:xfrm>
-            <a:off x="5486400" y="3291840"/>
-            <a:ext cx="2743200" cy="548640"/>
-          </a:xfrm>
-          <a:prstGeom prst="rect">
-            <a:avLst/>
-          </a:prstGeom>
-          <a:noFill/>
-          <a:ln/>
-        </p:spPr>
-        <p:txBody>
-          <a:bodyPr wrap="square" lIns="0" tIns="0" rIns="0" bIns="0" rtlCol="0" anchor="ctr"/>
-          <a:lstStyle/>
-          <a:p>
-            <a:pPr marL="0" indent="0" algn="ctr">
-              <a:buNone/>
-            </a:pPr>
-            <a:r>
-              <a:rPr lang="en-US" sz="1050" dirty="0">
+            <a:r>
+              <a:rPr lang="en-US" sz="970" dirty="0">
+                <a:solidFill>
+                  <a:srgbClr val="1A1A2E"/>
+                </a:solidFill>
+              </a:rPr>
+              <a:t>   or   </a:t>
+            </a:r>
+            <a:r>
+              <a:rPr lang="en-US" sz="970" dirty="0">
                 <a:solidFill>
                   <a:srgbClr val="DC2626"/>
                 </a:solidFill>
@@ -8134,168 +9509,17 @@
                 <a:ea typeface="Consolas" pitchFamily="34" charset="-122"/>
                 <a:cs typeface="Consolas" pitchFamily="34" charset="-120"/>
               </a:rPr>
-              <a:t>timeout → reconciler retries</a:t>
-            </a:r>
-            <a:endParaRPr lang="en-US" sz="1050" dirty="0"/>
-          </a:p>
-        </p:txBody>
-      </p:sp>
-      <p:sp>
-        <p:nvSpPr>
-          <p:cNvPr id="38" name="Shape 36"/>
-          <p:cNvSpPr/>
-          <p:nvPr/>
-        </p:nvSpPr>
-        <p:spPr>
-          <a:xfrm>
-            <a:off x="6858000" y="3035808"/>
-            <a:ext cx="0" cy="256032"/>
-          </a:xfrm>
-          <a:prstGeom prst="line">
-            <a:avLst/>
-          </a:prstGeom>
-          <a:noFill/>
-          <a:ln w="12700">
-            <a:solidFill>
-              <a:srgbClr val="DC2626"/>
-            </a:solidFill>
-            <a:prstDash val="dash"/>
-          </a:ln>
-        </p:spPr>
-        <p:txBody>
-          <a:bodyPr/>
-          <a:lstStyle/>
-          <a:p>
-            <a:endParaRPr lang="en-TR"/>
-          </a:p>
-        </p:txBody>
-      </p:sp>
-      <p:sp>
-        <p:nvSpPr>
-          <p:cNvPr id="39" name="Text 37"/>
-          <p:cNvSpPr/>
-          <p:nvPr/>
-        </p:nvSpPr>
-        <p:spPr>
-          <a:xfrm>
-            <a:off x="4846320" y="3035808"/>
-            <a:ext cx="1920240" cy="256032"/>
-          </a:xfrm>
-          <a:prstGeom prst="rect">
-            <a:avLst/>
-          </a:prstGeom>
-          <a:noFill/>
-          <a:ln/>
-        </p:spPr>
-        <p:txBody>
-          <a:bodyPr wrap="square" lIns="0" tIns="0" rIns="0" bIns="0" rtlCol="0" anchor="ctr"/>
-          <a:lstStyle/>
-          <a:p>
-            <a:pPr marL="0" indent="0" algn="r">
-              <a:buNone/>
-            </a:pPr>
-            <a:r>
-              <a:rPr lang="en-US" sz="800" dirty="0">
+              <a:t>timeout</a:t>
+            </a:r>
+            <a:r>
+              <a:rPr lang="en-US" sz="970" dirty="0">
                 <a:solidFill>
                   <a:srgbClr val="DC2626"/>
                 </a:solidFill>
               </a:rPr>
-              <a:t>not visible after 5s</a:t>
-            </a:r>
-            <a:endParaRPr lang="en-US" sz="800" dirty="0"/>
-          </a:p>
-        </p:txBody>
-      </p:sp>
-      <p:sp>
-        <p:nvSpPr>
-          <p:cNvPr id="40" name="Shape 38"/>
-          <p:cNvSpPr/>
-          <p:nvPr/>
-        </p:nvSpPr>
-        <p:spPr>
-          <a:xfrm>
-            <a:off x="4983480" y="4023360"/>
-            <a:ext cx="3794760" cy="822960"/>
-          </a:xfrm>
-          <a:prstGeom prst="rect">
-            <a:avLst/>
-          </a:prstGeom>
-          <a:solidFill>
-            <a:srgbClr val="E8F5F0"/>
-          </a:solidFill>
-          <a:ln w="6350">
-            <a:solidFill>
-              <a:srgbClr val="006848"/>
-            </a:solidFill>
-            <a:prstDash val="solid"/>
-          </a:ln>
-        </p:spPr>
-        <p:txBody>
-          <a:bodyPr/>
-          <a:lstStyle/>
-          <a:p>
-            <a:endParaRPr lang="en-TR"/>
-          </a:p>
-        </p:txBody>
-      </p:sp>
-      <p:sp>
-        <p:nvSpPr>
-          <p:cNvPr id="41" name="Text 39"/>
-          <p:cNvSpPr/>
-          <p:nvPr/>
-        </p:nvSpPr>
-        <p:spPr>
-          <a:xfrm>
-            <a:off x="5074920" y="4041648"/>
-            <a:ext cx="3611880" cy="786384"/>
-          </a:xfrm>
-          <a:prstGeom prst="rect">
-            <a:avLst/>
-          </a:prstGeom>
-          <a:noFill/>
-          <a:ln/>
-        </p:spPr>
-        <p:txBody>
-          <a:bodyPr wrap="square" lIns="0" tIns="0" rIns="0" bIns="0" rtlCol="0" anchor="ctr"/>
-          <a:lstStyle/>
-          <a:p>
-            <a:pPr marL="0" indent="0">
-              <a:buNone/>
-            </a:pPr>
-            <a:r>
-              <a:rPr lang="en-US" sz="1050" b="1" dirty="0">
-                <a:solidFill>
-                  <a:srgbClr val="006848"/>
-                </a:solidFill>
-              </a:rPr>
-              <a:t>Synchronous: </a:t>
-            </a:r>
-            <a:r>
-              <a:rPr lang="en-US" sz="1050" dirty="0">
-                <a:solidFill>
-                  <a:srgbClr val="1A1A2E"/>
-                </a:solidFill>
-              </a:rPr>
-              <a:t>closed inline before HTTP response
-</a:t>
-            </a:r>
-            <a:r>
-              <a:rPr lang="en-US" sz="1050" b="1" dirty="0">
-                <a:solidFill>
-                  <a:srgbClr val="D97706"/>
-                </a:solidFill>
-              </a:rPr>
-              <a:t>Asynchronous: </a:t>
-            </a:r>
-            <a:r>
-              <a:rPr lang="en-US" sz="1050" dirty="0">
-                <a:solidFill>
-                  <a:srgbClr val="1A1A2E"/>
-                </a:solidFill>
-              </a:rPr>
-              <a:t>closed by background reconciler (every 1 s)</a:t>
-            </a:r>
-            <a:endParaRPr lang="en-US" sz="1050" dirty="0"/>
+              <a:t> (5 s → reconciler retries)</a:t>
+            </a:r>
+            <a:endParaRPr lang="en-US" dirty="0"/>
           </a:p>
         </p:txBody>
       </p:sp>
@@ -9818,12 +11042,12 @@
               <a:buNone/>
             </a:pPr>
             <a:r>
-              <a:rPr lang="en-US" sz="3200" b="1" dirty="0">
+              <a:rPr lang="en-US" sz="3200" b="1">
                 <a:solidFill>
                   <a:srgbClr val="D97706"/>
                 </a:solidFill>
               </a:rPr>
-              <a:t>⚡ stale</a:t>
+              <a:t>stale</a:t>
             </a:r>
             <a:endParaRPr lang="en-US" sz="3200" dirty="0"/>
           </a:p>

--- a/presentation/report_presentation.pptx
+++ b/presentation/report_presentation.pptx
@@ -1463,7 +1463,7 @@
         </p:nvSpPr>
         <p:spPr>
           <a:xfrm>
-            <a:off x="640080" y="822960"/>
+            <a:off x="640080" y="971550"/>
             <a:ext cx="7863840" cy="731520"/>
           </a:xfrm>
           <a:prstGeom prst="rect">
@@ -1866,7 +1866,7 @@
                   <a:srgbClr val="AADFC8"/>
                 </a:solidFill>
               </a:rPr>
-              <a:t>Five consistency scenarios demonstrated on real hardware — no containers, no simulated latency</a:t>
+              <a:t>Five consistency experiments on a real MongoDB replica set (PRIMARY 192.168.88.30 / SECONDARY 192.168.88.70) — real hardware, real network, real data</a:t>
             </a:r>
             <a:endParaRPr lang="en-US" sz="1200" dirty="0"/>
           </a:p>
@@ -2038,7 +2038,7 @@
                   <a:srgbClr val="D1FAE5"/>
                 </a:solidFill>
               </a:rPr>
-              <a:t>166.4 ms total write — both nodes consistent before client receives ok</a:t>
+              <a:t>SYNC-EXP inserted at Istanbul/Besiktas (positions); both nodes consistent before client receives ok</a:t>
             </a:r>
             <a:endParaRPr lang="en-US" sz="1100" dirty="0"/>
           </a:p>
@@ -2157,7 +2157,7 @@
         <p:spPr>
           <a:xfrm>
             <a:off x="960120" y="2304288"/>
-            <a:ext cx="7680960" cy="310896"/>
+            <a:ext cx="7680960" cy="267462"/>
           </a:xfrm>
           <a:prstGeom prst="rect">
             <a:avLst/>
@@ -2178,7 +2178,7 @@
                   <a:srgbClr val="D1FAE5"/>
                 </a:solidFill>
               </a:rPr>
-              <a:t>2/3 reads stale; system converges within 1163 ms (1 s artificial delay)</a:t>
+              <a:t>EC-BASE updated Ankara → Istanbul — converges within 1189 ms (secondaryDelaySecs=1 artificial delay, real oplog: 75.97 ms)</a:t>
             </a:r>
             <a:endParaRPr lang="en-US" sz="1100" dirty="0"/>
           </a:p>
@@ -2318,7 +2318,7 @@
                   <a:srgbClr val="D1FAE5"/>
                 </a:solidFill>
               </a:rPr>
-              <a:t>PRIMARY read 6.5 ms — always fresh; SECONDARY briefly stale (~3.9 ms to catch up)</a:t>
+              <a:t>PRIMARY read in 0.96 ms always fresh; RAW-EXP incident (breakdown/critical) visible on PRIMARY instantly; SECONDARY syncs within 5 ms</a:t>
             </a:r>
             <a:endParaRPr lang="en-US" sz="1100" dirty="0"/>
           </a:p>
@@ -2458,7 +2458,7 @@
                   <a:srgbClr val="D1FAE5"/>
                 </a:solidFill>
               </a:rPr>
-              <a:t>Versions [5,5,5,5,5], 0 backward reads — oplog ordering forbids regression</a:t>
+              <a:t>Versions seen [1, 2, 2, 3, 3] — never backwards; 0 regressions on MON-EXP shipment (DEP-IST → DEP-ANK); oplog ordering guarantees monotonicity</a:t>
             </a:r>
             <a:endParaRPr lang="en-US" sz="1100" dirty="0"/>
           </a:p>
@@ -2598,7 +2598,7 @@
                   <a:srgbClr val="D1FAE5"/>
                 </a:solidFill>
               </a:rPr>
-              <a:t>log_index 744–749 — write order preserved exactly on SECONDARY</a:t>
+              <a:t>4 concurrent updates to CW-SHARED (vehicles) by User A + B; PRIMARY serialised all writes; SECONDARY converged to final value in 2.5 ms, order preserved</a:t>
             </a:r>
             <a:endParaRPr lang="en-US" sz="1100" dirty="0"/>
           </a:p>
@@ -2666,7 +2666,7 @@
                   <a:srgbClr val="7DC8A8"/>
                 </a:solidFill>
               </a:rPr>
-              <a:t>The operation_logs collection makes replication delay a first-class measured metric — not an invisible side effect.</a:t>
+              <a:t>The operation_logs collection makes replication delay a first-class measured metric — not an invisible side effect of the consistency model chosen.</a:t>
             </a:r>
             <a:endParaRPr lang="en-US" sz="950" dirty="0"/>
           </a:p>
